--- a/claude work/output/presentation.pptx
+++ b/claude work/output/presentation.pptx
@@ -2038,7 +2038,7 @@
                 <a:ea typeface="Calibri" pitchFamily="34" charset="-122"/>
                 <a:cs typeface="Calibri" pitchFamily="34" charset="-120"/>
               </a:rPr>
-              <a:t>Shannon entropy increases by +0.030 nats/month in high-propensity fields post-4o (p = 0.005)</a:t>
+              <a:t>Shannon entropy increases by +0.030 nats/month in high-propensity fields post-4o (p = 0.006)</a:t>
             </a:r>
             <a:endParaRPr lang="en-US" sz="1200" dirty="0"/>
           </a:p>
@@ -2781,7 +2781,7 @@
                 <a:ea typeface="Calibri" pitchFamily="34" charset="-122"/>
                 <a:cs typeface="Calibri" pitchFamily="34" charset="-120"/>
               </a:rPr>
-              <a:t>67,008 papers from OpenAlex (Jan 2021 – Dec 2025)</a:t>
+              <a:t>35,080 papers from OpenAlex (May 2023 – Dec 2025)</a:t>
             </a:r>
             <a:endParaRPr lang="en-US" sz="1800" dirty="0"/>
           </a:p>

--- a/claude work/output/presentation.pptx
+++ b/claude work/output/presentation.pptx
@@ -15,9 +15,14 @@
     <p:sldId id="263" r:id="rId9"/>
     <p:sldId id="264" r:id="rId10"/>
     <p:sldId id="265" r:id="rId11"/>
+    <p:sldId id="266" r:id="rId12"/>
+    <p:sldId id="267" r:id="rId13"/>
+    <p:sldId id="268" r:id="rId14"/>
+    <p:sldId id="270" r:id="rId21"/>
+    <p:sldId id="269" r:id="rId15"/>
   </p:sldIdLst>
   <p:notesMasterIdLst>
-    <p:notesMasterId r:id="rId12"/>
+    <p:notesMasterId r:id="rId16"/>
   </p:notesMasterIdLst>
   <p:sldSz cx="9144000" cy="5143500"/>
   <p:notesSz cx="5143500" cy="9144000"/>
@@ -623,6 +628,358 @@
             <a:fld id="{F7021451-1387-4CA6-816F-3879F97B5CBC}" type="slidenum">
               <a:rPr lang="en-US"/>
               <a:t>10</a:t>
+            </a:fld>
+            <a:endParaRPr lang="en-US"/>
+          </a:p>
+        </p:txBody>
+      </p:sp>
+    </p:spTree>
+    <p:extLst>
+      <p:ext uri="{BB962C8B-B14F-4D97-AF65-F5344CB8AC3E}">
+        <p14:creationId xmlns:p14="http://schemas.microsoft.com/office/powerpoint/2010/main" val="1024086991"/>
+      </p:ext>
+    </p:extLst>
+  </p:cSld>
+  <p:clrMapOvr>
+    <a:masterClrMapping/>
+  </p:clrMapOvr>
+</p:notes>
+</file>
+
+<file path=ppt/notesSlides/notesSlide11.xml><?xml version="1.0" encoding="utf-8"?>
+<p:notes xmlns:a="http://schemas.openxmlformats.org/drawingml/2006/main" xmlns:r="http://schemas.openxmlformats.org/officeDocument/2006/relationships" xmlns:p="http://schemas.openxmlformats.org/presentationml/2006/main">
+  <p:cSld>
+    <p:spTree>
+      <p:nvGrpSpPr>
+        <p:cNvPr id="1" name=""/>
+        <p:cNvGrpSpPr/>
+        <p:nvPr/>
+      </p:nvGrpSpPr>
+      <p:grpSpPr>
+        <a:xfrm>
+          <a:off x="0" y="0"/>
+          <a:ext cx="0" cy="0"/>
+          <a:chOff x="0" y="0"/>
+          <a:chExt cx="0" cy="0"/>
+        </a:xfrm>
+      </p:grpSpPr>
+      <p:sp>
+        <p:nvSpPr>
+          <p:cNvPr id="2" name="Slide Image Placeholder 1"/>
+          <p:cNvSpPr>
+            <a:spLocks noGrp="1" noRot="1" noChangeAspect="1"/>
+          </p:cNvSpPr>
+          <p:nvPr>
+            <p:ph type="sldImg"/>
+          </p:nvPr>
+        </p:nvSpPr>
+        <p:spPr/>
+      </p:sp>
+      <p:sp>
+        <p:nvSpPr>
+          <p:cNvPr id="3" name="Notes Placeholder 2"/>
+          <p:cNvSpPr>
+            <a:spLocks noGrp="1"/>
+          </p:cNvSpPr>
+          <p:nvPr>
+            <p:ph type="body" idx="1"/>
+          </p:nvPr>
+        </p:nvSpPr>
+        <p:spPr/>
+        <p:txBody>
+          <a:bodyPr/>
+          <a:lstStyle/>
+          <a:p>
+            <a:r>
+              <a:rPr lang="en-US" dirty="0"/>
+              <a:t/>
+            </a:r>
+            <a:endParaRPr lang="en-US" dirty="0"/>
+          </a:p>
+        </p:txBody>
+      </p:sp>
+      <p:sp>
+        <p:nvSpPr>
+          <p:cNvPr id="4" name="Slide Number Placeholder 3"/>
+          <p:cNvSpPr>
+            <a:spLocks noGrp="1"/>
+          </p:cNvSpPr>
+          <p:nvPr>
+            <p:ph type="sldNum" sz="quarter" idx="10"/>
+          </p:nvPr>
+        </p:nvSpPr>
+        <p:spPr/>
+        <p:txBody>
+          <a:bodyPr/>
+          <a:lstStyle/>
+          <a:p>
+            <a:fld id="{F7021451-1387-4CA6-816F-3879F97B5CBC}" type="slidenum">
+              <a:rPr lang="en-US"/>
+              <a:t>11</a:t>
+            </a:fld>
+            <a:endParaRPr lang="en-US"/>
+          </a:p>
+        </p:txBody>
+      </p:sp>
+    </p:spTree>
+    <p:extLst>
+      <p:ext uri="{BB962C8B-B14F-4D97-AF65-F5344CB8AC3E}">
+        <p14:creationId xmlns:p14="http://schemas.microsoft.com/office/powerpoint/2010/main" val="1024086991"/>
+      </p:ext>
+    </p:extLst>
+  </p:cSld>
+  <p:clrMapOvr>
+    <a:masterClrMapping/>
+  </p:clrMapOvr>
+</p:notes>
+</file>
+
+<file path=ppt/notesSlides/notesSlide12.xml><?xml version="1.0" encoding="utf-8"?>
+<p:notes xmlns:a="http://schemas.openxmlformats.org/drawingml/2006/main" xmlns:r="http://schemas.openxmlformats.org/officeDocument/2006/relationships" xmlns:p="http://schemas.openxmlformats.org/presentationml/2006/main">
+  <p:cSld>
+    <p:spTree>
+      <p:nvGrpSpPr>
+        <p:cNvPr id="1" name=""/>
+        <p:cNvGrpSpPr/>
+        <p:nvPr/>
+      </p:nvGrpSpPr>
+      <p:grpSpPr>
+        <a:xfrm>
+          <a:off x="0" y="0"/>
+          <a:ext cx="0" cy="0"/>
+          <a:chOff x="0" y="0"/>
+          <a:chExt cx="0" cy="0"/>
+        </a:xfrm>
+      </p:grpSpPr>
+      <p:sp>
+        <p:nvSpPr>
+          <p:cNvPr id="2" name="Slide Image Placeholder 1"/>
+          <p:cNvSpPr>
+            <a:spLocks noGrp="1" noRot="1" noChangeAspect="1"/>
+          </p:cNvSpPr>
+          <p:nvPr>
+            <p:ph type="sldImg"/>
+          </p:nvPr>
+        </p:nvSpPr>
+        <p:spPr/>
+      </p:sp>
+      <p:sp>
+        <p:nvSpPr>
+          <p:cNvPr id="3" name="Notes Placeholder 2"/>
+          <p:cNvSpPr>
+            <a:spLocks noGrp="1"/>
+          </p:cNvSpPr>
+          <p:nvPr>
+            <p:ph type="body" idx="1"/>
+          </p:nvPr>
+        </p:nvSpPr>
+        <p:spPr/>
+        <p:txBody>
+          <a:bodyPr/>
+          <a:lstStyle/>
+          <a:p>
+            <a:r>
+              <a:rPr lang="en-US" dirty="0"/>
+              <a:t/>
+            </a:r>
+            <a:endParaRPr lang="en-US" dirty="0"/>
+          </a:p>
+        </p:txBody>
+      </p:sp>
+      <p:sp>
+        <p:nvSpPr>
+          <p:cNvPr id="4" name="Slide Number Placeholder 3"/>
+          <p:cNvSpPr>
+            <a:spLocks noGrp="1"/>
+          </p:cNvSpPr>
+          <p:nvPr>
+            <p:ph type="sldNum" sz="quarter" idx="10"/>
+          </p:nvPr>
+        </p:nvSpPr>
+        <p:spPr/>
+        <p:txBody>
+          <a:bodyPr/>
+          <a:lstStyle/>
+          <a:p>
+            <a:fld id="{F7021451-1387-4CA6-816F-3879F97B5CBC}" type="slidenum">
+              <a:rPr lang="en-US"/>
+              <a:t>12</a:t>
+            </a:fld>
+            <a:endParaRPr lang="en-US"/>
+          </a:p>
+        </p:txBody>
+      </p:sp>
+    </p:spTree>
+    <p:extLst>
+      <p:ext uri="{BB962C8B-B14F-4D97-AF65-F5344CB8AC3E}">
+        <p14:creationId xmlns:p14="http://schemas.microsoft.com/office/powerpoint/2010/main" val="1024086991"/>
+      </p:ext>
+    </p:extLst>
+  </p:cSld>
+  <p:clrMapOvr>
+    <a:masterClrMapping/>
+  </p:clrMapOvr>
+</p:notes>
+</file>
+
+<file path=ppt/notesSlides/notesSlide13.xml><?xml version="1.0" encoding="utf-8"?>
+<p:notes xmlns:a="http://schemas.openxmlformats.org/drawingml/2006/main" xmlns:r="http://schemas.openxmlformats.org/officeDocument/2006/relationships" xmlns:p="http://schemas.openxmlformats.org/presentationml/2006/main">
+  <p:cSld>
+    <p:spTree>
+      <p:nvGrpSpPr>
+        <p:cNvPr id="1" name=""/>
+        <p:cNvGrpSpPr/>
+        <p:nvPr/>
+      </p:nvGrpSpPr>
+      <p:grpSpPr>
+        <a:xfrm>
+          <a:off x="0" y="0"/>
+          <a:ext cx="0" cy="0"/>
+          <a:chOff x="0" y="0"/>
+          <a:chExt cx="0" cy="0"/>
+        </a:xfrm>
+      </p:grpSpPr>
+      <p:sp>
+        <p:nvSpPr>
+          <p:cNvPr id="2" name="Slide Image Placeholder 1"/>
+          <p:cNvSpPr>
+            <a:spLocks noGrp="1" noRot="1" noChangeAspect="1"/>
+          </p:cNvSpPr>
+          <p:nvPr>
+            <p:ph type="sldImg"/>
+          </p:nvPr>
+        </p:nvSpPr>
+        <p:spPr/>
+      </p:sp>
+      <p:sp>
+        <p:nvSpPr>
+          <p:cNvPr id="3" name="Notes Placeholder 2"/>
+          <p:cNvSpPr>
+            <a:spLocks noGrp="1"/>
+          </p:cNvSpPr>
+          <p:nvPr>
+            <p:ph type="body" idx="1"/>
+          </p:nvPr>
+        </p:nvSpPr>
+        <p:spPr/>
+        <p:txBody>
+          <a:bodyPr/>
+          <a:lstStyle/>
+          <a:p>
+            <a:r>
+              <a:rPr lang="en-US" dirty="0"/>
+              <a:t/>
+            </a:r>
+            <a:endParaRPr lang="en-US" dirty="0"/>
+          </a:p>
+        </p:txBody>
+      </p:sp>
+      <p:sp>
+        <p:nvSpPr>
+          <p:cNvPr id="4" name="Slide Number Placeholder 3"/>
+          <p:cNvSpPr>
+            <a:spLocks noGrp="1"/>
+          </p:cNvSpPr>
+          <p:nvPr>
+            <p:ph type="sldNum" sz="quarter" idx="10"/>
+          </p:nvPr>
+        </p:nvSpPr>
+        <p:spPr/>
+        <p:txBody>
+          <a:bodyPr/>
+          <a:lstStyle/>
+          <a:p>
+            <a:fld id="{F7021451-1387-4CA6-816F-3879F97B5CBC}" type="slidenum">
+              <a:rPr lang="en-US"/>
+              <a:t>13</a:t>
+            </a:fld>
+            <a:endParaRPr lang="en-US"/>
+          </a:p>
+        </p:txBody>
+      </p:sp>
+    </p:spTree>
+    <p:extLst>
+      <p:ext uri="{BB962C8B-B14F-4D97-AF65-F5344CB8AC3E}">
+        <p14:creationId xmlns:p14="http://schemas.microsoft.com/office/powerpoint/2010/main" val="1024086991"/>
+      </p:ext>
+    </p:extLst>
+  </p:cSld>
+  <p:clrMapOvr>
+    <a:masterClrMapping/>
+  </p:clrMapOvr>
+</p:notes>
+</file>
+
+<file path=ppt/notesSlides/notesSlide14.xml><?xml version="1.0" encoding="utf-8"?>
+<p:notes xmlns:a="http://schemas.openxmlformats.org/drawingml/2006/main" xmlns:r="http://schemas.openxmlformats.org/officeDocument/2006/relationships" xmlns:p="http://schemas.openxmlformats.org/presentationml/2006/main">
+  <p:cSld>
+    <p:spTree>
+      <p:nvGrpSpPr>
+        <p:cNvPr id="1" name=""/>
+        <p:cNvGrpSpPr/>
+        <p:nvPr/>
+      </p:nvGrpSpPr>
+      <p:grpSpPr>
+        <a:xfrm>
+          <a:off x="0" y="0"/>
+          <a:ext cx="0" cy="0"/>
+          <a:chOff x="0" y="0"/>
+          <a:chExt cx="0" cy="0"/>
+        </a:xfrm>
+      </p:grpSpPr>
+      <p:sp>
+        <p:nvSpPr>
+          <p:cNvPr id="2" name="Slide Image Placeholder 1"/>
+          <p:cNvSpPr>
+            <a:spLocks noGrp="1" noRot="1" noChangeAspect="1"/>
+          </p:cNvSpPr>
+          <p:nvPr>
+            <p:ph type="sldImg"/>
+          </p:nvPr>
+        </p:nvSpPr>
+        <p:spPr/>
+      </p:sp>
+      <p:sp>
+        <p:nvSpPr>
+          <p:cNvPr id="3" name="Notes Placeholder 2"/>
+          <p:cNvSpPr>
+            <a:spLocks noGrp="1"/>
+          </p:cNvSpPr>
+          <p:nvPr>
+            <p:ph type="body" idx="1"/>
+          </p:nvPr>
+        </p:nvSpPr>
+        <p:spPr/>
+        <p:txBody>
+          <a:bodyPr/>
+          <a:lstStyle/>
+          <a:p>
+            <a:r>
+              <a:rPr lang="en-US" dirty="0"/>
+              <a:t/>
+            </a:r>
+            <a:endParaRPr lang="en-US" dirty="0"/>
+          </a:p>
+        </p:txBody>
+      </p:sp>
+      <p:sp>
+        <p:nvSpPr>
+          <p:cNvPr id="4" name="Slide Number Placeholder 3"/>
+          <p:cNvSpPr>
+            <a:spLocks noGrp="1"/>
+          </p:cNvSpPr>
+          <p:nvPr>
+            <p:ph type="sldNum" sz="quarter" idx="10"/>
+          </p:nvPr>
+        </p:nvSpPr>
+        <p:spPr/>
+        <p:txBody>
+          <a:bodyPr/>
+          <a:lstStyle/>
+          <a:p>
+            <a:fld id="{F7021451-1387-4CA6-816F-3879F97B5CBC}" type="slidenum">
+              <a:rPr lang="en-US"/>
+              <a:t>14</a:t>
             </a:fld>
             <a:endParaRPr lang="en-US"/>
           </a:p>
@@ -1850,6 +2207,983 @@
     <p:bg>
       <p:bgPr>
         <a:solidFill>
+          <a:srgbClr val="F4F6FA"/>
+        </a:solidFill>
+      </p:bgPr>
+    </p:bg>
+    <p:spTree>
+      <p:nvGrpSpPr>
+        <p:cNvPr id="1" name=""/>
+        <p:cNvGrpSpPr/>
+        <p:nvPr/>
+      </p:nvGrpSpPr>
+      <p:grpSpPr>
+        <a:xfrm>
+          <a:off x="0" y="0"/>
+          <a:ext cx="0" cy="0"/>
+          <a:chOff x="0" y="0"/>
+          <a:chExt cx="0" cy="0"/>
+        </a:xfrm>
+      </p:grpSpPr>
+      <p:sp>
+        <p:nvSpPr>
+          <p:cNvPr id="2" name="Text 0"/>
+          <p:cNvSpPr/>
+          <p:nvPr/>
+        </p:nvSpPr>
+        <p:spPr>
+          <a:xfrm>
+            <a:off x="548640" y="274320"/>
+            <a:ext cx="8046720" cy="548640"/>
+          </a:xfrm>
+          <a:prstGeom prst="rect">
+            <a:avLst/>
+          </a:prstGeom>
+          <a:noFill/>
+          <a:ln/>
+        </p:spPr>
+        <p:txBody>
+          <a:bodyPr wrap="square" lIns="0" tIns="0" rIns="0" bIns="0" rtlCol="0" anchor="ctr"/>
+          <a:lstStyle/>
+          <a:p>
+            <a:pPr indent="0" marL="0">
+              <a:buNone/>
+            </a:pPr>
+            <a:r>
+              <a:rPr lang="en-US" sz="2400" b="1" dirty="0">
+                <a:solidFill>
+                  <a:srgbClr val="1E2761"/>
+                </a:solidFill>
+                <a:latin typeface="Georgia" pitchFamily="34" charset="0"/>
+                <a:ea typeface="Georgia" pitchFamily="34" charset="-122"/>
+                <a:cs typeface="Georgia" pitchFamily="34" charset="-120"/>
+              </a:rPr>
+              <a:t>Consistent Pattern Across Diversity Measures</a:t>
+            </a:r>
+            <a:endParaRPr lang="en-US" sz="2400" dirty="0"/>
+          </a:p>
+        </p:txBody>
+      </p:sp>
+      <p:sp>
+        <p:nvSpPr>
+          <p:cNvPr id="3" name="Text 1"/>
+          <p:cNvSpPr/>
+          <p:nvPr/>
+        </p:nvSpPr>
+        <p:spPr>
+          <a:xfrm>
+            <a:off x="548640" y="777240"/>
+            <a:ext cx="8046720" cy="365760"/>
+          </a:xfrm>
+          <a:prstGeom prst="rect">
+            <a:avLst/>
+          </a:prstGeom>
+          <a:noFill/>
+          <a:ln/>
+        </p:spPr>
+        <p:txBody>
+          <a:bodyPr wrap="square" rtlCol="0" anchor="ctr"/>
+          <a:lstStyle/>
+          <a:p>
+            <a:pPr indent="0" marL="0">
+              <a:buNone/>
+            </a:pPr>
+            <a:r>
+              <a:rPr lang="en-US" sz="1200" dirty="0">
+                <a:solidFill>
+                  <a:srgbClr val="556688"/>
+                </a:solidFill>
+                <a:latin typeface="Calibri" pitchFamily="34" charset="0"/>
+                <a:ea typeface="Calibri" pitchFamily="34" charset="-122"/>
+                <a:cs typeface="Calibri" pitchFamily="34" charset="-120"/>
+              </a:rPr>
+              <a:t>Treatment × trend coefficients for all 7 dependent variables (95% CIs)</a:t>
+            </a:r>
+            <a:endParaRPr lang="en-US" sz="1200" dirty="0"/>
+          </a:p>
+        </p:txBody>
+      </p:sp>
+      <p:pic>
+        <p:nvPicPr>
+          <p:cNvPr id="4" name="Image 0" descr="/sessions/zen-sweet-johnson/mnt/aig-final-project/claude work/output/shannon-figures/fig09_forest_plot.png">    </p:cNvPr>
+          <p:cNvPicPr>
+            <a:picLocks noChangeAspect="1"/>
+          </p:cNvPicPr>
+          <p:nvPr/>
+        </p:nvPicPr>
+        <p:blipFill>
+          <a:blip r:embed="rId1"/>
+          <a:srcRect l="0" r="0" t="0" b="0"/>
+          <a:stretch/>
+        </p:blipFill>
+        <p:spPr>
+          <a:xfrm>
+            <a:off x="274320" y="1188720"/>
+            <a:ext cx="8595360" cy="3749040"/>
+          </a:xfrm>
+          <a:prstGeom prst="rect">
+            <a:avLst/>
+          </a:prstGeom>
+        </p:spPr>
+      </p:pic>
+    </p:spTree>
+  </p:cSld>
+  <p:clrMapOvr>
+    <a:masterClrMapping/>
+  </p:clrMapOvr>
+</p:sld>
+</file>
+
+<file path=ppt/slides/slide11.xml><?xml version="1.0" encoding="utf-8"?>
+<p:sld xmlns:a="http://schemas.openxmlformats.org/drawingml/2006/main" xmlns:r="http://schemas.openxmlformats.org/officeDocument/2006/relationships" xmlns:p="http://schemas.openxmlformats.org/presentationml/2006/main">
+  <p:cSld name="Slide 11">
+    <p:bg>
+      <p:bgPr>
+        <a:solidFill>
+          <a:srgbClr val="F4F6FA"/>
+        </a:solidFill>
+      </p:bgPr>
+    </p:bg>
+    <p:spTree>
+      <p:nvGrpSpPr>
+        <p:cNvPr id="1" name=""/>
+        <p:cNvGrpSpPr/>
+        <p:nvPr/>
+      </p:nvGrpSpPr>
+      <p:grpSpPr>
+        <a:xfrm>
+          <a:off x="0" y="0"/>
+          <a:ext cx="0" cy="0"/>
+          <a:chOff x="0" y="0"/>
+          <a:chExt cx="0" cy="0"/>
+        </a:xfrm>
+      </p:grpSpPr>
+      <p:sp>
+        <p:nvSpPr>
+          <p:cNvPr id="2" name="Text 0"/>
+          <p:cNvSpPr/>
+          <p:nvPr/>
+        </p:nvSpPr>
+        <p:spPr>
+          <a:xfrm>
+            <a:off x="548640" y="274320"/>
+            <a:ext cx="8046720" cy="548640"/>
+          </a:xfrm>
+          <a:prstGeom prst="rect">
+            <a:avLst/>
+          </a:prstGeom>
+          <a:noFill/>
+          <a:ln/>
+        </p:spPr>
+        <p:txBody>
+          <a:bodyPr wrap="square" lIns="0" tIns="0" rIns="0" bIns="0" rtlCol="0" anchor="ctr"/>
+          <a:lstStyle/>
+          <a:p>
+            <a:pPr indent="0" marL="0">
+              <a:buNone/>
+            </a:pPr>
+            <a:r>
+              <a:rPr lang="en-US" sz="2400" b="1" dirty="0">
+                <a:solidFill>
+                  <a:srgbClr val="1E2761"/>
+                </a:solidFill>
+                <a:latin typeface="Georgia" pitchFamily="34" charset="0"/>
+                <a:ea typeface="Georgia" pitchFamily="34" charset="-122"/>
+                <a:cs typeface="Georgia" pitchFamily="34" charset="-120"/>
+              </a:rPr>
+              <a:t>Robustness: Parallel Trends &amp; Within-Field Share</a:t>
+            </a:r>
+            <a:endParaRPr lang="en-US" sz="2400" dirty="0"/>
+          </a:p>
+        </p:txBody>
+      </p:sp>
+      <p:pic>
+        <p:nvPicPr>
+          <p:cNvPr id="3" name="Image 0" descr="/sessions/zen-sweet-johnson/mnt/aig-final-project/claude work/output/shannon-figures/fig10_parallel_trends.png">    </p:cNvPr>
+          <p:cNvPicPr>
+            <a:picLocks noChangeAspect="1"/>
+          </p:cNvPicPr>
+          <p:nvPr/>
+        </p:nvPicPr>
+        <p:blipFill>
+          <a:blip r:embed="rId1"/>
+          <a:srcRect l="0" r="0" t="0" b="0"/>
+          <a:stretch/>
+        </p:blipFill>
+        <p:spPr>
+          <a:xfrm>
+            <a:off x="182880" y="1005840"/>
+            <a:ext cx="4114800" cy="2834640"/>
+          </a:xfrm>
+          <a:prstGeom prst="rect">
+            <a:avLst/>
+          </a:prstGeom>
+        </p:spPr>
+      </p:pic>
+      <p:pic>
+        <p:nvPicPr>
+          <p:cNvPr id="4" name="Image 1" descr="/sessions/zen-sweet-johnson/mnt/aig-final-project/claude work/output/shannon-figures/fig08_within_field_share.png">    </p:cNvPr>
+          <p:cNvPicPr>
+            <a:picLocks noChangeAspect="1"/>
+          </p:cNvPicPr>
+          <p:nvPr/>
+        </p:nvPicPr>
+        <p:blipFill>
+          <a:blip r:embed="rId2"/>
+          <a:srcRect l="0" r="0" t="0" b="0"/>
+          <a:stretch/>
+        </p:blipFill>
+        <p:spPr>
+          <a:xfrm>
+            <a:off x="4846320" y="1005840"/>
+            <a:ext cx="4114800" cy="2834640"/>
+          </a:xfrm>
+          <a:prstGeom prst="rect">
+            <a:avLst/>
+          </a:prstGeom>
+        </p:spPr>
+      </p:pic>
+      <p:sp>
+        <p:nvSpPr>
+          <p:cNvPr id="5" name="Text 1"/>
+          <p:cNvSpPr/>
+          <p:nvPr/>
+        </p:nvSpPr>
+        <p:spPr>
+          <a:xfrm>
+            <a:off x="182880" y="3931920"/>
+            <a:ext cx="4114800" cy="548640"/>
+          </a:xfrm>
+          <a:prstGeom prst="rect">
+            <a:avLst/>
+          </a:prstGeom>
+          <a:noFill/>
+          <a:ln/>
+        </p:spPr>
+        <p:txBody>
+          <a:bodyPr wrap="square" rtlCol="0" anchor="ctr"/>
+          <a:lstStyle/>
+          <a:p>
+            <a:pPr algn="ctr" indent="0" marL="0">
+              <a:buNone/>
+            </a:pPr>
+            <a:r>
+              <a:rPr lang="en-US" sz="1100" dirty="0">
+                <a:solidFill>
+                  <a:srgbClr val="556688"/>
+                </a:solidFill>
+                <a:latin typeface="Calibri" pitchFamily="34" charset="0"/>
+                <a:ea typeface="Calibri" pitchFamily="34" charset="-122"/>
+                <a:cs typeface="Calibri" pitchFamily="34" charset="-120"/>
+              </a:rPr>
+              <a:t>Parallel trends pass (p = 0.56) in 18-month</a:t>
+            </a:r>
+            <a:endParaRPr lang="en-US" sz="1100" dirty="0"/>
+          </a:p>
+          <a:p>
+            <a:pPr algn="ctr" indent="0" marL="0">
+              <a:buNone/>
+            </a:pPr>
+            <a:r>
+              <a:rPr lang="en-US" sz="1100" dirty="0">
+                <a:solidFill>
+                  <a:srgbClr val="556688"/>
+                </a:solidFill>
+                <a:latin typeface="Calibri" pitchFamily="34" charset="0"/>
+                <a:ea typeface="Calibri" pitchFamily="34" charset="-122"/>
+                <a:cs typeface="Calibri" pitchFamily="34" charset="-120"/>
+              </a:rPr>
+              <a:t>pre-period with field FE</a:t>
+            </a:r>
+            <a:endParaRPr lang="en-US" sz="1100" dirty="0"/>
+          </a:p>
+        </p:txBody>
+      </p:sp>
+      <p:sp>
+        <p:nvSpPr>
+          <p:cNvPr id="6" name="Text 2"/>
+          <p:cNvSpPr/>
+          <p:nvPr/>
+        </p:nvSpPr>
+        <p:spPr>
+          <a:xfrm>
+            <a:off x="4846320" y="3931920"/>
+            <a:ext cx="4114800" cy="548640"/>
+          </a:xfrm>
+          <a:prstGeom prst="rect">
+            <a:avLst/>
+          </a:prstGeom>
+          <a:noFill/>
+          <a:ln/>
+        </p:spPr>
+        <p:txBody>
+          <a:bodyPr wrap="square" rtlCol="0" anchor="ctr"/>
+          <a:lstStyle/>
+          <a:p>
+            <a:pPr algn="ctr" indent="0" marL="0">
+              <a:buNone/>
+            </a:pPr>
+            <a:r>
+              <a:rPr lang="en-US" sz="1100" dirty="0">
+                <a:solidFill>
+                  <a:srgbClr val="556688"/>
+                </a:solidFill>
+                <a:latin typeface="Calibri" pitchFamily="34" charset="0"/>
+                <a:ea typeface="Calibri" pitchFamily="34" charset="-122"/>
+                <a:cs typeface="Calibri" pitchFamily="34" charset="-120"/>
+              </a:rPr>
+              <a:t>Within-field citation share declines faster</a:t>
+            </a:r>
+            <a:endParaRPr lang="en-US" sz="1100" dirty="0"/>
+          </a:p>
+          <a:p>
+            <a:pPr algn="ctr" indent="0" marL="0">
+              <a:buNone/>
+            </a:pPr>
+            <a:r>
+              <a:rPr lang="en-US" sz="1100" dirty="0">
+                <a:solidFill>
+                  <a:srgbClr val="556688"/>
+                </a:solidFill>
+                <a:latin typeface="Calibri" pitchFamily="34" charset="0"/>
+                <a:ea typeface="Calibri" pitchFamily="34" charset="-122"/>
+                <a:cs typeface="Calibri" pitchFamily="34" charset="-120"/>
+              </a:rPr>
+              <a:t>in high-propensity fields post-4o</a:t>
+            </a:r>
+            <a:endParaRPr lang="en-US" sz="1100" dirty="0"/>
+          </a:p>
+        </p:txBody>
+      </p:sp>
+    </p:spTree>
+  </p:cSld>
+  <p:clrMapOvr>
+    <a:masterClrMapping/>
+  </p:clrMapOvr>
+</p:sld>
+</file>
+
+<file path=ppt/slides/slide12.xml><?xml version="1.0" encoding="utf-8"?>
+<p:sld xmlns:a="http://schemas.openxmlformats.org/drawingml/2006/main" xmlns:r="http://schemas.openxmlformats.org/officeDocument/2006/relationships" xmlns:p="http://schemas.openxmlformats.org/presentationml/2006/main">
+  <p:cSld name="Slide 12">
+    <p:bg>
+      <p:bgPr>
+        <a:solidFill>
+          <a:srgbClr val="F4F6FA"/>
+        </a:solidFill>
+      </p:bgPr>
+    </p:bg>
+    <p:spTree>
+      <p:nvGrpSpPr>
+        <p:cNvPr id="1" name=""/>
+        <p:cNvGrpSpPr/>
+        <p:nvPr/>
+      </p:nvGrpSpPr>
+      <p:grpSpPr>
+        <a:xfrm>
+          <a:off x="0" y="0"/>
+          <a:ext cx="0" cy="0"/>
+          <a:chOff x="0" y="0"/>
+          <a:chExt cx="0" cy="0"/>
+        </a:xfrm>
+      </p:grpSpPr>
+      <p:sp>
+        <p:nvSpPr>
+          <p:cNvPr id="2" name="Text 0"/>
+          <p:cNvSpPr/>
+          <p:nvPr/>
+        </p:nvSpPr>
+        <p:spPr>
+          <a:xfrm>
+            <a:off x="548640" y="274320"/>
+            <a:ext cx="8046720" cy="548640"/>
+          </a:xfrm>
+          <a:prstGeom prst="rect">
+            <a:avLst/>
+          </a:prstGeom>
+          <a:noFill/>
+          <a:ln/>
+        </p:spPr>
+        <p:txBody>
+          <a:bodyPr wrap="square" lIns="0" tIns="0" rIns="0" bIns="0" rtlCol="0" anchor="ctr"/>
+          <a:lstStyle/>
+          <a:p>
+            <a:pPr indent="0" marL="0">
+              <a:buNone/>
+            </a:pPr>
+            <a:r>
+              <a:rPr lang="en-US" sz="2400" b="1" dirty="0">
+                <a:solidFill>
+                  <a:srgbClr val="1E2761"/>
+                </a:solidFill>
+                <a:latin typeface="Georgia" pitchFamily="34" charset="0"/>
+                <a:ea typeface="Georgia" pitchFamily="34" charset="-122"/>
+                <a:cs typeface="Georgia" pitchFamily="34" charset="-120"/>
+              </a:rPr>
+              <a:t>Cross-Sectional Validation</a:t>
+            </a:r>
+            <a:endParaRPr lang="en-US" sz="2400" dirty="0"/>
+          </a:p>
+        </p:txBody>
+      </p:sp>
+      <p:sp>
+        <p:nvSpPr>
+          <p:cNvPr id="3" name="Text 1"/>
+          <p:cNvSpPr/>
+          <p:nvPr/>
+        </p:nvSpPr>
+        <p:spPr>
+          <a:xfrm>
+            <a:off x="548640" y="777240"/>
+            <a:ext cx="8046720" cy="365760"/>
+          </a:xfrm>
+          <a:prstGeom prst="rect">
+            <a:avLst/>
+          </a:prstGeom>
+          <a:noFill/>
+          <a:ln/>
+        </p:spPr>
+        <p:txBody>
+          <a:bodyPr wrap="square" rtlCol="0" anchor="ctr"/>
+          <a:lstStyle/>
+          <a:p>
+            <a:pPr indent="0" marL="0">
+              <a:buNone/>
+            </a:pPr>
+            <a:r>
+              <a:rPr lang="en-US" sz="1200" dirty="0">
+                <a:solidFill>
+                  <a:srgbClr val="556688"/>
+                </a:solidFill>
+                <a:latin typeface="Calibri" pitchFamily="34" charset="0"/>
+                <a:ea typeface="Calibri" pitchFamily="34" charset="-122"/>
+                <a:cs typeface="Calibri" pitchFamily="34" charset="-120"/>
+              </a:rPr>
+              <a:t>Fields with higher AI propensity saw larger increases in citation diversity (r = 0.603)</a:t>
+            </a:r>
+            <a:endParaRPr lang="en-US" sz="1200" dirty="0"/>
+          </a:p>
+        </p:txBody>
+      </p:sp>
+      <p:pic>
+        <p:nvPicPr>
+          <p:cNvPr id="4" name="Image 0" descr="/sessions/zen-sweet-johnson/mnt/aig-final-project/claude work/output/shannon-figures/fig07_field_scatter.png">    </p:cNvPr>
+          <p:cNvPicPr>
+            <a:picLocks noChangeAspect="1"/>
+          </p:cNvPicPr>
+          <p:nvPr/>
+        </p:nvPicPr>
+        <p:blipFill>
+          <a:blip r:embed="rId1"/>
+          <a:srcRect l="0" r="0" t="0" b="0"/>
+          <a:stretch/>
+        </p:blipFill>
+        <p:spPr>
+          <a:xfrm>
+            <a:off x="914400" y="1188720"/>
+            <a:ext cx="7315200" cy="3749040"/>
+          </a:xfrm>
+          <a:prstGeom prst="rect">
+            <a:avLst/>
+          </a:prstGeom>
+        </p:spPr>
+      </p:pic>
+    </p:spTree>
+  </p:cSld>
+  <p:clrMapOvr>
+    <a:masterClrMapping/>
+  </p:clrMapOvr>
+</p:sld>
+</file>
+
+<file path=ppt/slides/slide13.xml><?xml version="1.0" encoding="utf-8"?>
+<p:sld xmlns:a="http://schemas.openxmlformats.org/drawingml/2006/main" xmlns:r="http://schemas.openxmlformats.org/officeDocument/2006/relationships" xmlns:p="http://schemas.openxmlformats.org/presentationml/2006/main">
+  <p:cSld name="Slide 13">
+    <p:bg>
+      <p:bgPr>
+        <a:solidFill>
+          <a:srgbClr val="F4F6FA"/>
+        </a:solidFill>
+      </p:bgPr>
+    </p:bg>
+    <p:spTree>
+      <p:nvGrpSpPr>
+        <p:cNvPr id="1" name=""/>
+        <p:cNvGrpSpPr/>
+        <p:nvPr/>
+      </p:nvGrpSpPr>
+      <p:grpSpPr>
+        <a:xfrm>
+          <a:off x="0" y="0"/>
+          <a:ext cx="0" cy="0"/>
+          <a:chOff x="0" y="0"/>
+          <a:chExt cx="0" cy="0"/>
+        </a:xfrm>
+      </p:grpSpPr>
+      <p:sp>
+        <p:nvSpPr>
+          <p:cNvPr id="2" name="Text 0"/>
+          <p:cNvSpPr/>
+          <p:nvPr/>
+        </p:nvSpPr>
+        <p:spPr>
+          <a:xfrm>
+            <a:off x="548640" y="274320"/>
+            <a:ext cx="8046720" cy="548640"/>
+          </a:xfrm>
+          <a:prstGeom prst="rect">
+            <a:avLst/>
+          </a:prstGeom>
+          <a:noFill/>
+          <a:ln/>
+        </p:spPr>
+        <p:txBody>
+          <a:bodyPr wrap="square" lIns="0" tIns="0" rIns="0" bIns="0" rtlCol="0" anchor="ctr"/>
+          <a:lstStyle/>
+          <a:p>
+            <a:pPr indent="0" marL="0">
+              <a:buNone/>
+            </a:pPr>
+            <a:r>
+              <a:rPr lang="en-US" sz="2800" b="1" dirty="0">
+                <a:solidFill>
+                  <a:srgbClr val="1E2761"/>
+                </a:solidFill>
+                <a:latin typeface="Georgia" pitchFamily="34" charset="0"/>
+                <a:ea typeface="Georgia" pitchFamily="34" charset="-122"/>
+                <a:cs typeface="Georgia" pitchFamily="34" charset="-120"/>
+              </a:rPr>
+              <a:t>Limitations</a:t>
+            </a:r>
+            <a:endParaRPr lang="en-US" sz="2800" dirty="0"/>
+          </a:p>
+        </p:txBody>
+      </p:sp>
+      <p:sp>
+        <p:nvSpPr>
+          <p:cNvPr id="3" name="Shape 1"/>
+          <p:cNvSpPr/>
+          <p:nvPr/>
+        </p:nvSpPr>
+        <p:spPr>
+          <a:xfrm>
+            <a:off x="548640" y="1097280"/>
+            <a:ext cx="411480" cy="411480"/>
+          </a:xfrm>
+          <a:prstGeom prst="ellipse">
+            <a:avLst/>
+          </a:prstGeom>
+          <a:solidFill>
+            <a:srgbClr val="3A7BD5"/>
+          </a:solidFill>
+          <a:ln/>
+        </p:spPr>
+      </p:sp>
+      <p:sp>
+        <p:nvSpPr>
+          <p:cNvPr id="4" name="Text 2"/>
+          <p:cNvSpPr/>
+          <p:nvPr/>
+        </p:nvSpPr>
+        <p:spPr>
+          <a:xfrm>
+            <a:off x="548640" y="1097280"/>
+            <a:ext cx="411480" cy="411480"/>
+          </a:xfrm>
+          <a:prstGeom prst="rect">
+            <a:avLst/>
+          </a:prstGeom>
+          <a:noFill/>
+          <a:ln/>
+        </p:spPr>
+        <p:txBody>
+          <a:bodyPr wrap="square" rtlCol="0" anchor="ctr"/>
+          <a:lstStyle/>
+          <a:p>
+            <a:pPr algn="ctr" indent="0" marL="0">
+              <a:buNone/>
+            </a:pPr>
+            <a:r>
+              <a:rPr lang="en-US" sz="1600" b="1" dirty="0">
+                <a:solidFill>
+                  <a:srgbClr val="FFFFFF"/>
+                </a:solidFill>
+                <a:latin typeface="Calibri" pitchFamily="34" charset="0"/>
+                <a:ea typeface="Calibri" pitchFamily="34" charset="-122"/>
+                <a:cs typeface="Calibri" pitchFamily="34" charset="-120"/>
+              </a:rPr>
+              <a:t>1</a:t>
+            </a:r>
+            <a:endParaRPr lang="en-US" sz="1600" dirty="0"/>
+          </a:p>
+        </p:txBody>
+      </p:sp>
+      <p:sp>
+        <p:nvSpPr>
+          <p:cNvPr id="5" name="Text 3"/>
+          <p:cNvSpPr/>
+          <p:nvPr/>
+        </p:nvSpPr>
+        <p:spPr>
+          <a:xfrm>
+            <a:off x="1188720" y="1097280"/>
+            <a:ext cx="7406640" cy="320040"/>
+          </a:xfrm>
+          <a:prstGeom prst="rect">
+            <a:avLst/>
+          </a:prstGeom>
+          <a:noFill/>
+          <a:ln/>
+        </p:spPr>
+        <p:txBody>
+          <a:bodyPr wrap="square" lIns="0" tIns="0" rIns="0" bIns="0" rtlCol="0" anchor="ctr"/>
+          <a:lstStyle/>
+          <a:p>
+            <a:pPr indent="0" marL="0">
+              <a:buNone/>
+            </a:pPr>
+            <a:r>
+              <a:rPr lang="en-US" sz="1600" b="1" dirty="0">
+                <a:solidFill>
+                  <a:srgbClr val="1E2761"/>
+                </a:solidFill>
+                <a:latin typeface="Calibri" pitchFamily="34" charset="0"/>
+                <a:ea typeface="Calibri" pitchFamily="34" charset="-122"/>
+                <a:cs typeface="Calibri" pitchFamily="34" charset="-120"/>
+              </a:rPr>
+              <a:t>GPT-3.5 adoption may not predict GPT-4o adoption</a:t>
+            </a:r>
+            <a:endParaRPr lang="en-US" sz="1600" dirty="0"/>
+          </a:p>
+        </p:txBody>
+      </p:sp>
+      <p:sp>
+        <p:nvSpPr>
+          <p:cNvPr id="6" name="Text 4"/>
+          <p:cNvSpPr/>
+          <p:nvPr/>
+        </p:nvSpPr>
+        <p:spPr>
+          <a:xfrm>
+            <a:off x="1188720" y="1444752"/>
+            <a:ext cx="7406640" cy="594360"/>
+          </a:xfrm>
+          <a:prstGeom prst="rect">
+            <a:avLst/>
+          </a:prstGeom>
+          <a:noFill/>
+          <a:ln/>
+        </p:spPr>
+        <p:txBody>
+          <a:bodyPr wrap="square" lIns="0" tIns="0" rIns="0" bIns="0" rtlCol="0" anchor="ctr"/>
+          <a:lstStyle/>
+          <a:p>
+            <a:pPr indent="0" marL="0">
+              <a:buNone/>
+            </a:pPr>
+            <a:r>
+              <a:rPr lang="en-US" sz="1200" dirty="0">
+                <a:solidFill>
+                  <a:srgbClr val="1E2761"/>
+                </a:solidFill>
+                <a:latin typeface="Calibri" pitchFamily="34" charset="0"/>
+                <a:ea typeface="Calibri" pitchFamily="34" charset="-122"/>
+                <a:cs typeface="Calibri" pitchFamily="34" charset="-120"/>
+              </a:rPr>
+              <a:t>Propensity scores capture structural field-level receptivity to LLM assistance, not adoption of a specific model. Measured during a pre-gaming period when there was no reputational cost to AI-influenced writing.</a:t>
+            </a:r>
+            <a:endParaRPr lang="en-US" sz="1200" dirty="0"/>
+          </a:p>
+        </p:txBody>
+      </p:sp>
+      <p:sp>
+        <p:nvSpPr>
+          <p:cNvPr id="7" name="Shape 5"/>
+          <p:cNvSpPr/>
+          <p:nvPr/>
+        </p:nvSpPr>
+        <p:spPr>
+          <a:xfrm>
+            <a:off x="548640" y="2286000"/>
+            <a:ext cx="411480" cy="411480"/>
+          </a:xfrm>
+          <a:prstGeom prst="ellipse">
+            <a:avLst/>
+          </a:prstGeom>
+          <a:solidFill>
+            <a:srgbClr val="3A7BD5"/>
+          </a:solidFill>
+          <a:ln/>
+        </p:spPr>
+      </p:sp>
+      <p:sp>
+        <p:nvSpPr>
+          <p:cNvPr id="8" name="Text 6"/>
+          <p:cNvSpPr/>
+          <p:nvPr/>
+        </p:nvSpPr>
+        <p:spPr>
+          <a:xfrm>
+            <a:off x="548640" y="2286000"/>
+            <a:ext cx="411480" cy="411480"/>
+          </a:xfrm>
+          <a:prstGeom prst="rect">
+            <a:avLst/>
+          </a:prstGeom>
+          <a:noFill/>
+          <a:ln/>
+        </p:spPr>
+        <p:txBody>
+          <a:bodyPr wrap="square" rtlCol="0" anchor="ctr"/>
+          <a:lstStyle/>
+          <a:p>
+            <a:pPr algn="ctr" indent="0" marL="0">
+              <a:buNone/>
+            </a:pPr>
+            <a:r>
+              <a:rPr lang="en-US" sz="1600" b="1" dirty="0">
+                <a:solidFill>
+                  <a:srgbClr val="FFFFFF"/>
+                </a:solidFill>
+                <a:latin typeface="Calibri" pitchFamily="34" charset="0"/>
+                <a:ea typeface="Calibri" pitchFamily="34" charset="-122"/>
+                <a:cs typeface="Calibri" pitchFamily="34" charset="-120"/>
+              </a:rPr>
+              <a:t>2</a:t>
+            </a:r>
+            <a:endParaRPr lang="en-US" sz="1600" dirty="0"/>
+          </a:p>
+        </p:txBody>
+      </p:sp>
+      <p:sp>
+        <p:nvSpPr>
+          <p:cNvPr id="9" name="Text 7"/>
+          <p:cNvSpPr/>
+          <p:nvPr/>
+        </p:nvSpPr>
+        <p:spPr>
+          <a:xfrm>
+            <a:off x="1188720" y="2286000"/>
+            <a:ext cx="7406640" cy="320040"/>
+          </a:xfrm>
+          <a:prstGeom prst="rect">
+            <a:avLst/>
+          </a:prstGeom>
+          <a:noFill/>
+          <a:ln/>
+        </p:spPr>
+        <p:txBody>
+          <a:bodyPr wrap="square" lIns="0" tIns="0" rIns="0" bIns="0" rtlCol="0" anchor="ctr"/>
+          <a:lstStyle/>
+          <a:p>
+            <a:pPr indent="0" marL="0">
+              <a:buNone/>
+            </a:pPr>
+            <a:r>
+              <a:rPr lang="en-US" sz="1600" b="1" dirty="0">
+                <a:solidFill>
+                  <a:srgbClr val="1E2761"/>
+                </a:solidFill>
+                <a:latin typeface="Calibri" pitchFamily="34" charset="0"/>
+                <a:ea typeface="Calibri" pitchFamily="34" charset="-122"/>
+                <a:cs typeface="Calibri" pitchFamily="34" charset="-120"/>
+              </a:rPr>
+              <a:t>Concurrent LLM releases confound the GPT-4o effect</a:t>
+            </a:r>
+            <a:endParaRPr lang="en-US" sz="1600" dirty="0"/>
+          </a:p>
+        </p:txBody>
+      </p:sp>
+      <p:sp>
+        <p:nvSpPr>
+          <p:cNvPr id="10" name="Text 8"/>
+          <p:cNvSpPr/>
+          <p:nvPr/>
+        </p:nvSpPr>
+        <p:spPr>
+          <a:xfrm>
+            <a:off x="1188720" y="2633472"/>
+            <a:ext cx="7406640" cy="594360"/>
+          </a:xfrm>
+          <a:prstGeom prst="rect">
+            <a:avLst/>
+          </a:prstGeom>
+          <a:noFill/>
+          <a:ln/>
+        </p:spPr>
+        <p:txBody>
+          <a:bodyPr wrap="square" lIns="0" tIns="0" rIns="0" bIns="0" rtlCol="0" anchor="ctr"/>
+          <a:lstStyle/>
+          <a:p>
+            <a:pPr indent="0" marL="0">
+              <a:buNone/>
+            </a:pPr>
+            <a:r>
+              <a:rPr lang="en-US" sz="1200" dirty="0">
+                <a:solidFill>
+                  <a:srgbClr val="1E2761"/>
+                </a:solidFill>
+                <a:latin typeface="Calibri" pitchFamily="34" charset="0"/>
+                <a:ea typeface="Calibri" pitchFamily="34" charset="-122"/>
+                <a:cs typeface="Calibri" pitchFamily="34" charset="-120"/>
+              </a:rPr>
+              <a:t>Claude, Gemini, and Llama improved over the same period. Our estimand is best interpreted as the effect of crossing a broad AI accessibility threshold — GPT-4o was the first frontier model available for free — not the effect of one product.</a:t>
+            </a:r>
+            <a:endParaRPr lang="en-US" sz="1200" dirty="0"/>
+          </a:p>
+        </p:txBody>
+      </p:sp>
+      <p:sp>
+        <p:nvSpPr>
+          <p:cNvPr id="11" name="Shape 9"/>
+          <p:cNvSpPr/>
+          <p:nvPr/>
+        </p:nvSpPr>
+        <p:spPr>
+          <a:xfrm>
+            <a:off x="548640" y="3474720"/>
+            <a:ext cx="411480" cy="411480"/>
+          </a:xfrm>
+          <a:prstGeom prst="ellipse">
+            <a:avLst/>
+          </a:prstGeom>
+          <a:solidFill>
+            <a:srgbClr val="3A7BD5"/>
+          </a:solidFill>
+          <a:ln/>
+        </p:spPr>
+      </p:sp>
+      <p:sp>
+        <p:nvSpPr>
+          <p:cNvPr id="12" name="Text 10"/>
+          <p:cNvSpPr/>
+          <p:nvPr/>
+        </p:nvSpPr>
+        <p:spPr>
+          <a:xfrm>
+            <a:off x="548640" y="3474720"/>
+            <a:ext cx="411480" cy="411480"/>
+          </a:xfrm>
+          <a:prstGeom prst="rect">
+            <a:avLst/>
+          </a:prstGeom>
+          <a:noFill/>
+          <a:ln/>
+        </p:spPr>
+        <p:txBody>
+          <a:bodyPr wrap="square" rtlCol="0" anchor="ctr"/>
+          <a:lstStyle/>
+          <a:p>
+            <a:pPr algn="ctr" indent="0" marL="0">
+              <a:buNone/>
+            </a:pPr>
+            <a:r>
+              <a:rPr lang="en-US" sz="1600" b="1" dirty="0">
+                <a:solidFill>
+                  <a:srgbClr val="FFFFFF"/>
+                </a:solidFill>
+                <a:latin typeface="Calibri" pitchFamily="34" charset="0"/>
+                <a:ea typeface="Calibri" pitchFamily="34" charset="-122"/>
+                <a:cs typeface="Calibri" pitchFamily="34" charset="-120"/>
+              </a:rPr>
+              <a:t>3</a:t>
+            </a:r>
+            <a:endParaRPr lang="en-US" sz="1600" dirty="0"/>
+          </a:p>
+        </p:txBody>
+      </p:sp>
+      <p:sp>
+        <p:nvSpPr>
+          <p:cNvPr id="13" name="Text 11"/>
+          <p:cNvSpPr/>
+          <p:nvPr/>
+        </p:nvSpPr>
+        <p:spPr>
+          <a:xfrm>
+            <a:off x="1188720" y="3474720"/>
+            <a:ext cx="7406640" cy="320040"/>
+          </a:xfrm>
+          <a:prstGeom prst="rect">
+            <a:avLst/>
+          </a:prstGeom>
+          <a:noFill/>
+          <a:ln/>
+        </p:spPr>
+        <p:txBody>
+          <a:bodyPr wrap="square" lIns="0" tIns="0" rIns="0" bIns="0" rtlCol="0" anchor="ctr"/>
+          <a:lstStyle/>
+          <a:p>
+            <a:pPr indent="0" marL="0">
+              <a:buNone/>
+            </a:pPr>
+            <a:r>
+              <a:rPr lang="en-US" sz="1600" b="1" dirty="0">
+                <a:solidFill>
+                  <a:srgbClr val="1E2761"/>
+                </a:solidFill>
+                <a:latin typeface="Calibri" pitchFamily="34" charset="0"/>
+                <a:ea typeface="Calibri" pitchFamily="34" charset="-122"/>
+                <a:cs typeface="Calibri" pitchFamily="34" charset="-120"/>
+              </a:rPr>
+              <a:t>Propensity reflects field structure, not individual behavior</a:t>
+            </a:r>
+            <a:endParaRPr lang="en-US" sz="1600" dirty="0"/>
+          </a:p>
+        </p:txBody>
+      </p:sp>
+      <p:sp>
+        <p:nvSpPr>
+          <p:cNvPr id="14" name="Text 12"/>
+          <p:cNvSpPr/>
+          <p:nvPr/>
+        </p:nvSpPr>
+        <p:spPr>
+          <a:xfrm>
+            <a:off x="1188720" y="3822192"/>
+            <a:ext cx="7406640" cy="685800"/>
+          </a:xfrm>
+          <a:prstGeom prst="rect">
+            <a:avLst/>
+          </a:prstGeom>
+          <a:noFill/>
+          <a:ln/>
+        </p:spPr>
+        <p:txBody>
+          <a:bodyPr wrap="square" lIns="0" tIns="0" rIns="0" bIns="0" rtlCol="0" anchor="ctr"/>
+          <a:lstStyle/>
+          <a:p>
+            <a:pPr indent="0" marL="0">
+              <a:buNone/>
+            </a:pPr>
+            <a:r>
+              <a:rPr lang="en-US" sz="1200" dirty="0">
+                <a:solidFill>
+                  <a:srgbClr val="1E2761"/>
+                </a:solidFill>
+                <a:latin typeface="Calibri" pitchFamily="34" charset="0"/>
+                <a:ea typeface="Calibri" pitchFamily="34" charset="-122"/>
+                <a:cs typeface="Calibri" pitchFamily="34" charset="-120"/>
+              </a:rPr>
+              <a:t>We cannot distinguish whether high-propensity fields adopt LLMs because of structural workflow amenability or because of demographic composition (e.g., younger, more tech-savvy researchers). Field FE absorb level differences, but the interaction could still reflect composition.</a:t>
+            </a:r>
+            <a:endParaRPr lang="en-US" sz="1200" dirty="0"/>
+          </a:p>
+        </p:txBody>
+      </p:sp>
+    </p:spTree>
+  </p:cSld>
+  <p:clrMapOvr>
+    <a:masterClrMapping/>
+  </p:clrMapOvr>
+</p:sld>
+</file>
+
+<file path=ppt/slides/slide14.xml><?xml version="1.0" encoding="utf-8"?>
+<p:sld xmlns:a="http://schemas.openxmlformats.org/drawingml/2006/main" xmlns:r="http://schemas.openxmlformats.org/officeDocument/2006/relationships" xmlns:p="http://schemas.openxmlformats.org/presentationml/2006/main">
+  <p:cSld name="Slide 14">
+    <p:bg>
+      <p:bgPr>
+        <a:solidFill>
           <a:srgbClr val="1E2761"/>
         </a:solidFill>
       </p:bgPr>
@@ -2491,6 +3825,443 @@
               <a:t>Ben Heim &amp; Adam Tuchler  |  University of Chicago  |  bheim@uchicago.edu</a:t>
             </a:r>
             <a:endParaRPr lang="en-US" sz="1100" dirty="0"/>
+          </a:p>
+        </p:txBody>
+      </p:sp>
+    </p:spTree>
+  </p:cSld>
+  <p:clrMapOvr>
+    <a:masterClrMapping/>
+  </p:clrMapOvr>
+</p:sld>
+</file>
+
+<file path=ppt/slides/slide15.xml><?xml version="1.0" encoding="utf-8"?>
+<p:sld xmlns:a="http://schemas.openxmlformats.org/drawingml/2006/main" xmlns:p="http://schemas.openxmlformats.org/presentationml/2006/main" xmlns:r="http://schemas.openxmlformats.org/officeDocument/2006/relationships">
+  <p:cSld>
+    <p:bg>
+      <p:bgPr>
+        <a:solidFill>
+          <a:srgbClr val="F4F6FA"/>
+        </a:solidFill>
+        <a:effectLst/>
+      </p:bgPr>
+    </p:bg>
+    <p:spTree>
+      <p:nvGrpSpPr>
+        <p:cNvPr id="1" name=""/>
+        <p:cNvGrpSpPr/>
+        <p:nvPr/>
+      </p:nvGrpSpPr>
+      <p:grpSpPr/>
+      <p:sp>
+        <p:nvSpPr>
+          <p:cNvPr id="2" name="TextBox 1"/>
+          <p:cNvSpPr txBox="1"/>
+          <p:nvPr/>
+        </p:nvSpPr>
+        <p:spPr>
+          <a:xfrm>
+            <a:off x="548640" y="274320"/>
+            <a:ext cx="8046720" cy="548640"/>
+          </a:xfrm>
+          <a:prstGeom prst="rect">
+            <a:avLst/>
+          </a:prstGeom>
+          <a:noFill/>
+        </p:spPr>
+        <p:txBody>
+          <a:bodyPr wrap="square" anchor="t">
+            <a:spAutoFit/>
+          </a:bodyPr>
+          <a:lstStyle/>
+          <a:p>
+            <a:pPr algn="l">
+              <a:defRPr sz="2800" b="1" i="0">
+                <a:solidFill>
+                  <a:srgbClr val="1E2761"/>
+                </a:solidFill>
+                <a:latin typeface="Georgia"/>
+              </a:defRPr>
+            </a:pPr>
+            <a:r>
+              <a:t>Future Work</a:t>
+            </a:r>
+          </a:p>
+        </p:txBody>
+      </p:sp>
+      <p:sp>
+        <p:nvSpPr>
+          <p:cNvPr id="3" name="Oval 2"/>
+          <p:cNvSpPr/>
+          <p:nvPr/>
+        </p:nvSpPr>
+        <p:spPr>
+          <a:xfrm>
+            <a:off x="548640" y="1097280"/>
+            <a:ext cx="411480" cy="411480"/>
+          </a:xfrm>
+          <a:prstGeom prst="ellipse">
+            <a:avLst/>
+          </a:prstGeom>
+          <a:solidFill>
+            <a:srgbClr val="3A7BD5"/>
+          </a:solidFill>
+          <a:ln>
+            <a:noFill/>
+          </a:ln>
+        </p:spPr>
+        <p:style>
+          <a:lnRef idx="1">
+            <a:schemeClr val="accent1"/>
+          </a:lnRef>
+          <a:fillRef idx="3">
+            <a:schemeClr val="accent1"/>
+          </a:fillRef>
+          <a:effectRef idx="2">
+            <a:schemeClr val="accent1"/>
+          </a:effectRef>
+          <a:fontRef idx="minor">
+            <a:schemeClr val="lt1"/>
+          </a:fontRef>
+        </p:style>
+        <p:txBody>
+          <a:bodyPr rtlCol="0" anchor="ctr" wrap="none"/>
+          <a:lstStyle/>
+          <a:p>
+            <a:pPr algn="ctr">
+              <a:defRPr sz="1600" b="1">
+                <a:solidFill>
+                  <a:srgbClr val="FFFFFF"/>
+                </a:solidFill>
+                <a:latin typeface="Calibri"/>
+              </a:defRPr>
+            </a:pPr>
+            <a:r>
+              <a:t>1</a:t>
+            </a:r>
+          </a:p>
+        </p:txBody>
+      </p:sp>
+      <p:sp>
+        <p:nvSpPr>
+          <p:cNvPr id="4" name="TextBox 3"/>
+          <p:cNvSpPr txBox="1"/>
+          <p:nvPr/>
+        </p:nvSpPr>
+        <p:spPr>
+          <a:xfrm>
+            <a:off x="1188720" y="1097280"/>
+            <a:ext cx="7406640" cy="320040"/>
+          </a:xfrm>
+          <a:prstGeom prst="rect">
+            <a:avLst/>
+          </a:prstGeom>
+          <a:noFill/>
+        </p:spPr>
+        <p:txBody>
+          <a:bodyPr wrap="square" anchor="t">
+            <a:spAutoFit/>
+          </a:bodyPr>
+          <a:lstStyle/>
+          <a:p>
+            <a:pPr algn="l">
+              <a:defRPr sz="1600" b="1" i="0">
+                <a:solidFill>
+                  <a:srgbClr val="1E2761"/>
+                </a:solidFill>
+                <a:latin typeface="Calibri"/>
+              </a:defRPr>
+            </a:pPr>
+            <a:r>
+              <a:t>Do cross-disciplinary citations produce lasting impact?</a:t>
+            </a:r>
+          </a:p>
+        </p:txBody>
+      </p:sp>
+      <p:sp>
+        <p:nvSpPr>
+          <p:cNvPr id="5" name="TextBox 4"/>
+          <p:cNvSpPr txBox="1"/>
+          <p:nvPr/>
+        </p:nvSpPr>
+        <p:spPr>
+          <a:xfrm>
+            <a:off x="1188720" y="1444752"/>
+            <a:ext cx="7406640" cy="731520"/>
+          </a:xfrm>
+          <a:prstGeom prst="rect">
+            <a:avLst/>
+          </a:prstGeom>
+          <a:noFill/>
+        </p:spPr>
+        <p:txBody>
+          <a:bodyPr wrap="square" anchor="t">
+            <a:spAutoFit/>
+          </a:bodyPr>
+          <a:lstStyle/>
+          <a:p>
+            <a:pPr algn="l">
+              <a:defRPr sz="1200" b="0" i="0">
+                <a:solidFill>
+                  <a:srgbClr val="1E2761"/>
+                </a:solidFill>
+                <a:latin typeface="Calibri"/>
+              </a:defRPr>
+            </a:pPr>
+            <a:r>
+              <a:t>Track forward citations, disruption indices (CD₅), and knowledge persistence of AI-era papers over 3–5 years. Tests whether the entropy increase we document translates into genuine knowledge integration or superficial breadth — directly engaging Hao et al.’s knowledge contraction and Kusumegi et al.’s quality decline findings.</a:t>
+            </a:r>
+          </a:p>
+        </p:txBody>
+      </p:sp>
+      <p:sp>
+        <p:nvSpPr>
+          <p:cNvPr id="6" name="Oval 5"/>
+          <p:cNvSpPr/>
+          <p:nvPr/>
+        </p:nvSpPr>
+        <p:spPr>
+          <a:xfrm>
+            <a:off x="548640" y="2377440"/>
+            <a:ext cx="411480" cy="411480"/>
+          </a:xfrm>
+          <a:prstGeom prst="ellipse">
+            <a:avLst/>
+          </a:prstGeom>
+          <a:solidFill>
+            <a:srgbClr val="3A7BD5"/>
+          </a:solidFill>
+          <a:ln>
+            <a:noFill/>
+          </a:ln>
+        </p:spPr>
+        <p:style>
+          <a:lnRef idx="1">
+            <a:schemeClr val="accent1"/>
+          </a:lnRef>
+          <a:fillRef idx="3">
+            <a:schemeClr val="accent1"/>
+          </a:fillRef>
+          <a:effectRef idx="2">
+            <a:schemeClr val="accent1"/>
+          </a:effectRef>
+          <a:fontRef idx="minor">
+            <a:schemeClr val="lt1"/>
+          </a:fontRef>
+        </p:style>
+        <p:txBody>
+          <a:bodyPr rtlCol="0" anchor="ctr" wrap="none"/>
+          <a:lstStyle/>
+          <a:p>
+            <a:pPr algn="ctr">
+              <a:defRPr sz="1600" b="1">
+                <a:solidFill>
+                  <a:srgbClr val="FFFFFF"/>
+                </a:solidFill>
+                <a:latin typeface="Calibri"/>
+              </a:defRPr>
+            </a:pPr>
+            <a:r>
+              <a:t>2</a:t>
+            </a:r>
+          </a:p>
+        </p:txBody>
+      </p:sp>
+      <p:sp>
+        <p:nvSpPr>
+          <p:cNvPr id="7" name="TextBox 6"/>
+          <p:cNvSpPr txBox="1"/>
+          <p:nvPr/>
+        </p:nvSpPr>
+        <p:spPr>
+          <a:xfrm>
+            <a:off x="1188720" y="2377440"/>
+            <a:ext cx="7406640" cy="320040"/>
+          </a:xfrm>
+          <a:prstGeom prst="rect">
+            <a:avLst/>
+          </a:prstGeom>
+          <a:noFill/>
+        </p:spPr>
+        <p:txBody>
+          <a:bodyPr wrap="square" anchor="t">
+            <a:spAutoFit/>
+          </a:bodyPr>
+          <a:lstStyle/>
+          <a:p>
+            <a:pPr algn="l">
+              <a:defRPr sz="1600" b="1" i="0">
+                <a:solidFill>
+                  <a:srgbClr val="1E2761"/>
+                </a:solidFill>
+                <a:latin typeface="Calibri"/>
+              </a:defRPr>
+            </a:pPr>
+            <a:r>
+              <a:t>Individual-level analysis</a:t>
+            </a:r>
+          </a:p>
+        </p:txBody>
+      </p:sp>
+      <p:sp>
+        <p:nvSpPr>
+          <p:cNvPr id="8" name="TextBox 7"/>
+          <p:cNvSpPr txBox="1"/>
+          <p:nvPr/>
+        </p:nvSpPr>
+        <p:spPr>
+          <a:xfrm>
+            <a:off x="1188720" y="2724912"/>
+            <a:ext cx="7406640" cy="594360"/>
+          </a:xfrm>
+          <a:prstGeom prst="rect">
+            <a:avLst/>
+          </a:prstGeom>
+          <a:noFill/>
+        </p:spPr>
+        <p:txBody>
+          <a:bodyPr wrap="square" anchor="t">
+            <a:spAutoFit/>
+          </a:bodyPr>
+          <a:lstStyle/>
+          <a:p>
+            <a:pPr algn="l">
+              <a:defRPr sz="1200" b="0" i="0">
+                <a:solidFill>
+                  <a:srgbClr val="1E2761"/>
+                </a:solidFill>
+                <a:latin typeface="Calibri"/>
+              </a:defRPr>
+            </a:pPr>
+            <a:r>
+              <a:t>Move from field-level to author-level treatment using individual writing style shifts as a proxy for personal LLM adoption. Would allow researcher fixed effects and sharper identification of who drives the entropy increase.</a:t>
+            </a:r>
+          </a:p>
+        </p:txBody>
+      </p:sp>
+      <p:sp>
+        <p:nvSpPr>
+          <p:cNvPr id="9" name="Oval 8"/>
+          <p:cNvSpPr/>
+          <p:nvPr/>
+        </p:nvSpPr>
+        <p:spPr>
+          <a:xfrm>
+            <a:off x="548640" y="3566160"/>
+            <a:ext cx="411480" cy="411480"/>
+          </a:xfrm>
+          <a:prstGeom prst="ellipse">
+            <a:avLst/>
+          </a:prstGeom>
+          <a:solidFill>
+            <a:srgbClr val="3A7BD5"/>
+          </a:solidFill>
+          <a:ln>
+            <a:noFill/>
+          </a:ln>
+        </p:spPr>
+        <p:style>
+          <a:lnRef idx="1">
+            <a:schemeClr val="accent1"/>
+          </a:lnRef>
+          <a:fillRef idx="3">
+            <a:schemeClr val="accent1"/>
+          </a:fillRef>
+          <a:effectRef idx="2">
+            <a:schemeClr val="accent1"/>
+          </a:effectRef>
+          <a:fontRef idx="minor">
+            <a:schemeClr val="lt1"/>
+          </a:fontRef>
+        </p:style>
+        <p:txBody>
+          <a:bodyPr rtlCol="0" anchor="ctr" wrap="none"/>
+          <a:lstStyle/>
+          <a:p>
+            <a:pPr algn="ctr">
+              <a:defRPr sz="1600" b="1">
+                <a:solidFill>
+                  <a:srgbClr val="FFFFFF"/>
+                </a:solidFill>
+                <a:latin typeface="Calibri"/>
+              </a:defRPr>
+            </a:pPr>
+            <a:r>
+              <a:t>3</a:t>
+            </a:r>
+          </a:p>
+        </p:txBody>
+      </p:sp>
+      <p:sp>
+        <p:nvSpPr>
+          <p:cNvPr id="10" name="TextBox 9"/>
+          <p:cNvSpPr txBox="1"/>
+          <p:nvPr/>
+        </p:nvSpPr>
+        <p:spPr>
+          <a:xfrm>
+            <a:off x="1188720" y="3566160"/>
+            <a:ext cx="7406640" cy="320040"/>
+          </a:xfrm>
+          <a:prstGeom prst="rect">
+            <a:avLst/>
+          </a:prstGeom>
+          <a:noFill/>
+        </p:spPr>
+        <p:txBody>
+          <a:bodyPr wrap="square" anchor="t">
+            <a:spAutoFit/>
+          </a:bodyPr>
+          <a:lstStyle/>
+          <a:p>
+            <a:pPr algn="l">
+              <a:defRPr sz="1600" b="1" i="0">
+                <a:solidFill>
+                  <a:srgbClr val="1E2761"/>
+                </a:solidFill>
+                <a:latin typeface="Calibri"/>
+              </a:defRPr>
+            </a:pPr>
+            <a:r>
+              <a:t>Disentangle the mechanism</a:t>
+            </a:r>
+          </a:p>
+        </p:txBody>
+      </p:sp>
+      <p:sp>
+        <p:nvSpPr>
+          <p:cNvPr id="11" name="TextBox 10"/>
+          <p:cNvSpPr txBox="1"/>
+          <p:nvPr/>
+        </p:nvSpPr>
+        <p:spPr>
+          <a:xfrm>
+            <a:off x="1188720" y="3913632"/>
+            <a:ext cx="7406640" cy="594360"/>
+          </a:xfrm>
+          <a:prstGeom prst="rect">
+            <a:avLst/>
+          </a:prstGeom>
+          <a:noFill/>
+        </p:spPr>
+        <p:txBody>
+          <a:bodyPr wrap="square" anchor="t">
+            <a:spAutoFit/>
+          </a:bodyPr>
+          <a:lstStyle/>
+          <a:p>
+            <a:pPr algn="l">
+              <a:defRPr sz="1200" b="0" i="0">
+                <a:solidFill>
+                  <a:srgbClr val="1E2761"/>
+                </a:solidFill>
+                <a:latin typeface="Calibri"/>
+              </a:defRPr>
+            </a:pPr>
+            <a:r>
+              <a:t>Are researchers discovering new literatures through LLM suggestions (Algaba’s channel), or does LLM-assisted writing lower the cost of integrating sources they already knew about? Experimental or survey-based designs could separate these pathways.</a:t>
+            </a:r>
           </a:p>
         </p:txBody>
       </p:sp>
@@ -2844,7 +4615,7 @@
               <a:buNone/>
             </a:pPr>
             <a:r>
-              <a:rPr lang="en-US" sz="2400" b="1" dirty="0">
+              <a:rPr lang="en-US" sz="2800" b="1" dirty="0">
                 <a:solidFill>
                   <a:srgbClr val="1E2761"/>
                 </a:solidFill>
@@ -2852,22 +4623,51 @@
                 <a:ea typeface="Georgia" pitchFamily="34" charset="-122"/>
                 <a:cs typeface="Georgia" pitchFamily="34" charset="-120"/>
               </a:rPr>
-              <a:t>Measuring AI Adoption: Propensity Scores</a:t>
-            </a:r>
-            <a:endParaRPr lang="en-US" sz="2400" dirty="0"/>
-          </a:p>
-        </p:txBody>
-      </p:sp>
-      <p:sp>
-        <p:nvSpPr>
-          <p:cNvPr id="3" name="Text 1"/>
+              <a:t>Prior Work</a:t>
+            </a:r>
+            <a:endParaRPr lang="en-US" sz="2800" dirty="0"/>
+          </a:p>
+        </p:txBody>
+      </p:sp>
+      <p:sp>
+        <p:nvSpPr>
+          <p:cNvPr id="3" name="Shape 1"/>
           <p:cNvSpPr/>
           <p:nvPr/>
         </p:nvSpPr>
         <p:spPr>
           <a:xfrm>
-            <a:off x="548640" y="777240"/>
-            <a:ext cx="8046720" cy="365760"/>
+            <a:off x="548640" y="1005840"/>
+            <a:ext cx="8046720" cy="1051560"/>
+          </a:xfrm>
+          <a:prstGeom prst="rect">
+            <a:avLst>
+              <a:gd name="adj" fmla="val 4348"/>
+            </a:avLst>
+          </a:prstGeom>
+          <a:solidFill>
+            <a:srgbClr val="FFFFFF"/>
+          </a:solidFill>
+          <a:ln/>
+          <a:effectLst>
+            <a:outerShdw sx="100000" sy="100000" kx="0" ky="0" algn="bl" rotWithShape="0" blurRad="76200" dist="25400" dir="8100000">
+              <a:srgbClr val="000000">
+                <a:alpha val="10000"/>
+              </a:srgbClr>
+            </a:outerShdw>
+          </a:effectLst>
+        </p:spPr>
+      </p:sp>
+      <p:sp>
+        <p:nvSpPr>
+          <p:cNvPr id="4" name="Text 2"/>
+          <p:cNvSpPr/>
+          <p:nvPr/>
+        </p:nvSpPr>
+        <p:spPr>
+          <a:xfrm>
+            <a:off x="777240" y="1051560"/>
+            <a:ext cx="3657600" cy="274320"/>
           </a:xfrm>
           <a:prstGeom prst="rect">
             <a:avLst/>
@@ -2883,43 +4683,451 @@
               <a:buNone/>
             </a:pPr>
             <a:r>
-              <a:rPr lang="en-US" sz="1200" dirty="0">
+              <a:rPr lang="en-US" sz="1300" b="1" dirty="0">
                 <a:solidFill>
-                  <a:srgbClr val="556688"/>
+                  <a:srgbClr val="1E2761"/>
                 </a:solidFill>
                 <a:latin typeface="Calibri" pitchFamily="34" charset="0"/>
                 <a:ea typeface="Calibri" pitchFamily="34" charset="-122"/>
                 <a:cs typeface="Calibri" pitchFamily="34" charset="-120"/>
               </a:rPr>
-              <a:t>Increase in Kobak marker word frequency from pre- to post-ChatGPT (GPT-3.5) era</a:t>
+              <a:t>Hao et al. (2026, Nature)</a:t>
+            </a:r>
+            <a:endParaRPr lang="en-US" sz="1300" dirty="0"/>
+          </a:p>
+        </p:txBody>
+      </p:sp>
+      <p:sp>
+        <p:nvSpPr>
+          <p:cNvPr id="5" name="Text 3"/>
+          <p:cNvSpPr/>
+          <p:nvPr/>
+        </p:nvSpPr>
+        <p:spPr>
+          <a:xfrm>
+            <a:off x="4572000" y="1051560"/>
+            <a:ext cx="3840480" cy="274320"/>
+          </a:xfrm>
+          <a:prstGeom prst="rect">
+            <a:avLst/>
+          </a:prstGeom>
+          <a:noFill/>
+          <a:ln/>
+        </p:spPr>
+        <p:txBody>
+          <a:bodyPr wrap="square" rtlCol="0" anchor="ctr"/>
+          <a:lstStyle/>
+          <a:p>
+            <a:pPr algn="r" indent="0" marL="0">
+              <a:buNone/>
+            </a:pPr>
+            <a:r>
+              <a:rPr lang="en-US" sz="1100" b="1" dirty="0">
+                <a:solidFill>
+                  <a:srgbClr val="3A7BD5"/>
+                </a:solidFill>
+                <a:latin typeface="Calibri" pitchFamily="34" charset="0"/>
+                <a:ea typeface="Calibri" pitchFamily="34" charset="-122"/>
+                <a:cs typeface="Calibri" pitchFamily="34" charset="-120"/>
+              </a:rPr>
+              <a:t>AI contracts knowledge extent</a:t>
+            </a:r>
+            <a:endParaRPr lang="en-US" sz="1100" dirty="0"/>
+          </a:p>
+        </p:txBody>
+      </p:sp>
+      <p:sp>
+        <p:nvSpPr>
+          <p:cNvPr id="6" name="Text 4"/>
+          <p:cNvSpPr/>
+          <p:nvPr/>
+        </p:nvSpPr>
+        <p:spPr>
+          <a:xfrm>
+            <a:off x="777240" y="1353312"/>
+            <a:ext cx="7589520" cy="594360"/>
+          </a:xfrm>
+          <a:prstGeom prst="rect">
+            <a:avLst/>
+          </a:prstGeom>
+          <a:noFill/>
+          <a:ln/>
+        </p:spPr>
+        <p:txBody>
+          <a:bodyPr wrap="square" rtlCol="0" anchor="ctr"/>
+          <a:lstStyle/>
+          <a:p>
+            <a:pPr indent="0" marL="0">
+              <a:buNone/>
+            </a:pPr>
+            <a:r>
+              <a:rPr lang="en-US" sz="1100" dirty="0">
+                <a:solidFill>
+                  <a:srgbClr val="1E2761"/>
+                </a:solidFill>
+                <a:latin typeface="Calibri" pitchFamily="34" charset="0"/>
+                <a:ea typeface="Calibri" pitchFamily="34" charset="-122"/>
+                <a:cs typeface="Calibri" pitchFamily="34" charset="-120"/>
+              </a:rPr>
+              <a:t>Binary classification of AI-augmented papers across 41M articles. Finds AI use reduces the "diameter" of knowledge covered. Focuses on AI as a research method, not LLM-assisted writing specifically.</a:t>
+            </a:r>
+            <a:endParaRPr lang="en-US" sz="1100" dirty="0"/>
+          </a:p>
+        </p:txBody>
+      </p:sp>
+      <p:sp>
+        <p:nvSpPr>
+          <p:cNvPr id="7" name="Shape 5"/>
+          <p:cNvSpPr/>
+          <p:nvPr/>
+        </p:nvSpPr>
+        <p:spPr>
+          <a:xfrm>
+            <a:off x="548640" y="2194560"/>
+            <a:ext cx="8046720" cy="1051560"/>
+          </a:xfrm>
+          <a:prstGeom prst="rect">
+            <a:avLst>
+              <a:gd name="adj" fmla="val 4348"/>
+            </a:avLst>
+          </a:prstGeom>
+          <a:solidFill>
+            <a:srgbClr val="FFFFFF"/>
+          </a:solidFill>
+          <a:ln/>
+          <a:effectLst>
+            <a:outerShdw sx="100000" sy="100000" kx="0" ky="0" algn="bl" rotWithShape="0" blurRad="76200" dist="25400" dir="8100000">
+              <a:srgbClr val="000000">
+                <a:alpha val="10000"/>
+              </a:srgbClr>
+            </a:outerShdw>
+          </a:effectLst>
+        </p:spPr>
+      </p:sp>
+      <p:sp>
+        <p:nvSpPr>
+          <p:cNvPr id="8" name="Text 6"/>
+          <p:cNvSpPr/>
+          <p:nvPr/>
+        </p:nvSpPr>
+        <p:spPr>
+          <a:xfrm>
+            <a:off x="777240" y="2240280"/>
+            <a:ext cx="3657600" cy="274320"/>
+          </a:xfrm>
+          <a:prstGeom prst="rect">
+            <a:avLst/>
+          </a:prstGeom>
+          <a:noFill/>
+          <a:ln/>
+        </p:spPr>
+        <p:txBody>
+          <a:bodyPr wrap="square" rtlCol="0" anchor="ctr"/>
+          <a:lstStyle/>
+          <a:p>
+            <a:pPr indent="0" marL="0">
+              <a:buNone/>
+            </a:pPr>
+            <a:r>
+              <a:rPr lang="en-US" sz="1300" b="1" dirty="0">
+                <a:solidFill>
+                  <a:srgbClr val="1E2761"/>
+                </a:solidFill>
+                <a:latin typeface="Calibri" pitchFamily="34" charset="0"/>
+                <a:ea typeface="Calibri" pitchFamily="34" charset="-122"/>
+                <a:cs typeface="Calibri" pitchFamily="34" charset="-120"/>
+              </a:rPr>
+              <a:t>Algaba et al. (2025, NAACL)</a:t>
+            </a:r>
+            <a:endParaRPr lang="en-US" sz="1300" dirty="0"/>
+          </a:p>
+        </p:txBody>
+      </p:sp>
+      <p:sp>
+        <p:nvSpPr>
+          <p:cNvPr id="9" name="Text 7"/>
+          <p:cNvSpPr/>
+          <p:nvPr/>
+        </p:nvSpPr>
+        <p:spPr>
+          <a:xfrm>
+            <a:off x="4572000" y="2240280"/>
+            <a:ext cx="3840480" cy="274320"/>
+          </a:xfrm>
+          <a:prstGeom prst="rect">
+            <a:avLst/>
+          </a:prstGeom>
+          <a:noFill/>
+          <a:ln/>
+        </p:spPr>
+        <p:txBody>
+          <a:bodyPr wrap="square" rtlCol="0" anchor="ctr"/>
+          <a:lstStyle/>
+          <a:p>
+            <a:pPr algn="r" indent="0" marL="0">
+              <a:buNone/>
+            </a:pPr>
+            <a:r>
+              <a:rPr lang="en-US" sz="1100" b="1" dirty="0">
+                <a:solidFill>
+                  <a:srgbClr val="3A7BD5"/>
+                </a:solidFill>
+                <a:latin typeface="Calibri" pitchFamily="34" charset="0"/>
+                <a:ea typeface="Calibri" pitchFamily="34" charset="-122"/>
+                <a:cs typeface="Calibri" pitchFamily="34" charset="-120"/>
+              </a:rPr>
+              <a:t>LLMs mirror &amp; amplify citation bias</a:t>
+            </a:r>
+            <a:endParaRPr lang="en-US" sz="1100" dirty="0"/>
+          </a:p>
+        </p:txBody>
+      </p:sp>
+      <p:sp>
+        <p:nvSpPr>
+          <p:cNvPr id="10" name="Text 8"/>
+          <p:cNvSpPr/>
+          <p:nvPr/>
+        </p:nvSpPr>
+        <p:spPr>
+          <a:xfrm>
+            <a:off x="777240" y="2542032"/>
+            <a:ext cx="7589520" cy="594360"/>
+          </a:xfrm>
+          <a:prstGeom prst="rect">
+            <a:avLst/>
+          </a:prstGeom>
+          <a:noFill/>
+          <a:ln/>
+        </p:spPr>
+        <p:txBody>
+          <a:bodyPr wrap="square" rtlCol="0" anchor="ctr"/>
+          <a:lstStyle/>
+          <a:p>
+            <a:pPr indent="0" marL="0">
+              <a:buNone/>
+            </a:pPr>
+            <a:r>
+              <a:rPr lang="en-US" sz="1100" dirty="0">
+                <a:solidFill>
+                  <a:srgbClr val="1E2761"/>
+                </a:solidFill>
+                <a:latin typeface="Calibri" pitchFamily="34" charset="0"/>
+                <a:ea typeface="Calibri" pitchFamily="34" charset="-122"/>
+                <a:cs typeface="Calibri" pitchFamily="34" charset="-120"/>
+              </a:rPr>
+              <a:t>Analyzes 275K AI-suggested references. LLMs reflect human citation patterns but with a heightened Matthew effect — systematically favoring already highly-cited, high-profile work. Studies what LLMs recommend, not what researchers actually do.</a:t>
+            </a:r>
+            <a:endParaRPr lang="en-US" sz="1100" dirty="0"/>
+          </a:p>
+        </p:txBody>
+      </p:sp>
+      <p:sp>
+        <p:nvSpPr>
+          <p:cNvPr id="11" name="Shape 9"/>
+          <p:cNvSpPr/>
+          <p:nvPr/>
+        </p:nvSpPr>
+        <p:spPr>
+          <a:xfrm>
+            <a:off x="548640" y="3383280"/>
+            <a:ext cx="8046720" cy="1051560"/>
+          </a:xfrm>
+          <a:prstGeom prst="rect">
+            <a:avLst>
+              <a:gd name="adj" fmla="val 4348"/>
+            </a:avLst>
+          </a:prstGeom>
+          <a:solidFill>
+            <a:srgbClr val="FFFFFF"/>
+          </a:solidFill>
+          <a:ln/>
+          <a:effectLst>
+            <a:outerShdw sx="100000" sy="100000" kx="0" ky="0" algn="bl" rotWithShape="0" blurRad="76200" dist="25400" dir="8100000">
+              <a:srgbClr val="000000">
+                <a:alpha val="10000"/>
+              </a:srgbClr>
+            </a:outerShdw>
+          </a:effectLst>
+        </p:spPr>
+      </p:sp>
+      <p:sp>
+        <p:nvSpPr>
+          <p:cNvPr id="12" name="Text 10"/>
+          <p:cNvSpPr/>
+          <p:nvPr/>
+        </p:nvSpPr>
+        <p:spPr>
+          <a:xfrm>
+            <a:off x="777240" y="3429000"/>
+            <a:ext cx="3657600" cy="274320"/>
+          </a:xfrm>
+          <a:prstGeom prst="rect">
+            <a:avLst/>
+          </a:prstGeom>
+          <a:noFill/>
+          <a:ln/>
+        </p:spPr>
+        <p:txBody>
+          <a:bodyPr wrap="square" rtlCol="0" anchor="ctr"/>
+          <a:lstStyle/>
+          <a:p>
+            <a:pPr indent="0" marL="0">
+              <a:buNone/>
+            </a:pPr>
+            <a:r>
+              <a:rPr lang="en-US" sz="1300" b="1" dirty="0">
+                <a:solidFill>
+                  <a:srgbClr val="1E2761"/>
+                </a:solidFill>
+                <a:latin typeface="Calibri" pitchFamily="34" charset="0"/>
+                <a:ea typeface="Calibri" pitchFamily="34" charset="-122"/>
+                <a:cs typeface="Calibri" pitchFamily="34" charset="-120"/>
+              </a:rPr>
+              <a:t>Kusumegi et al. (2025, Science)</a:t>
+            </a:r>
+            <a:endParaRPr lang="en-US" sz="1300" dirty="0"/>
+          </a:p>
+        </p:txBody>
+      </p:sp>
+      <p:sp>
+        <p:nvSpPr>
+          <p:cNvPr id="13" name="Text 11"/>
+          <p:cNvSpPr/>
+          <p:nvPr/>
+        </p:nvSpPr>
+        <p:spPr>
+          <a:xfrm>
+            <a:off x="4572000" y="3429000"/>
+            <a:ext cx="3840480" cy="274320"/>
+          </a:xfrm>
+          <a:prstGeom prst="rect">
+            <a:avLst/>
+          </a:prstGeom>
+          <a:noFill/>
+          <a:ln/>
+        </p:spPr>
+        <p:txBody>
+          <a:bodyPr wrap="square" rtlCol="0" anchor="ctr"/>
+          <a:lstStyle/>
+          <a:p>
+            <a:pPr algn="r" indent="0" marL="0">
+              <a:buNone/>
+            </a:pPr>
+            <a:r>
+              <a:rPr lang="en-US" sz="1100" b="1" dirty="0">
+                <a:solidFill>
+                  <a:srgbClr val="3A7BD5"/>
+                </a:solidFill>
+                <a:latin typeface="Calibri" pitchFamily="34" charset="0"/>
+                <a:ea typeface="Calibri" pitchFamily="34" charset="-122"/>
+                <a:cs typeface="Calibri" pitchFamily="34" charset="-120"/>
+              </a:rPr>
+              <a:t>LLMs boost output, broaden citations</a:t>
+            </a:r>
+            <a:endParaRPr lang="en-US" sz="1100" dirty="0"/>
+          </a:p>
+        </p:txBody>
+      </p:sp>
+      <p:sp>
+        <p:nvSpPr>
+          <p:cNvPr id="14" name="Text 12"/>
+          <p:cNvSpPr/>
+          <p:nvPr/>
+        </p:nvSpPr>
+        <p:spPr>
+          <a:xfrm>
+            <a:off x="777240" y="3730752"/>
+            <a:ext cx="7589520" cy="594360"/>
+          </a:xfrm>
+          <a:prstGeom prst="rect">
+            <a:avLst/>
+          </a:prstGeom>
+          <a:noFill/>
+          <a:ln/>
+        </p:spPr>
+        <p:txBody>
+          <a:bodyPr wrap="square" rtlCol="0" anchor="ctr"/>
+          <a:lstStyle/>
+          <a:p>
+            <a:pPr indent="0" marL="0">
+              <a:buNone/>
+            </a:pPr>
+            <a:r>
+              <a:rPr lang="en-US" sz="1100" dirty="0">
+                <a:solidFill>
+                  <a:srgbClr val="1E2761"/>
+                </a:solidFill>
+                <a:latin typeface="Calibri" pitchFamily="34" charset="0"/>
+                <a:ea typeface="Calibri" pitchFamily="34" charset="-122"/>
+                <a:cs typeface="Calibri" pitchFamily="34" charset="-120"/>
+              </a:rPr>
+              <a:t>Diff-in-diff on 2.1M preprints. LLM adopters produce 24–89% more papers and cite more diverse sources (books, younger works). However, research quality declines — sophisticated language masks weaker manuscripts.</a:t>
+            </a:r>
+            <a:endParaRPr lang="en-US" sz="1100" dirty="0"/>
+          </a:p>
+        </p:txBody>
+      </p:sp>
+      <p:sp>
+        <p:nvSpPr>
+          <p:cNvPr id="15" name="Shape 13"/>
+          <p:cNvSpPr/>
+          <p:nvPr/>
+        </p:nvSpPr>
+        <p:spPr>
+          <a:xfrm>
+            <a:off x="548640" y="4572000"/>
+            <a:ext cx="8046720" cy="457200"/>
+          </a:xfrm>
+          <a:prstGeom prst="rect">
+            <a:avLst>
+              <a:gd name="adj" fmla="val 10000"/>
+            </a:avLst>
+          </a:prstGeom>
+          <a:solidFill>
+            <a:srgbClr val="1E2761"/>
+          </a:solidFill>
+          <a:ln/>
+        </p:spPr>
+      </p:sp>
+      <p:sp>
+        <p:nvSpPr>
+          <p:cNvPr id="16" name="Text 14"/>
+          <p:cNvSpPr/>
+          <p:nvPr/>
+        </p:nvSpPr>
+        <p:spPr>
+          <a:xfrm>
+            <a:off x="731520" y="4572000"/>
+            <a:ext cx="7680960" cy="457200"/>
+          </a:xfrm>
+          <a:prstGeom prst="rect">
+            <a:avLst/>
+          </a:prstGeom>
+          <a:noFill/>
+          <a:ln/>
+        </p:spPr>
+        <p:txBody>
+          <a:bodyPr wrap="square" rtlCol="0" anchor="ctr"/>
+          <a:lstStyle/>
+          <a:p>
+            <a:pPr algn="ctr" indent="0" marL="0">
+              <a:buNone/>
+            </a:pPr>
+            <a:r>
+              <a:rPr lang="en-US" sz="1200" b="1" dirty="0">
+                <a:solidFill>
+                  <a:srgbClr val="FFFFFF"/>
+                </a:solidFill>
+                <a:latin typeface="Calibri" pitchFamily="34" charset="0"/>
+                <a:ea typeface="Calibri" pitchFamily="34" charset="-122"/>
+                <a:cs typeface="Calibri" pitchFamily="34" charset="-120"/>
+              </a:rPr>
+              <a:t>Our contribution: causal identification of how LLM availability affects cross-field citation entropy using continuous treatment intensity</a:t>
             </a:r>
             <a:endParaRPr lang="en-US" sz="1200" dirty="0"/>
           </a:p>
         </p:txBody>
       </p:sp>
-      <p:pic>
-        <p:nvPicPr>
-          <p:cNvPr id="4" name="Image 0" descr="/sessions/zen-sweet-johnson/mnt/aig-final-project/claude work/output/shannon-figures/fig01_propensity_scores.png">    </p:cNvPr>
-          <p:cNvPicPr>
-            <a:picLocks noChangeAspect="1"/>
-          </p:cNvPicPr>
-          <p:nvPr/>
-        </p:nvPicPr>
-        <p:blipFill>
-          <a:blip r:embed="rId1"/>
-          <a:srcRect l="0" r="0" t="0" b="0"/>
-          <a:stretch/>
-        </p:blipFill>
-        <p:spPr>
-          <a:xfrm>
-            <a:off x="274320" y="1188720"/>
-            <a:ext cx="8595360" cy="3749040"/>
-          </a:xfrm>
-          <a:prstGeom prst="rect">
-            <a:avLst/>
-          </a:prstGeom>
-        </p:spPr>
-      </p:pic>
     </p:spTree>
   </p:cSld>
   <p:clrMapOvr>
@@ -2985,7 +5193,7 @@
                 <a:ea typeface="Georgia" pitchFamily="34" charset="-122"/>
                 <a:cs typeface="Georgia" pitchFamily="34" charset="-120"/>
               </a:rPr>
-              <a:t>Marker Word Adoption Across Fields</a:t>
+              <a:t>Measuring AI Adoption: Propensity Scores</a:t>
             </a:r>
             <a:endParaRPr lang="en-US" sz="2400" dirty="0"/>
           </a:p>
@@ -3024,7 +5232,7 @@
                 <a:ea typeface="Calibri" pitchFamily="34" charset="-122"/>
                 <a:cs typeface="Calibri" pitchFamily="34" charset="-120"/>
               </a:rPr>
-              <a:t>All 16 fields show increases after ChatGPT release, but magnitude varies substantially</a:t>
+              <a:t>Increase in Kobak marker word frequency from pre- to post-ChatGPT (GPT-3.5) era</a:t>
             </a:r>
             <a:endParaRPr lang="en-US" sz="1200" dirty="0"/>
           </a:p>
@@ -3032,7 +5240,7 @@
       </p:sp>
       <p:pic>
         <p:nvPicPr>
-          <p:cNvPr id="4" name="Image 0" descr="/sessions/zen-sweet-johnson/mnt/aig-final-project/claude work/output/shannon-figures/fig02_marker_words_pre_post.png">    </p:cNvPr>
+          <p:cNvPr id="4" name="Image 0" descr="/sessions/zen-sweet-johnson/mnt/aig-final-project/claude work/output/shannon-figures/fig01_propensity_scores.png">    </p:cNvPr>
           <p:cNvPicPr>
             <a:picLocks noChangeAspect="1"/>
           </p:cNvPicPr>
@@ -3118,7 +5326,7 @@
                 <a:ea typeface="Georgia" pitchFamily="34" charset="-122"/>
                 <a:cs typeface="Georgia" pitchFamily="34" charset="-120"/>
               </a:rPr>
-              <a:t>Main Result: Citation Entropy Diverges Post-4o</a:t>
+              <a:t>Marker Word Adoption Across Fields</a:t>
             </a:r>
             <a:endParaRPr lang="en-US" sz="2400" dirty="0"/>
           </a:p>
@@ -3157,7 +5365,7 @@
                 <a:ea typeface="Calibri" pitchFamily="34" charset="-122"/>
                 <a:cs typeface="Calibri" pitchFamily="34" charset="-120"/>
               </a:rPr>
-              <a:t>High-propensity fields show steeper entropy increase after GPT-4o release</a:t>
+              <a:t>All 16 fields show increases after ChatGPT release, but magnitude varies substantially</a:t>
             </a:r>
             <a:endParaRPr lang="en-US" sz="1200" dirty="0"/>
           </a:p>
@@ -3165,7 +5373,7 @@
       </p:sp>
       <p:pic>
         <p:nvPicPr>
-          <p:cNvPr id="4" name="Image 0" descr="/sessions/zen-sweet-johnson/mnt/aig-final-project/claude work/output/shannon-figures/fig03_entropy_time_series.png">    </p:cNvPr>
+          <p:cNvPr id="4" name="Image 0" descr="/sessions/zen-sweet-johnson/mnt/aig-final-project/claude work/output/shannon-figures/fig02_marker_words_pre_post.png">    </p:cNvPr>
           <p:cNvPicPr>
             <a:picLocks noChangeAspect="1"/>
           </p:cNvPicPr>
@@ -3243,7 +5451,7 @@
               <a:buNone/>
             </a:pPr>
             <a:r>
-              <a:rPr lang="en-US" sz="2400" b="1" dirty="0">
+              <a:rPr lang="en-US" sz="2800" b="1" dirty="0">
                 <a:solidFill>
                   <a:srgbClr val="1E2761"/>
                 </a:solidFill>
@@ -3251,22 +5459,51 @@
                 <a:ea typeface="Georgia" pitchFamily="34" charset="-122"/>
                 <a:cs typeface="Georgia" pitchFamily="34" charset="-120"/>
               </a:rPr>
-              <a:t>Event Study: Treatment Effect Emerges Post-4o</a:t>
-            </a:r>
-            <a:endParaRPr lang="en-US" sz="2400" dirty="0"/>
-          </a:p>
-        </p:txBody>
-      </p:sp>
-      <p:sp>
-        <p:nvSpPr>
-          <p:cNvPr id="3" name="Text 1"/>
+              <a:t>Measuring Research Entropy</a:t>
+            </a:r>
+            <a:endParaRPr lang="en-US" sz="2800" dirty="0"/>
+          </a:p>
+        </p:txBody>
+      </p:sp>
+      <p:sp>
+        <p:nvSpPr>
+          <p:cNvPr id="3" name="Shape 1"/>
           <p:cNvSpPr/>
           <p:nvPr/>
         </p:nvSpPr>
         <p:spPr>
           <a:xfrm>
-            <a:off x="548640" y="777240"/>
-            <a:ext cx="8046720" cy="365760"/>
+            <a:off x="1371600" y="1051560"/>
+            <a:ext cx="6400800" cy="914400"/>
+          </a:xfrm>
+          <a:prstGeom prst="rect">
+            <a:avLst>
+              <a:gd name="adj" fmla="val 5000"/>
+            </a:avLst>
+          </a:prstGeom>
+          <a:solidFill>
+            <a:srgbClr val="1E2761"/>
+          </a:solidFill>
+          <a:ln/>
+          <a:effectLst>
+            <a:outerShdw sx="100000" sy="100000" kx="0" ky="0" algn="bl" rotWithShape="0" blurRad="76200" dist="25400" dir="8100000">
+              <a:srgbClr val="000000">
+                <a:alpha val="10000"/>
+              </a:srgbClr>
+            </a:outerShdw>
+          </a:effectLst>
+        </p:spPr>
+      </p:sp>
+      <p:sp>
+        <p:nvSpPr>
+          <p:cNvPr id="4" name="Text 2"/>
+          <p:cNvSpPr/>
+          <p:nvPr/>
+        </p:nvSpPr>
+        <p:spPr>
+          <a:xfrm>
+            <a:off x="1371600" y="1051560"/>
+            <a:ext cx="6400800" cy="548640"/>
           </a:xfrm>
           <a:prstGeom prst="rect">
             <a:avLst/>
@@ -3278,47 +5515,295 @@
           <a:bodyPr wrap="square" rtlCol="0" anchor="ctr"/>
           <a:lstStyle/>
           <a:p>
-            <a:pPr indent="0" marL="0">
+            <a:pPr algn="ctr" indent="0" marL="0">
               <a:buNone/>
             </a:pPr>
             <a:r>
-              <a:rPr lang="en-US" sz="1200" dirty="0">
+              <a:rPr lang="en-US" sz="2400" b="1" dirty="0">
                 <a:solidFill>
-                  <a:srgbClr val="556688"/>
+                  <a:srgbClr val="FFFFFF"/>
                 </a:solidFill>
                 <a:latin typeface="Calibri" pitchFamily="34" charset="0"/>
                 <a:ea typeface="Calibri" pitchFamily="34" charset="-122"/>
                 <a:cs typeface="Calibri" pitchFamily="34" charset="-120"/>
               </a:rPr>
-              <a:t>Propensity × quarter interactions with 2024 Q3 as reference period</a:t>
-            </a:r>
-            <a:endParaRPr lang="en-US" sz="1200" dirty="0"/>
-          </a:p>
-        </p:txBody>
-      </p:sp>
-      <p:pic>
-        <p:nvPicPr>
-          <p:cNvPr id="4" name="Image 0" descr="/sessions/zen-sweet-johnson/mnt/aig-final-project/claude work/output/shannon-figures/fig04_event_study_entropy.png">    </p:cNvPr>
-          <p:cNvPicPr>
-            <a:picLocks noChangeAspect="1"/>
-          </p:cNvPicPr>
-          <p:nvPr/>
-        </p:nvPicPr>
-        <p:blipFill>
-          <a:blip r:embed="rId1"/>
-          <a:srcRect l="0" r="0" t="0" b="0"/>
-          <a:stretch/>
-        </p:blipFill>
-        <p:spPr>
-          <a:xfrm>
-            <a:off x="274320" y="1188720"/>
-            <a:ext cx="8595360" cy="3749040"/>
-          </a:xfrm>
-          <a:prstGeom prst="rect">
-            <a:avLst/>
-          </a:prstGeom>
-        </p:spPr>
-      </p:pic>
+              <a:t>Hᵢ = – Σ  pᵢ(g) · ln pᵢ(g)</a:t>
+            </a:r>
+            <a:endParaRPr lang="en-US" sz="2400" dirty="0"/>
+          </a:p>
+        </p:txBody>
+      </p:sp>
+      <p:sp>
+        <p:nvSpPr>
+          <p:cNvPr id="5" name="Text 3"/>
+          <p:cNvSpPr/>
+          <p:nvPr/>
+        </p:nvSpPr>
+        <p:spPr>
+          <a:xfrm>
+            <a:off x="1371600" y="1554480"/>
+            <a:ext cx="6400800" cy="365760"/>
+          </a:xfrm>
+          <a:prstGeom prst="rect">
+            <a:avLst/>
+          </a:prstGeom>
+          <a:noFill/>
+          <a:ln/>
+        </p:spPr>
+        <p:txBody>
+          <a:bodyPr wrap="square" rtlCol="0" anchor="ctr"/>
+          <a:lstStyle/>
+          <a:p>
+            <a:pPr algn="ctr" indent="0" marL="0">
+              <a:buNone/>
+            </a:pPr>
+            <a:r>
+              <a:rPr lang="en-US" sz="1300" dirty="0">
+                <a:solidFill>
+                  <a:srgbClr val="CADCFC"/>
+                </a:solidFill>
+                <a:latin typeface="Calibri" pitchFamily="34" charset="0"/>
+                <a:ea typeface="Calibri" pitchFamily="34" charset="-122"/>
+                <a:cs typeface="Calibri" pitchFamily="34" charset="-120"/>
+              </a:rPr>
+              <a:t>where pᵢ(g) = share of paper i's references classified in field g</a:t>
+            </a:r>
+            <a:endParaRPr lang="en-US" sz="1300" dirty="0"/>
+          </a:p>
+        </p:txBody>
+      </p:sp>
+      <p:sp>
+        <p:nvSpPr>
+          <p:cNvPr id="6" name="Text 4"/>
+          <p:cNvSpPr/>
+          <p:nvPr/>
+        </p:nvSpPr>
+        <p:spPr>
+          <a:xfrm>
+            <a:off x="548640" y="2194560"/>
+            <a:ext cx="8046720" cy="2834640"/>
+          </a:xfrm>
+          <a:prstGeom prst="rect">
+            <a:avLst/>
+          </a:prstGeom>
+          <a:noFill/>
+          <a:ln/>
+        </p:spPr>
+        <p:txBody>
+          <a:bodyPr wrap="square" rtlCol="0" anchor="ctr"/>
+          <a:lstStyle/>
+          <a:p>
+            <a:pPr indent="0" marL="0">
+              <a:spcAft>
+                <a:spcPts val="400"/>
+              </a:spcAft>
+              <a:buNone/>
+            </a:pPr>
+            <a:r>
+              <a:rPr lang="en-US" sz="1600" b="1" dirty="0">
+                <a:solidFill>
+                  <a:srgbClr val="1E2761"/>
+                </a:solidFill>
+                <a:latin typeface="Calibri" pitchFamily="34" charset="0"/>
+                <a:ea typeface="Calibri" pitchFamily="34" charset="-122"/>
+                <a:cs typeface="Calibri" pitchFamily="34" charset="-120"/>
+              </a:rPr>
+              <a:t>What it captures</a:t>
+            </a:r>
+            <a:endParaRPr lang="en-US" sz="1600" dirty="0"/>
+          </a:p>
+          <a:p>
+            <a:pPr indent="0" marL="0">
+              <a:spcAft>
+                <a:spcPts val="400"/>
+              </a:spcAft>
+              <a:buNone/>
+            </a:pPr>
+            <a:endParaRPr lang="en-US" sz="1600" dirty="0"/>
+          </a:p>
+          <a:p>
+            <a:pPr marL="342900" indent="-342900">
+              <a:spcAft>
+                <a:spcPts val="400"/>
+              </a:spcAft>
+              <a:buSzPct val="100000"/>
+              <a:buChar char="•"/>
+            </a:pPr>
+            <a:r>
+              <a:rPr lang="en-US" sz="1300" dirty="0">
+                <a:solidFill>
+                  <a:srgbClr val="1E2761"/>
+                </a:solidFill>
+                <a:latin typeface="Calibri" pitchFamily="34" charset="0"/>
+                <a:ea typeface="Calibri" pitchFamily="34" charset="-122"/>
+                <a:cs typeface="Calibri" pitchFamily="34" charset="-120"/>
+              </a:rPr>
+              <a:t>For each paper, we observe where its references land across 26 OpenAlex fields</a:t>
+            </a:r>
+            <a:endParaRPr lang="en-US" sz="1600" dirty="0"/>
+          </a:p>
+          <a:p>
+            <a:pPr marL="342900" indent="-342900">
+              <a:spcAft>
+                <a:spcPts val="400"/>
+              </a:spcAft>
+              <a:buSzPct val="100000"/>
+              <a:buChar char="•"/>
+            </a:pPr>
+            <a:r>
+              <a:rPr lang="en-US" sz="1300" dirty="0">
+                <a:solidFill>
+                  <a:srgbClr val="1E2761"/>
+                </a:solidFill>
+                <a:latin typeface="Calibri" pitchFamily="34" charset="0"/>
+                <a:ea typeface="Calibri" pitchFamily="34" charset="-122"/>
+                <a:cs typeface="Calibri" pitchFamily="34" charset="-120"/>
+              </a:rPr>
+              <a:t>Shannon entropy measures how spread out that distribution is — capturing both breadth and evenness</a:t>
+            </a:r>
+            <a:endParaRPr lang="en-US" sz="1600" dirty="0"/>
+          </a:p>
+          <a:p>
+            <a:pPr indent="0" marL="0">
+              <a:spcAft>
+                <a:spcPts val="400"/>
+              </a:spcAft>
+              <a:buNone/>
+            </a:pPr>
+            <a:endParaRPr lang="en-US" sz="1600" dirty="0"/>
+          </a:p>
+          <a:p>
+            <a:pPr indent="0" marL="0">
+              <a:spcAft>
+                <a:spcPts val="400"/>
+              </a:spcAft>
+              <a:buNone/>
+            </a:pPr>
+            <a:r>
+              <a:rPr lang="en-US" sz="1600" b="1" dirty="0">
+                <a:solidFill>
+                  <a:srgbClr val="1E2761"/>
+                </a:solidFill>
+                <a:latin typeface="Calibri" pitchFamily="34" charset="0"/>
+                <a:ea typeface="Calibri" pitchFamily="34" charset="-122"/>
+                <a:cs typeface="Calibri" pitchFamily="34" charset="-120"/>
+              </a:rPr>
+              <a:t>Intuition</a:t>
+            </a:r>
+            <a:endParaRPr lang="en-US" sz="1600" dirty="0"/>
+          </a:p>
+          <a:p>
+            <a:pPr indent="0" marL="0">
+              <a:spcAft>
+                <a:spcPts val="400"/>
+              </a:spcAft>
+              <a:buNone/>
+            </a:pPr>
+            <a:endParaRPr lang="en-US" sz="1600" dirty="0"/>
+          </a:p>
+          <a:p>
+            <a:pPr marL="342900" indent="-342900">
+              <a:spcAft>
+                <a:spcPts val="400"/>
+              </a:spcAft>
+              <a:buSzPct val="100000"/>
+              <a:buChar char="•"/>
+            </a:pPr>
+            <a:r>
+              <a:rPr lang="en-US" sz="1300" dirty="0">
+                <a:solidFill>
+                  <a:srgbClr val="1E2761"/>
+                </a:solidFill>
+                <a:latin typeface="Calibri" pitchFamily="34" charset="0"/>
+                <a:ea typeface="Calibri" pitchFamily="34" charset="-122"/>
+                <a:cs typeface="Calibri" pitchFamily="34" charset="-120"/>
+              </a:rPr>
+              <a:t>All citations in one field  →  H = 0 nats (minimum diversity)</a:t>
+            </a:r>
+            <a:endParaRPr lang="en-US" sz="1600" dirty="0"/>
+          </a:p>
+          <a:p>
+            <a:pPr marL="342900" indent="-342900">
+              <a:spcAft>
+                <a:spcPts val="400"/>
+              </a:spcAft>
+              <a:buSzPct val="100000"/>
+              <a:buChar char="•"/>
+            </a:pPr>
+            <a:r>
+              <a:rPr lang="en-US" sz="1300" dirty="0">
+                <a:solidFill>
+                  <a:srgbClr val="1E2761"/>
+                </a:solidFill>
+                <a:latin typeface="Calibri" pitchFamily="34" charset="0"/>
+                <a:ea typeface="Calibri" pitchFamily="34" charset="-122"/>
+                <a:cs typeface="Calibri" pitchFamily="34" charset="-120"/>
+              </a:rPr>
+              <a:t>Equal citations across all 26 fields  →  H = ln(26) ≈ 3.26 nats (maximum diversity)</a:t>
+            </a:r>
+            <a:endParaRPr lang="en-US" sz="1600" dirty="0"/>
+          </a:p>
+          <a:p>
+            <a:pPr indent="0" marL="0">
+              <a:spcAft>
+                <a:spcPts val="400"/>
+              </a:spcAft>
+              <a:buNone/>
+            </a:pPr>
+            <a:endParaRPr lang="en-US" sz="1600" dirty="0"/>
+          </a:p>
+          <a:p>
+            <a:pPr indent="0" marL="0">
+              <a:spcAft>
+                <a:spcPts val="400"/>
+              </a:spcAft>
+              <a:buNone/>
+            </a:pPr>
+            <a:r>
+              <a:rPr lang="en-US" sz="1600" b="1" dirty="0">
+                <a:solidFill>
+                  <a:srgbClr val="1E2761"/>
+                </a:solidFill>
+                <a:latin typeface="Calibri" pitchFamily="34" charset="0"/>
+                <a:ea typeface="Calibri" pitchFamily="34" charset="-122"/>
+                <a:cs typeface="Calibri" pitchFamily="34" charset="-120"/>
+              </a:rPr>
+              <a:t>Why Shannon entropy?</a:t>
+            </a:r>
+            <a:endParaRPr lang="en-US" sz="1600" dirty="0"/>
+          </a:p>
+          <a:p>
+            <a:pPr indent="0" marL="0">
+              <a:spcAft>
+                <a:spcPts val="400"/>
+              </a:spcAft>
+              <a:buNone/>
+            </a:pPr>
+            <a:endParaRPr lang="en-US" sz="1600" dirty="0"/>
+          </a:p>
+          <a:p>
+            <a:pPr marL="342900" indent="-342900">
+              <a:spcAft>
+                <a:spcPts val="400"/>
+              </a:spcAft>
+              <a:buSzPct val="100000"/>
+              <a:buChar char="•"/>
+            </a:pPr>
+            <a:r>
+              <a:rPr lang="en-US" sz="1300" dirty="0">
+                <a:solidFill>
+                  <a:srgbClr val="1E2761"/>
+                </a:solidFill>
+                <a:latin typeface="Calibri" pitchFamily="34" charset="0"/>
+                <a:ea typeface="Calibri" pitchFamily="34" charset="-122"/>
+                <a:cs typeface="Calibri" pitchFamily="34" charset="-120"/>
+              </a:rPr>
+              <a:t>Unlike a simple count of distinct fields, entropy penalizes token citations — a paper citing 95% within its own field and 1% in five others scores much lower than one engaging evenly across six fields</a:t>
+            </a:r>
+            <a:endParaRPr lang="en-US" sz="1600" dirty="0"/>
+          </a:p>
+        </p:txBody>
+      </p:sp>
     </p:spTree>
   </p:cSld>
   <p:clrMapOvr>
@@ -3384,7 +5869,7 @@
                 <a:ea typeface="Georgia" pitchFamily="34" charset="-122"/>
                 <a:cs typeface="Georgia" pitchFamily="34" charset="-120"/>
               </a:rPr>
-              <a:t>Consistent Pattern Across Diversity Measures</a:t>
+              <a:t>Main Result: Citation Entropy Diverges Post-4o</a:t>
             </a:r>
             <a:endParaRPr lang="en-US" sz="2400" dirty="0"/>
           </a:p>
@@ -3423,7 +5908,7 @@
                 <a:ea typeface="Calibri" pitchFamily="34" charset="-122"/>
                 <a:cs typeface="Calibri" pitchFamily="34" charset="-120"/>
               </a:rPr>
-              <a:t>Treatment × trend coefficients for all 7 dependent variables (95% CIs)</a:t>
+              <a:t>High-propensity fields show steeper entropy increase after GPT-4o release</a:t>
             </a:r>
             <a:endParaRPr lang="en-US" sz="1200" dirty="0"/>
           </a:p>
@@ -3431,7 +5916,7 @@
       </p:sp>
       <p:pic>
         <p:nvPicPr>
-          <p:cNvPr id="4" name="Image 0" descr="/sessions/zen-sweet-johnson/mnt/aig-final-project/claude work/output/shannon-figures/fig09_forest_plot.png">    </p:cNvPr>
+          <p:cNvPr id="4" name="Image 0" descr="/sessions/zen-sweet-johnson/mnt/aig-final-project/claude work/output/shannon-figures/fig03_entropy_time_series.png">    </p:cNvPr>
           <p:cNvPicPr>
             <a:picLocks noChangeAspect="1"/>
           </p:cNvPicPr>
@@ -3517,68 +6002,22 @@
                 <a:ea typeface="Georgia" pitchFamily="34" charset="-122"/>
                 <a:cs typeface="Georgia" pitchFamily="34" charset="-120"/>
               </a:rPr>
-              <a:t>Robustness: Parallel Trends &amp; Within-Field Share</a:t>
+              <a:t>Regression Results: Shannon Entropy</a:t>
             </a:r>
             <a:endParaRPr lang="en-US" sz="2400" dirty="0"/>
           </a:p>
         </p:txBody>
       </p:sp>
-      <p:pic>
-        <p:nvPicPr>
-          <p:cNvPr id="3" name="Image 0" descr="/sessions/zen-sweet-johnson/mnt/aig-final-project/claude work/output/shannon-figures/fig10_parallel_trends.png">    </p:cNvPr>
-          <p:cNvPicPr>
-            <a:picLocks noChangeAspect="1"/>
-          </p:cNvPicPr>
-          <p:nvPr/>
-        </p:nvPicPr>
-        <p:blipFill>
-          <a:blip r:embed="rId1"/>
-          <a:srcRect l="0" r="0" t="0" b="0"/>
-          <a:stretch/>
-        </p:blipFill>
-        <p:spPr>
-          <a:xfrm>
-            <a:off x="182880" y="1005840"/>
-            <a:ext cx="4114800" cy="2834640"/>
-          </a:xfrm>
-          <a:prstGeom prst="rect">
-            <a:avLst/>
-          </a:prstGeom>
-        </p:spPr>
-      </p:pic>
-      <p:pic>
-        <p:nvPicPr>
-          <p:cNvPr id="4" name="Image 1" descr="/sessions/zen-sweet-johnson/mnt/aig-final-project/claude work/output/shannon-figures/fig08_within_field_share.png">    </p:cNvPr>
-          <p:cNvPicPr>
-            <a:picLocks noChangeAspect="1"/>
-          </p:cNvPicPr>
-          <p:nvPr/>
-        </p:nvPicPr>
-        <p:blipFill>
-          <a:blip r:embed="rId2"/>
-          <a:srcRect l="0" r="0" t="0" b="0"/>
-          <a:stretch/>
-        </p:blipFill>
-        <p:spPr>
-          <a:xfrm>
-            <a:off x="4846320" y="1005840"/>
-            <a:ext cx="4114800" cy="2834640"/>
-          </a:xfrm>
-          <a:prstGeom prst="rect">
-            <a:avLst/>
-          </a:prstGeom>
-        </p:spPr>
-      </p:pic>
-      <p:sp>
-        <p:nvSpPr>
-          <p:cNvPr id="5" name="Text 1"/>
+      <p:sp>
+        <p:nvSpPr>
+          <p:cNvPr id="3" name="Text 1"/>
           <p:cNvSpPr/>
           <p:nvPr/>
         </p:nvSpPr>
         <p:spPr>
           <a:xfrm>
-            <a:off x="182880" y="3931920"/>
-            <a:ext cx="4114800" cy="548640"/>
+            <a:off x="548640" y="777240"/>
+            <a:ext cx="8046720" cy="320040"/>
           </a:xfrm>
           <a:prstGeom prst="rect">
             <a:avLst/>
@@ -3590,11 +6029,11 @@
           <a:bodyPr wrap="square" rtlCol="0" anchor="ctr"/>
           <a:lstStyle/>
           <a:p>
-            <a:pPr algn="ctr" indent="0" marL="0">
+            <a:pPr indent="0" marL="0">
               <a:buNone/>
             </a:pPr>
             <a:r>
-              <a:rPr lang="en-US" sz="1100" dirty="0">
+              <a:rPr lang="en-US" sz="1200" i="1" dirty="0">
                 <a:solidFill>
                   <a:srgbClr val="556688"/>
                 </a:solidFill>
@@ -3602,16 +6041,2551 @@
                 <a:ea typeface="Calibri" pitchFamily="34" charset="-122"/>
                 <a:cs typeface="Calibri" pitchFamily="34" charset="-120"/>
               </a:rPr>
-              <a:t>Parallel trends pass (p = 0.56) in 18-month</a:t>
-            </a:r>
-            <a:endParaRPr lang="en-US" sz="1100" dirty="0"/>
-          </a:p>
-          <a:p>
-            <a:pPr algn="ctr" indent="0" marL="0">
+              <a:t>Yᵢ = α + β₁(A_f × D_t) + β₂(A_f × T_t) + γ′X + δ_f + θ_t + ε</a:t>
+            </a:r>
+            <a:endParaRPr lang="en-US" sz="1200" dirty="0"/>
+          </a:p>
+        </p:txBody>
+      </p:sp>
+      <p:graphicFrame>
+        <p:nvGraphicFramePr>
+          <p:cNvPr id="9" name="Table 0"/>
+          <p:cNvGraphicFramePr>
+            <a:graphicFrameLocks noGrp="1"/>
+          </p:cNvGraphicFramePr>
+          <p:nvPr>
+            <p:extLst>
+              <p:ext uri="{D42A27DB-BD31-4B8C-83A1-F6EECF244321}">
+                <p14:modId xmlns:p14="http://schemas.microsoft.com/office/powerpoint/2010/main" val="1579011935"/>
+              </p:ext>
+            </p:extLst>
+          </p:nvPr>
+        </p:nvGraphicFramePr>
+        <p:xfrm>
+          <a:off x="1097280" y="1234440"/>
+          <a:ext cx="6949440" cy="914400"/>
+        </p:xfrm>
+        <a:graphic>
+          <a:graphicData uri="http://schemas.openxmlformats.org/drawingml/2006/table">
+            <a:tbl>
+              <a:tblPr/>
+              <a:tblGrid>
+                <a:gridCol w="2926080"/>
+                <a:gridCol w="2011680"/>
+                <a:gridCol w="2011680"/>
+              </a:tblGrid>
+              <a:tr h="274320">
+                <a:tc>
+                  <a:txBody>
+                    <a:bodyPr/>
+                    <a:lstStyle/>
+                    <a:p>
+                      <a:pPr algn="l" indent="0" marL="0">
+                        <a:buNone/>
+                      </a:pPr>
+                      <a:endParaRPr lang="en-US" sz="1100" dirty="0">
+                        <a:latin typeface="Calibri" charset="0"/>
+                        <a:ea typeface="Calibri" charset="0"/>
+                        <a:cs typeface="Calibri" charset="0"/>
+                      </a:endParaRPr>
+                    </a:p>
+                  </a:txBody>
+                  <a:tcPr marL="101600" marR="101600" marT="50800" marB="50800">
+                    <a:lnL w="6350" cap="flat" cmpd="sng" algn="ctr">
+                      <a:solidFill>
+                        <a:srgbClr val="CCCCCC"/>
+                      </a:solidFill>
+                      <a:prstDash val="solid"/>
+                      <a:round/>
+                      <a:headEnd type="none" w="med" len="med"/>
+                      <a:tailEnd type="none" w="med" len="med"/>
+                    </a:lnL>
+                    <a:lnR w="6350" cap="flat" cmpd="sng" algn="ctr">
+                      <a:solidFill>
+                        <a:srgbClr val="CCCCCC"/>
+                      </a:solidFill>
+                      <a:prstDash val="solid"/>
+                      <a:round/>
+                      <a:headEnd type="none" w="med" len="med"/>
+                      <a:tailEnd type="none" w="med" len="med"/>
+                    </a:lnR>
+                    <a:lnT w="6350" cap="flat" cmpd="sng" algn="ctr">
+                      <a:solidFill>
+                        <a:srgbClr val="CCCCCC"/>
+                      </a:solidFill>
+                      <a:prstDash val="solid"/>
+                      <a:round/>
+                      <a:headEnd type="none" w="med" len="med"/>
+                      <a:tailEnd type="none" w="med" len="med"/>
+                    </a:lnT>
+                    <a:lnB w="6350" cap="flat" cmpd="sng" algn="ctr">
+                      <a:solidFill>
+                        <a:srgbClr val="CCCCCC"/>
+                      </a:solidFill>
+                      <a:prstDash val="solid"/>
+                      <a:round/>
+                      <a:headEnd type="none" w="med" len="med"/>
+                      <a:tailEnd type="none" w="med" len="med"/>
+                    </a:lnB>
+                    <a:solidFill>
+                      <a:srgbClr val="1E2761"/>
+                    </a:solidFill>
+                  </a:tcPr>
+                </a:tc>
+                <a:tc>
+                  <a:txBody>
+                    <a:bodyPr/>
+                    <a:lstStyle/>
+                    <a:p>
+                      <a:pPr algn="ctr" indent="0" marL="0">
+                        <a:buNone/>
+                      </a:pPr>
+                      <a:r>
+                        <a:rPr lang="en-US" sz="1100" b="1" dirty="0">
+                          <a:solidFill>
+                            <a:srgbClr val="FFFFFF"/>
+                          </a:solidFill>
+                          <a:latin typeface="Calibri" pitchFamily="34" charset="0"/>
+                          <a:ea typeface="Calibri" pitchFamily="34" charset="-122"/>
+                          <a:cs typeface="Calibri" pitchFamily="34" charset="-120"/>
+                        </a:rPr>
+                        <a:t>(1) Level</a:t>
+                      </a:r>
+                      <a:endParaRPr lang="en-US" sz="1100" dirty="0">
+                        <a:latin typeface="Calibri" charset="0"/>
+                        <a:ea typeface="Calibri" charset="0"/>
+                        <a:cs typeface="Calibri" charset="0"/>
+                      </a:endParaRPr>
+                    </a:p>
+                  </a:txBody>
+                  <a:tcPr marL="101600" marR="101600" marT="50800" marB="50800">
+                    <a:lnL w="6350" cap="flat" cmpd="sng" algn="ctr">
+                      <a:solidFill>
+                        <a:srgbClr val="CCCCCC"/>
+                      </a:solidFill>
+                      <a:prstDash val="solid"/>
+                      <a:round/>
+                      <a:headEnd type="none" w="med" len="med"/>
+                      <a:tailEnd type="none" w="med" len="med"/>
+                    </a:lnL>
+                    <a:lnR w="6350" cap="flat" cmpd="sng" algn="ctr">
+                      <a:solidFill>
+                        <a:srgbClr val="CCCCCC"/>
+                      </a:solidFill>
+                      <a:prstDash val="solid"/>
+                      <a:round/>
+                      <a:headEnd type="none" w="med" len="med"/>
+                      <a:tailEnd type="none" w="med" len="med"/>
+                    </a:lnR>
+                    <a:lnT w="6350" cap="flat" cmpd="sng" algn="ctr">
+                      <a:solidFill>
+                        <a:srgbClr val="CCCCCC"/>
+                      </a:solidFill>
+                      <a:prstDash val="solid"/>
+                      <a:round/>
+                      <a:headEnd type="none" w="med" len="med"/>
+                      <a:tailEnd type="none" w="med" len="med"/>
+                    </a:lnT>
+                    <a:lnB w="6350" cap="flat" cmpd="sng" algn="ctr">
+                      <a:solidFill>
+                        <a:srgbClr val="CCCCCC"/>
+                      </a:solidFill>
+                      <a:prstDash val="solid"/>
+                      <a:round/>
+                      <a:headEnd type="none" w="med" len="med"/>
+                      <a:tailEnd type="none" w="med" len="med"/>
+                    </a:lnB>
+                    <a:solidFill>
+                      <a:srgbClr val="1E2761"/>
+                    </a:solidFill>
+                  </a:tcPr>
+                </a:tc>
+                <a:tc>
+                  <a:txBody>
+                    <a:bodyPr/>
+                    <a:lstStyle/>
+                    <a:p>
+                      <a:pPr algn="ctr" indent="0" marL="0">
+                        <a:buNone/>
+                      </a:pPr>
+                      <a:r>
+                        <a:rPr lang="en-US" sz="1100" b="1" dirty="0">
+                          <a:solidFill>
+                            <a:srgbClr val="FFFFFF"/>
+                          </a:solidFill>
+                          <a:latin typeface="Calibri" pitchFamily="34" charset="0"/>
+                          <a:ea typeface="Calibri" pitchFamily="34" charset="-122"/>
+                          <a:cs typeface="Calibri" pitchFamily="34" charset="-120"/>
+                        </a:rPr>
+                        <a:t>(2) Trend</a:t>
+                      </a:r>
+                      <a:endParaRPr lang="en-US" sz="1100" dirty="0">
+                        <a:latin typeface="Calibri" charset="0"/>
+                        <a:ea typeface="Calibri" charset="0"/>
+                        <a:cs typeface="Calibri" charset="0"/>
+                      </a:endParaRPr>
+                    </a:p>
+                  </a:txBody>
+                  <a:tcPr marL="101600" marR="101600" marT="50800" marB="50800">
+                    <a:lnL w="6350" cap="flat" cmpd="sng" algn="ctr">
+                      <a:solidFill>
+                        <a:srgbClr val="CCCCCC"/>
+                      </a:solidFill>
+                      <a:prstDash val="solid"/>
+                      <a:round/>
+                      <a:headEnd type="none" w="med" len="med"/>
+                      <a:tailEnd type="none" w="med" len="med"/>
+                    </a:lnL>
+                    <a:lnR w="6350" cap="flat" cmpd="sng" algn="ctr">
+                      <a:solidFill>
+                        <a:srgbClr val="CCCCCC"/>
+                      </a:solidFill>
+                      <a:prstDash val="solid"/>
+                      <a:round/>
+                      <a:headEnd type="none" w="med" len="med"/>
+                      <a:tailEnd type="none" w="med" len="med"/>
+                    </a:lnR>
+                    <a:lnT w="6350" cap="flat" cmpd="sng" algn="ctr">
+                      <a:solidFill>
+                        <a:srgbClr val="CCCCCC"/>
+                      </a:solidFill>
+                      <a:prstDash val="solid"/>
+                      <a:round/>
+                      <a:headEnd type="none" w="med" len="med"/>
+                      <a:tailEnd type="none" w="med" len="med"/>
+                    </a:lnT>
+                    <a:lnB w="6350" cap="flat" cmpd="sng" algn="ctr">
+                      <a:solidFill>
+                        <a:srgbClr val="CCCCCC"/>
+                      </a:solidFill>
+                      <a:prstDash val="solid"/>
+                      <a:round/>
+                      <a:headEnd type="none" w="med" len="med"/>
+                      <a:tailEnd type="none" w="med" len="med"/>
+                    </a:lnB>
+                    <a:solidFill>
+                      <a:srgbClr val="1E2761"/>
+                    </a:solidFill>
+                  </a:tcPr>
+                </a:tc>
+              </a:tr>
+              <a:tr h="274320">
+                <a:tc>
+                  <a:txBody>
+                    <a:bodyPr/>
+                    <a:lstStyle/>
+                    <a:p>
+                      <a:pPr indent="0" marL="0">
+                        <a:buNone/>
+                      </a:pPr>
+                      <a:r>
+                        <a:rPr lang="en-US" sz="1100" b="1" dirty="0">
+                          <a:solidFill>
+                            <a:srgbClr val="000000"/>
+                          </a:solidFill>
+                          <a:latin typeface="Calibri" pitchFamily="34" charset="0"/>
+                          <a:ea typeface="Calibri" pitchFamily="34" charset="-122"/>
+                          <a:cs typeface="Calibri" pitchFamily="34" charset="-120"/>
+                        </a:rPr>
+                        <a:t>A_f × D_t  (β₁)</a:t>
+                      </a:r>
+                      <a:endParaRPr lang="en-US" sz="1100" dirty="0">
+                        <a:latin typeface="Calibri" charset="0"/>
+                        <a:ea typeface="Calibri" charset="0"/>
+                        <a:cs typeface="Calibri" charset="0"/>
+                      </a:endParaRPr>
+                    </a:p>
+                  </a:txBody>
+                  <a:tcPr marL="101600" marR="101600" marT="50800" marB="50800">
+                    <a:lnL w="6350" cap="flat" cmpd="sng" algn="ctr">
+                      <a:solidFill>
+                        <a:srgbClr val="CCCCCC"/>
+                      </a:solidFill>
+                      <a:prstDash val="solid"/>
+                      <a:round/>
+                      <a:headEnd type="none" w="med" len="med"/>
+                      <a:tailEnd type="none" w="med" len="med"/>
+                    </a:lnL>
+                    <a:lnR w="6350" cap="flat" cmpd="sng" algn="ctr">
+                      <a:solidFill>
+                        <a:srgbClr val="CCCCCC"/>
+                      </a:solidFill>
+                      <a:prstDash val="solid"/>
+                      <a:round/>
+                      <a:headEnd type="none" w="med" len="med"/>
+                      <a:tailEnd type="none" w="med" len="med"/>
+                    </a:lnR>
+                    <a:lnT w="6350" cap="flat" cmpd="sng" algn="ctr">
+                      <a:solidFill>
+                        <a:srgbClr val="CCCCCC"/>
+                      </a:solidFill>
+                      <a:prstDash val="solid"/>
+                      <a:round/>
+                      <a:headEnd type="none" w="med" len="med"/>
+                      <a:tailEnd type="none" w="med" len="med"/>
+                    </a:lnT>
+                    <a:lnB w="6350" cap="flat" cmpd="sng" algn="ctr">
+                      <a:solidFill>
+                        <a:srgbClr val="CCCCCC"/>
+                      </a:solidFill>
+                      <a:prstDash val="solid"/>
+                      <a:round/>
+                      <a:headEnd type="none" w="med" len="med"/>
+                      <a:tailEnd type="none" w="med" len="med"/>
+                    </a:lnB>
+                  </a:tcPr>
+                </a:tc>
+                <a:tc>
+                  <a:txBody>
+                    <a:bodyPr/>
+                    <a:lstStyle/>
+                    <a:p>
+                      <a:pPr algn="ctr" indent="0" marL="0">
+                        <a:buNone/>
+                      </a:pPr>
+                      <a:r>
+                        <a:rPr lang="en-US" sz="1100" dirty="0">
+                          <a:solidFill>
+                            <a:srgbClr val="000000"/>
+                          </a:solidFill>
+                          <a:latin typeface="Calibri" pitchFamily="34" charset="0"/>
+                          <a:ea typeface="Calibri" pitchFamily="34" charset="-122"/>
+                          <a:cs typeface="Calibri" pitchFamily="34" charset="-120"/>
+                        </a:rPr>
+                        <a:t>0.170***</a:t>
+                      </a:r>
+                      <a:endParaRPr lang="en-US" sz="1100" dirty="0">
+                        <a:latin typeface="Calibri" charset="0"/>
+                        <a:ea typeface="Calibri" charset="0"/>
+                        <a:cs typeface="Calibri" charset="0"/>
+                      </a:endParaRPr>
+                    </a:p>
+                  </a:txBody>
+                  <a:tcPr marL="101600" marR="101600" marT="50800" marB="50800">
+                    <a:lnL w="6350" cap="flat" cmpd="sng" algn="ctr">
+                      <a:solidFill>
+                        <a:srgbClr val="CCCCCC"/>
+                      </a:solidFill>
+                      <a:prstDash val="solid"/>
+                      <a:round/>
+                      <a:headEnd type="none" w="med" len="med"/>
+                      <a:tailEnd type="none" w="med" len="med"/>
+                    </a:lnL>
+                    <a:lnR w="6350" cap="flat" cmpd="sng" algn="ctr">
+                      <a:solidFill>
+                        <a:srgbClr val="CCCCCC"/>
+                      </a:solidFill>
+                      <a:prstDash val="solid"/>
+                      <a:round/>
+                      <a:headEnd type="none" w="med" len="med"/>
+                      <a:tailEnd type="none" w="med" len="med"/>
+                    </a:lnR>
+                    <a:lnT w="6350" cap="flat" cmpd="sng" algn="ctr">
+                      <a:solidFill>
+                        <a:srgbClr val="CCCCCC"/>
+                      </a:solidFill>
+                      <a:prstDash val="solid"/>
+                      <a:round/>
+                      <a:headEnd type="none" w="med" len="med"/>
+                      <a:tailEnd type="none" w="med" len="med"/>
+                    </a:lnT>
+                    <a:lnB w="6350" cap="flat" cmpd="sng" algn="ctr">
+                      <a:solidFill>
+                        <a:srgbClr val="CCCCCC"/>
+                      </a:solidFill>
+                      <a:prstDash val="solid"/>
+                      <a:round/>
+                      <a:headEnd type="none" w="med" len="med"/>
+                      <a:tailEnd type="none" w="med" len="med"/>
+                    </a:lnB>
+                  </a:tcPr>
+                </a:tc>
+                <a:tc>
+                  <a:txBody>
+                    <a:bodyPr/>
+                    <a:lstStyle/>
+                    <a:p>
+                      <a:pPr algn="ctr" indent="0" marL="0">
+                        <a:buNone/>
+                      </a:pPr>
+                      <a:r>
+                        <a:rPr lang="en-US" sz="1100" dirty="0">
+                          <a:solidFill>
+                            <a:srgbClr val="000000"/>
+                          </a:solidFill>
+                          <a:latin typeface="Calibri" pitchFamily="34" charset="0"/>
+                          <a:ea typeface="Calibri" pitchFamily="34" charset="-122"/>
+                          <a:cs typeface="Calibri" pitchFamily="34" charset="-120"/>
+                        </a:rPr>
+                        <a:t>–0.044</a:t>
+                      </a:r>
+                      <a:endParaRPr lang="en-US" sz="1100" dirty="0">
+                        <a:latin typeface="Calibri" charset="0"/>
+                        <a:ea typeface="Calibri" charset="0"/>
+                        <a:cs typeface="Calibri" charset="0"/>
+                      </a:endParaRPr>
+                    </a:p>
+                  </a:txBody>
+                  <a:tcPr marL="101600" marR="101600" marT="50800" marB="50800">
+                    <a:lnL w="6350" cap="flat" cmpd="sng" algn="ctr">
+                      <a:solidFill>
+                        <a:srgbClr val="CCCCCC"/>
+                      </a:solidFill>
+                      <a:prstDash val="solid"/>
+                      <a:round/>
+                      <a:headEnd type="none" w="med" len="med"/>
+                      <a:tailEnd type="none" w="med" len="med"/>
+                    </a:lnL>
+                    <a:lnR w="6350" cap="flat" cmpd="sng" algn="ctr">
+                      <a:solidFill>
+                        <a:srgbClr val="CCCCCC"/>
+                      </a:solidFill>
+                      <a:prstDash val="solid"/>
+                      <a:round/>
+                      <a:headEnd type="none" w="med" len="med"/>
+                      <a:tailEnd type="none" w="med" len="med"/>
+                    </a:lnR>
+                    <a:lnT w="6350" cap="flat" cmpd="sng" algn="ctr">
+                      <a:solidFill>
+                        <a:srgbClr val="CCCCCC"/>
+                      </a:solidFill>
+                      <a:prstDash val="solid"/>
+                      <a:round/>
+                      <a:headEnd type="none" w="med" len="med"/>
+                      <a:tailEnd type="none" w="med" len="med"/>
+                    </a:lnT>
+                    <a:lnB w="6350" cap="flat" cmpd="sng" algn="ctr">
+                      <a:solidFill>
+                        <a:srgbClr val="CCCCCC"/>
+                      </a:solidFill>
+                      <a:prstDash val="solid"/>
+                      <a:round/>
+                      <a:headEnd type="none" w="med" len="med"/>
+                      <a:tailEnd type="none" w="med" len="med"/>
+                    </a:lnB>
+                  </a:tcPr>
+                </a:tc>
+              </a:tr>
+              <a:tr h="274320">
+                <a:tc>
+                  <a:txBody>
+                    <a:bodyPr/>
+                    <a:lstStyle/>
+                    <a:p>
+                      <a:pPr indent="0" marL="0">
+                        <a:buNone/>
+                      </a:pPr>
+                      <a:endParaRPr lang="en-US" sz="1000" dirty="0">
+                        <a:latin typeface="Calibri" charset="0"/>
+                        <a:ea typeface="Calibri" charset="0"/>
+                        <a:cs typeface="Calibri" charset="0"/>
+                      </a:endParaRPr>
+                    </a:p>
+                  </a:txBody>
+                  <a:tcPr marL="101600" marR="101600" marT="50800" marB="50800">
+                    <a:lnL w="6350" cap="flat" cmpd="sng" algn="ctr">
+                      <a:solidFill>
+                        <a:srgbClr val="CCCCCC"/>
+                      </a:solidFill>
+                      <a:prstDash val="solid"/>
+                      <a:round/>
+                      <a:headEnd type="none" w="med" len="med"/>
+                      <a:tailEnd type="none" w="med" len="med"/>
+                    </a:lnL>
+                    <a:lnR w="6350" cap="flat" cmpd="sng" algn="ctr">
+                      <a:solidFill>
+                        <a:srgbClr val="CCCCCC"/>
+                      </a:solidFill>
+                      <a:prstDash val="solid"/>
+                      <a:round/>
+                      <a:headEnd type="none" w="med" len="med"/>
+                      <a:tailEnd type="none" w="med" len="med"/>
+                    </a:lnR>
+                    <a:lnT w="6350" cap="flat" cmpd="sng" algn="ctr">
+                      <a:solidFill>
+                        <a:srgbClr val="CCCCCC"/>
+                      </a:solidFill>
+                      <a:prstDash val="solid"/>
+                      <a:round/>
+                      <a:headEnd type="none" w="med" len="med"/>
+                      <a:tailEnd type="none" w="med" len="med"/>
+                    </a:lnT>
+                    <a:lnB w="6350" cap="flat" cmpd="sng" algn="ctr">
+                      <a:solidFill>
+                        <a:srgbClr val="CCCCCC"/>
+                      </a:solidFill>
+                      <a:prstDash val="solid"/>
+                      <a:round/>
+                      <a:headEnd type="none" w="med" len="med"/>
+                      <a:tailEnd type="none" w="med" len="med"/>
+                    </a:lnB>
+                  </a:tcPr>
+                </a:tc>
+                <a:tc>
+                  <a:txBody>
+                    <a:bodyPr/>
+                    <a:lstStyle/>
+                    <a:p>
+                      <a:pPr algn="ctr" indent="0" marL="0">
+                        <a:buNone/>
+                      </a:pPr>
+                      <a:r>
+                        <a:rPr lang="en-US" sz="1000" dirty="0">
+                          <a:solidFill>
+                            <a:srgbClr val="556688"/>
+                          </a:solidFill>
+                          <a:latin typeface="Calibri" pitchFamily="34" charset="0"/>
+                          <a:ea typeface="Calibri" pitchFamily="34" charset="-122"/>
+                          <a:cs typeface="Calibri" pitchFamily="34" charset="-120"/>
+                        </a:rPr>
+                        <a:t>(0.068)</a:t>
+                      </a:r>
+                      <a:endParaRPr lang="en-US" sz="1000" dirty="0">
+                        <a:latin typeface="Calibri" charset="0"/>
+                        <a:ea typeface="Calibri" charset="0"/>
+                        <a:cs typeface="Calibri" charset="0"/>
+                      </a:endParaRPr>
+                    </a:p>
+                  </a:txBody>
+                  <a:tcPr marL="101600" marR="101600" marT="50800" marB="50800">
+                    <a:lnL w="6350" cap="flat" cmpd="sng" algn="ctr">
+                      <a:solidFill>
+                        <a:srgbClr val="CCCCCC"/>
+                      </a:solidFill>
+                      <a:prstDash val="solid"/>
+                      <a:round/>
+                      <a:headEnd type="none" w="med" len="med"/>
+                      <a:tailEnd type="none" w="med" len="med"/>
+                    </a:lnL>
+                    <a:lnR w="6350" cap="flat" cmpd="sng" algn="ctr">
+                      <a:solidFill>
+                        <a:srgbClr val="CCCCCC"/>
+                      </a:solidFill>
+                      <a:prstDash val="solid"/>
+                      <a:round/>
+                      <a:headEnd type="none" w="med" len="med"/>
+                      <a:tailEnd type="none" w="med" len="med"/>
+                    </a:lnR>
+                    <a:lnT w="6350" cap="flat" cmpd="sng" algn="ctr">
+                      <a:solidFill>
+                        <a:srgbClr val="CCCCCC"/>
+                      </a:solidFill>
+                      <a:prstDash val="solid"/>
+                      <a:round/>
+                      <a:headEnd type="none" w="med" len="med"/>
+                      <a:tailEnd type="none" w="med" len="med"/>
+                    </a:lnT>
+                    <a:lnB w="6350" cap="flat" cmpd="sng" algn="ctr">
+                      <a:solidFill>
+                        <a:srgbClr val="CCCCCC"/>
+                      </a:solidFill>
+                      <a:prstDash val="solid"/>
+                      <a:round/>
+                      <a:headEnd type="none" w="med" len="med"/>
+                      <a:tailEnd type="none" w="med" len="med"/>
+                    </a:lnB>
+                  </a:tcPr>
+                </a:tc>
+                <a:tc>
+                  <a:txBody>
+                    <a:bodyPr/>
+                    <a:lstStyle/>
+                    <a:p>
+                      <a:pPr algn="ctr" indent="0" marL="0">
+                        <a:buNone/>
+                      </a:pPr>
+                      <a:r>
+                        <a:rPr lang="en-US" sz="1000" dirty="0">
+                          <a:solidFill>
+                            <a:srgbClr val="556688"/>
+                          </a:solidFill>
+                          <a:latin typeface="Calibri" pitchFamily="34" charset="0"/>
+                          <a:ea typeface="Calibri" pitchFamily="34" charset="-122"/>
+                          <a:cs typeface="Calibri" pitchFamily="34" charset="-120"/>
+                        </a:rPr>
+                        <a:t>(0.106)</a:t>
+                      </a:r>
+                      <a:endParaRPr lang="en-US" sz="1000" dirty="0">
+                        <a:latin typeface="Calibri" charset="0"/>
+                        <a:ea typeface="Calibri" charset="0"/>
+                        <a:cs typeface="Calibri" charset="0"/>
+                      </a:endParaRPr>
+                    </a:p>
+                  </a:txBody>
+                  <a:tcPr marL="101600" marR="101600" marT="50800" marB="50800">
+                    <a:lnL w="6350" cap="flat" cmpd="sng" algn="ctr">
+                      <a:solidFill>
+                        <a:srgbClr val="CCCCCC"/>
+                      </a:solidFill>
+                      <a:prstDash val="solid"/>
+                      <a:round/>
+                      <a:headEnd type="none" w="med" len="med"/>
+                      <a:tailEnd type="none" w="med" len="med"/>
+                    </a:lnL>
+                    <a:lnR w="6350" cap="flat" cmpd="sng" algn="ctr">
+                      <a:solidFill>
+                        <a:srgbClr val="CCCCCC"/>
+                      </a:solidFill>
+                      <a:prstDash val="solid"/>
+                      <a:round/>
+                      <a:headEnd type="none" w="med" len="med"/>
+                      <a:tailEnd type="none" w="med" len="med"/>
+                    </a:lnR>
+                    <a:lnT w="6350" cap="flat" cmpd="sng" algn="ctr">
+                      <a:solidFill>
+                        <a:srgbClr val="CCCCCC"/>
+                      </a:solidFill>
+                      <a:prstDash val="solid"/>
+                      <a:round/>
+                      <a:headEnd type="none" w="med" len="med"/>
+                      <a:tailEnd type="none" w="med" len="med"/>
+                    </a:lnT>
+                    <a:lnB w="6350" cap="flat" cmpd="sng" algn="ctr">
+                      <a:solidFill>
+                        <a:srgbClr val="CCCCCC"/>
+                      </a:solidFill>
+                      <a:prstDash val="solid"/>
+                      <a:round/>
+                      <a:headEnd type="none" w="med" len="med"/>
+                      <a:tailEnd type="none" w="med" len="med"/>
+                    </a:lnB>
+                  </a:tcPr>
+                </a:tc>
+              </a:tr>
+              <a:tr h="274320">
+                <a:tc>
+                  <a:txBody>
+                    <a:bodyPr/>
+                    <a:lstStyle/>
+                    <a:p>
+                      <a:pPr indent="0" marL="0">
+                        <a:buNone/>
+                      </a:pPr>
+                      <a:r>
+                        <a:rPr lang="en-US" sz="1100" b="1" dirty="0">
+                          <a:solidFill>
+                            <a:srgbClr val="000000"/>
+                          </a:solidFill>
+                          <a:latin typeface="Calibri" pitchFamily="34" charset="0"/>
+                          <a:ea typeface="Calibri" pitchFamily="34" charset="-122"/>
+                          <a:cs typeface="Calibri" pitchFamily="34" charset="-120"/>
+                        </a:rPr>
+                        <a:t>A_f × T_t  (β₂)</a:t>
+                      </a:r>
+                      <a:endParaRPr lang="en-US" sz="1100" dirty="0">
+                        <a:latin typeface="Calibri" charset="0"/>
+                        <a:ea typeface="Calibri" charset="0"/>
+                        <a:cs typeface="Calibri" charset="0"/>
+                      </a:endParaRPr>
+                    </a:p>
+                  </a:txBody>
+                  <a:tcPr marL="101600" marR="101600" marT="50800" marB="50800">
+                    <a:lnL w="6350" cap="flat" cmpd="sng" algn="ctr">
+                      <a:solidFill>
+                        <a:srgbClr val="CCCCCC"/>
+                      </a:solidFill>
+                      <a:prstDash val="solid"/>
+                      <a:round/>
+                      <a:headEnd type="none" w="med" len="med"/>
+                      <a:tailEnd type="none" w="med" len="med"/>
+                    </a:lnL>
+                    <a:lnR w="6350" cap="flat" cmpd="sng" algn="ctr">
+                      <a:solidFill>
+                        <a:srgbClr val="CCCCCC"/>
+                      </a:solidFill>
+                      <a:prstDash val="solid"/>
+                      <a:round/>
+                      <a:headEnd type="none" w="med" len="med"/>
+                      <a:tailEnd type="none" w="med" len="med"/>
+                    </a:lnR>
+                    <a:lnT w="6350" cap="flat" cmpd="sng" algn="ctr">
+                      <a:solidFill>
+                        <a:srgbClr val="CCCCCC"/>
+                      </a:solidFill>
+                      <a:prstDash val="solid"/>
+                      <a:round/>
+                      <a:headEnd type="none" w="med" len="med"/>
+                      <a:tailEnd type="none" w="med" len="med"/>
+                    </a:lnT>
+                    <a:lnB w="6350" cap="flat" cmpd="sng" algn="ctr">
+                      <a:solidFill>
+                        <a:srgbClr val="CCCCCC"/>
+                      </a:solidFill>
+                      <a:prstDash val="solid"/>
+                      <a:round/>
+                      <a:headEnd type="none" w="med" len="med"/>
+                      <a:tailEnd type="none" w="med" len="med"/>
+                    </a:lnB>
+                  </a:tcPr>
+                </a:tc>
+                <a:tc>
+                  <a:txBody>
+                    <a:bodyPr/>
+                    <a:lstStyle/>
+                    <a:p>
+                      <a:pPr algn="ctr" indent="0" marL="0">
+                        <a:buNone/>
+                      </a:pPr>
+                      <a:endParaRPr lang="en-US" sz="1100" dirty="0">
+                        <a:latin typeface="Calibri" charset="0"/>
+                        <a:ea typeface="Calibri" charset="0"/>
+                        <a:cs typeface="Calibri" charset="0"/>
+                      </a:endParaRPr>
+                    </a:p>
+                  </a:txBody>
+                  <a:tcPr marL="101600" marR="101600" marT="50800" marB="50800">
+                    <a:lnL w="6350" cap="flat" cmpd="sng" algn="ctr">
+                      <a:solidFill>
+                        <a:srgbClr val="CCCCCC"/>
+                      </a:solidFill>
+                      <a:prstDash val="solid"/>
+                      <a:round/>
+                      <a:headEnd type="none" w="med" len="med"/>
+                      <a:tailEnd type="none" w="med" len="med"/>
+                    </a:lnL>
+                    <a:lnR w="6350" cap="flat" cmpd="sng" algn="ctr">
+                      <a:solidFill>
+                        <a:srgbClr val="CCCCCC"/>
+                      </a:solidFill>
+                      <a:prstDash val="solid"/>
+                      <a:round/>
+                      <a:headEnd type="none" w="med" len="med"/>
+                      <a:tailEnd type="none" w="med" len="med"/>
+                    </a:lnR>
+                    <a:lnT w="6350" cap="flat" cmpd="sng" algn="ctr">
+                      <a:solidFill>
+                        <a:srgbClr val="CCCCCC"/>
+                      </a:solidFill>
+                      <a:prstDash val="solid"/>
+                      <a:round/>
+                      <a:headEnd type="none" w="med" len="med"/>
+                      <a:tailEnd type="none" w="med" len="med"/>
+                    </a:lnT>
+                    <a:lnB w="6350" cap="flat" cmpd="sng" algn="ctr">
+                      <a:solidFill>
+                        <a:srgbClr val="CCCCCC"/>
+                      </a:solidFill>
+                      <a:prstDash val="solid"/>
+                      <a:round/>
+                      <a:headEnd type="none" w="med" len="med"/>
+                      <a:tailEnd type="none" w="med" len="med"/>
+                    </a:lnB>
+                  </a:tcPr>
+                </a:tc>
+                <a:tc>
+                  <a:txBody>
+                    <a:bodyPr/>
+                    <a:lstStyle/>
+                    <a:p>
+                      <a:pPr algn="ctr" indent="0" marL="0">
+                        <a:buNone/>
+                      </a:pPr>
+                      <a:r>
+                        <a:rPr lang="en-US" sz="1100" dirty="0">
+                          <a:solidFill>
+                            <a:srgbClr val="000000"/>
+                          </a:solidFill>
+                          <a:latin typeface="Calibri" pitchFamily="34" charset="0"/>
+                          <a:ea typeface="Calibri" pitchFamily="34" charset="-122"/>
+                          <a:cs typeface="Calibri" pitchFamily="34" charset="-120"/>
+                        </a:rPr>
+                        <a:t>0.031***</a:t>
+                      </a:r>
+                      <a:endParaRPr lang="en-US" sz="1100" dirty="0">
+                        <a:latin typeface="Calibri" charset="0"/>
+                        <a:ea typeface="Calibri" charset="0"/>
+                        <a:cs typeface="Calibri" charset="0"/>
+                      </a:endParaRPr>
+                    </a:p>
+                  </a:txBody>
+                  <a:tcPr marL="101600" marR="101600" marT="50800" marB="50800">
+                    <a:lnL w="6350" cap="flat" cmpd="sng" algn="ctr">
+                      <a:solidFill>
+                        <a:srgbClr val="CCCCCC"/>
+                      </a:solidFill>
+                      <a:prstDash val="solid"/>
+                      <a:round/>
+                      <a:headEnd type="none" w="med" len="med"/>
+                      <a:tailEnd type="none" w="med" len="med"/>
+                    </a:lnL>
+                    <a:lnR w="6350" cap="flat" cmpd="sng" algn="ctr">
+                      <a:solidFill>
+                        <a:srgbClr val="CCCCCC"/>
+                      </a:solidFill>
+                      <a:prstDash val="solid"/>
+                      <a:round/>
+                      <a:headEnd type="none" w="med" len="med"/>
+                      <a:tailEnd type="none" w="med" len="med"/>
+                    </a:lnR>
+                    <a:lnT w="6350" cap="flat" cmpd="sng" algn="ctr">
+                      <a:solidFill>
+                        <a:srgbClr val="CCCCCC"/>
+                      </a:solidFill>
+                      <a:prstDash val="solid"/>
+                      <a:round/>
+                      <a:headEnd type="none" w="med" len="med"/>
+                      <a:tailEnd type="none" w="med" len="med"/>
+                    </a:lnT>
+                    <a:lnB w="6350" cap="flat" cmpd="sng" algn="ctr">
+                      <a:solidFill>
+                        <a:srgbClr val="CCCCCC"/>
+                      </a:solidFill>
+                      <a:prstDash val="solid"/>
+                      <a:round/>
+                      <a:headEnd type="none" w="med" len="med"/>
+                      <a:tailEnd type="none" w="med" len="med"/>
+                    </a:lnB>
+                  </a:tcPr>
+                </a:tc>
+              </a:tr>
+              <a:tr h="274320">
+                <a:tc>
+                  <a:txBody>
+                    <a:bodyPr/>
+                    <a:lstStyle/>
+                    <a:p>
+                      <a:pPr indent="0" marL="0">
+                        <a:buNone/>
+                      </a:pPr>
+                      <a:endParaRPr lang="en-US" sz="1000" dirty="0">
+                        <a:latin typeface="Calibri" charset="0"/>
+                        <a:ea typeface="Calibri" charset="0"/>
+                        <a:cs typeface="Calibri" charset="0"/>
+                      </a:endParaRPr>
+                    </a:p>
+                  </a:txBody>
+                  <a:tcPr marL="101600" marR="101600" marT="50800" marB="50800">
+                    <a:lnL w="6350" cap="flat" cmpd="sng" algn="ctr">
+                      <a:solidFill>
+                        <a:srgbClr val="CCCCCC"/>
+                      </a:solidFill>
+                      <a:prstDash val="solid"/>
+                      <a:round/>
+                      <a:headEnd type="none" w="med" len="med"/>
+                      <a:tailEnd type="none" w="med" len="med"/>
+                    </a:lnL>
+                    <a:lnR w="6350" cap="flat" cmpd="sng" algn="ctr">
+                      <a:solidFill>
+                        <a:srgbClr val="CCCCCC"/>
+                      </a:solidFill>
+                      <a:prstDash val="solid"/>
+                      <a:round/>
+                      <a:headEnd type="none" w="med" len="med"/>
+                      <a:tailEnd type="none" w="med" len="med"/>
+                    </a:lnR>
+                    <a:lnT w="6350" cap="flat" cmpd="sng" algn="ctr">
+                      <a:solidFill>
+                        <a:srgbClr val="CCCCCC"/>
+                      </a:solidFill>
+                      <a:prstDash val="solid"/>
+                      <a:round/>
+                      <a:headEnd type="none" w="med" len="med"/>
+                      <a:tailEnd type="none" w="med" len="med"/>
+                    </a:lnT>
+                    <a:lnB w="6350" cap="flat" cmpd="sng" algn="ctr">
+                      <a:solidFill>
+                        <a:srgbClr val="CCCCCC"/>
+                      </a:solidFill>
+                      <a:prstDash val="solid"/>
+                      <a:round/>
+                      <a:headEnd type="none" w="med" len="med"/>
+                      <a:tailEnd type="none" w="med" len="med"/>
+                    </a:lnB>
+                  </a:tcPr>
+                </a:tc>
+                <a:tc>
+                  <a:txBody>
+                    <a:bodyPr/>
+                    <a:lstStyle/>
+                    <a:p>
+                      <a:pPr algn="ctr" indent="0" marL="0">
+                        <a:buNone/>
+                      </a:pPr>
+                      <a:endParaRPr lang="en-US" sz="1000" dirty="0">
+                        <a:latin typeface="Calibri" charset="0"/>
+                        <a:ea typeface="Calibri" charset="0"/>
+                        <a:cs typeface="Calibri" charset="0"/>
+                      </a:endParaRPr>
+                    </a:p>
+                  </a:txBody>
+                  <a:tcPr marL="101600" marR="101600" marT="50800" marB="50800">
+                    <a:lnL w="6350" cap="flat" cmpd="sng" algn="ctr">
+                      <a:solidFill>
+                        <a:srgbClr val="CCCCCC"/>
+                      </a:solidFill>
+                      <a:prstDash val="solid"/>
+                      <a:round/>
+                      <a:headEnd type="none" w="med" len="med"/>
+                      <a:tailEnd type="none" w="med" len="med"/>
+                    </a:lnL>
+                    <a:lnR w="6350" cap="flat" cmpd="sng" algn="ctr">
+                      <a:solidFill>
+                        <a:srgbClr val="CCCCCC"/>
+                      </a:solidFill>
+                      <a:prstDash val="solid"/>
+                      <a:round/>
+                      <a:headEnd type="none" w="med" len="med"/>
+                      <a:tailEnd type="none" w="med" len="med"/>
+                    </a:lnR>
+                    <a:lnT w="6350" cap="flat" cmpd="sng" algn="ctr">
+                      <a:solidFill>
+                        <a:srgbClr val="CCCCCC"/>
+                      </a:solidFill>
+                      <a:prstDash val="solid"/>
+                      <a:round/>
+                      <a:headEnd type="none" w="med" len="med"/>
+                      <a:tailEnd type="none" w="med" len="med"/>
+                    </a:lnT>
+                    <a:lnB w="6350" cap="flat" cmpd="sng" algn="ctr">
+                      <a:solidFill>
+                        <a:srgbClr val="CCCCCC"/>
+                      </a:solidFill>
+                      <a:prstDash val="solid"/>
+                      <a:round/>
+                      <a:headEnd type="none" w="med" len="med"/>
+                      <a:tailEnd type="none" w="med" len="med"/>
+                    </a:lnB>
+                  </a:tcPr>
+                </a:tc>
+                <a:tc>
+                  <a:txBody>
+                    <a:bodyPr/>
+                    <a:lstStyle/>
+                    <a:p>
+                      <a:pPr algn="ctr" indent="0" marL="0">
+                        <a:buNone/>
+                      </a:pPr>
+                      <a:r>
+                        <a:rPr lang="en-US" sz="1000" dirty="0">
+                          <a:solidFill>
+                            <a:srgbClr val="556688"/>
+                          </a:solidFill>
+                          <a:latin typeface="Calibri" pitchFamily="34" charset="0"/>
+                          <a:ea typeface="Calibri" pitchFamily="34" charset="-122"/>
+                          <a:cs typeface="Calibri" pitchFamily="34" charset="-120"/>
+                        </a:rPr>
+                        <a:t>(0.012)</a:t>
+                      </a:r>
+                      <a:endParaRPr lang="en-US" sz="1000" dirty="0">
+                        <a:latin typeface="Calibri" charset="0"/>
+                        <a:ea typeface="Calibri" charset="0"/>
+                        <a:cs typeface="Calibri" charset="0"/>
+                      </a:endParaRPr>
+                    </a:p>
+                  </a:txBody>
+                  <a:tcPr marL="101600" marR="101600" marT="50800" marB="50800">
+                    <a:lnL w="6350" cap="flat" cmpd="sng" algn="ctr">
+                      <a:solidFill>
+                        <a:srgbClr val="CCCCCC"/>
+                      </a:solidFill>
+                      <a:prstDash val="solid"/>
+                      <a:round/>
+                      <a:headEnd type="none" w="med" len="med"/>
+                      <a:tailEnd type="none" w="med" len="med"/>
+                    </a:lnL>
+                    <a:lnR w="6350" cap="flat" cmpd="sng" algn="ctr">
+                      <a:solidFill>
+                        <a:srgbClr val="CCCCCC"/>
+                      </a:solidFill>
+                      <a:prstDash val="solid"/>
+                      <a:round/>
+                      <a:headEnd type="none" w="med" len="med"/>
+                      <a:tailEnd type="none" w="med" len="med"/>
+                    </a:lnR>
+                    <a:lnT w="6350" cap="flat" cmpd="sng" algn="ctr">
+                      <a:solidFill>
+                        <a:srgbClr val="CCCCCC"/>
+                      </a:solidFill>
+                      <a:prstDash val="solid"/>
+                      <a:round/>
+                      <a:headEnd type="none" w="med" len="med"/>
+                      <a:tailEnd type="none" w="med" len="med"/>
+                    </a:lnT>
+                    <a:lnB w="6350" cap="flat" cmpd="sng" algn="ctr">
+                      <a:solidFill>
+                        <a:srgbClr val="CCCCCC"/>
+                      </a:solidFill>
+                      <a:prstDash val="solid"/>
+                      <a:round/>
+                      <a:headEnd type="none" w="med" len="med"/>
+                      <a:tailEnd type="none" w="med" len="med"/>
+                    </a:lnB>
+                  </a:tcPr>
+                </a:tc>
+              </a:tr>
+              <a:tr h="274320">
+                <a:tc>
+                  <a:txBody>
+                    <a:bodyPr/>
+                    <a:lstStyle/>
+                    <a:p>
+                      <a:pPr indent="0" marL="0">
+                        <a:buNone/>
+                      </a:pPr>
+                      <a:r>
+                        <a:rPr lang="en-US" sz="1100" dirty="0">
+                          <a:solidFill>
+                            <a:srgbClr val="000000"/>
+                          </a:solidFill>
+                          <a:latin typeface="Calibri" pitchFamily="34" charset="0"/>
+                          <a:ea typeface="Calibri" pitchFamily="34" charset="-122"/>
+                          <a:cs typeface="Calibri" pitchFamily="34" charset="-120"/>
+                        </a:rPr>
+                        <a:t>Num. authors</a:t>
+                      </a:r>
+                      <a:endParaRPr lang="en-US" sz="1100" dirty="0">
+                        <a:latin typeface="Calibri" charset="0"/>
+                        <a:ea typeface="Calibri" charset="0"/>
+                        <a:cs typeface="Calibri" charset="0"/>
+                      </a:endParaRPr>
+                    </a:p>
+                  </a:txBody>
+                  <a:tcPr marL="101600" marR="101600" marT="50800" marB="50800">
+                    <a:lnL w="6350" cap="flat" cmpd="sng" algn="ctr">
+                      <a:solidFill>
+                        <a:srgbClr val="CCCCCC"/>
+                      </a:solidFill>
+                      <a:prstDash val="solid"/>
+                      <a:round/>
+                      <a:headEnd type="none" w="med" len="med"/>
+                      <a:tailEnd type="none" w="med" len="med"/>
+                    </a:lnL>
+                    <a:lnR w="6350" cap="flat" cmpd="sng" algn="ctr">
+                      <a:solidFill>
+                        <a:srgbClr val="CCCCCC"/>
+                      </a:solidFill>
+                      <a:prstDash val="solid"/>
+                      <a:round/>
+                      <a:headEnd type="none" w="med" len="med"/>
+                      <a:tailEnd type="none" w="med" len="med"/>
+                    </a:lnR>
+                    <a:lnT w="6350" cap="flat" cmpd="sng" algn="ctr">
+                      <a:solidFill>
+                        <a:srgbClr val="CCCCCC"/>
+                      </a:solidFill>
+                      <a:prstDash val="solid"/>
+                      <a:round/>
+                      <a:headEnd type="none" w="med" len="med"/>
+                      <a:tailEnd type="none" w="med" len="med"/>
+                    </a:lnT>
+                    <a:lnB w="6350" cap="flat" cmpd="sng" algn="ctr">
+                      <a:solidFill>
+                        <a:srgbClr val="CCCCCC"/>
+                      </a:solidFill>
+                      <a:prstDash val="solid"/>
+                      <a:round/>
+                      <a:headEnd type="none" w="med" len="med"/>
+                      <a:tailEnd type="none" w="med" len="med"/>
+                    </a:lnB>
+                  </a:tcPr>
+                </a:tc>
+                <a:tc>
+                  <a:txBody>
+                    <a:bodyPr/>
+                    <a:lstStyle/>
+                    <a:p>
+                      <a:pPr algn="ctr" indent="0" marL="0">
+                        <a:buNone/>
+                      </a:pPr>
+                      <a:r>
+                        <a:rPr lang="en-US" sz="1100" dirty="0">
+                          <a:solidFill>
+                            <a:srgbClr val="000000"/>
+                          </a:solidFill>
+                          <a:latin typeface="Calibri" pitchFamily="34" charset="0"/>
+                          <a:ea typeface="Calibri" pitchFamily="34" charset="-122"/>
+                          <a:cs typeface="Calibri" pitchFamily="34" charset="-120"/>
+                        </a:rPr>
+                        <a:t>0.001</a:t>
+                      </a:r>
+                      <a:endParaRPr lang="en-US" sz="1100" dirty="0">
+                        <a:latin typeface="Calibri" charset="0"/>
+                        <a:ea typeface="Calibri" charset="0"/>
+                        <a:cs typeface="Calibri" charset="0"/>
+                      </a:endParaRPr>
+                    </a:p>
+                  </a:txBody>
+                  <a:tcPr marL="101600" marR="101600" marT="50800" marB="50800">
+                    <a:lnL w="6350" cap="flat" cmpd="sng" algn="ctr">
+                      <a:solidFill>
+                        <a:srgbClr val="CCCCCC"/>
+                      </a:solidFill>
+                      <a:prstDash val="solid"/>
+                      <a:round/>
+                      <a:headEnd type="none" w="med" len="med"/>
+                      <a:tailEnd type="none" w="med" len="med"/>
+                    </a:lnL>
+                    <a:lnR w="6350" cap="flat" cmpd="sng" algn="ctr">
+                      <a:solidFill>
+                        <a:srgbClr val="CCCCCC"/>
+                      </a:solidFill>
+                      <a:prstDash val="solid"/>
+                      <a:round/>
+                      <a:headEnd type="none" w="med" len="med"/>
+                      <a:tailEnd type="none" w="med" len="med"/>
+                    </a:lnR>
+                    <a:lnT w="6350" cap="flat" cmpd="sng" algn="ctr">
+                      <a:solidFill>
+                        <a:srgbClr val="CCCCCC"/>
+                      </a:solidFill>
+                      <a:prstDash val="solid"/>
+                      <a:round/>
+                      <a:headEnd type="none" w="med" len="med"/>
+                      <a:tailEnd type="none" w="med" len="med"/>
+                    </a:lnT>
+                    <a:lnB w="6350" cap="flat" cmpd="sng" algn="ctr">
+                      <a:solidFill>
+                        <a:srgbClr val="CCCCCC"/>
+                      </a:solidFill>
+                      <a:prstDash val="solid"/>
+                      <a:round/>
+                      <a:headEnd type="none" w="med" len="med"/>
+                      <a:tailEnd type="none" w="med" len="med"/>
+                    </a:lnB>
+                  </a:tcPr>
+                </a:tc>
+                <a:tc>
+                  <a:txBody>
+                    <a:bodyPr/>
+                    <a:lstStyle/>
+                    <a:p>
+                      <a:pPr algn="ctr" indent="0" marL="0">
+                        <a:buNone/>
+                      </a:pPr>
+                      <a:r>
+                        <a:rPr lang="en-US" sz="1100" dirty="0">
+                          <a:solidFill>
+                            <a:srgbClr val="000000"/>
+                          </a:solidFill>
+                          <a:latin typeface="Calibri" pitchFamily="34" charset="0"/>
+                          <a:ea typeface="Calibri" pitchFamily="34" charset="-122"/>
+                          <a:cs typeface="Calibri" pitchFamily="34" charset="-120"/>
+                        </a:rPr>
+                        <a:t>0.001</a:t>
+                      </a:r>
+                      <a:endParaRPr lang="en-US" sz="1100" dirty="0">
+                        <a:latin typeface="Calibri" charset="0"/>
+                        <a:ea typeface="Calibri" charset="0"/>
+                        <a:cs typeface="Calibri" charset="0"/>
+                      </a:endParaRPr>
+                    </a:p>
+                  </a:txBody>
+                  <a:tcPr marL="101600" marR="101600" marT="50800" marB="50800">
+                    <a:lnL w="6350" cap="flat" cmpd="sng" algn="ctr">
+                      <a:solidFill>
+                        <a:srgbClr val="CCCCCC"/>
+                      </a:solidFill>
+                      <a:prstDash val="solid"/>
+                      <a:round/>
+                      <a:headEnd type="none" w="med" len="med"/>
+                      <a:tailEnd type="none" w="med" len="med"/>
+                    </a:lnL>
+                    <a:lnR w="6350" cap="flat" cmpd="sng" algn="ctr">
+                      <a:solidFill>
+                        <a:srgbClr val="CCCCCC"/>
+                      </a:solidFill>
+                      <a:prstDash val="solid"/>
+                      <a:round/>
+                      <a:headEnd type="none" w="med" len="med"/>
+                      <a:tailEnd type="none" w="med" len="med"/>
+                    </a:lnR>
+                    <a:lnT w="6350" cap="flat" cmpd="sng" algn="ctr">
+                      <a:solidFill>
+                        <a:srgbClr val="CCCCCC"/>
+                      </a:solidFill>
+                      <a:prstDash val="solid"/>
+                      <a:round/>
+                      <a:headEnd type="none" w="med" len="med"/>
+                      <a:tailEnd type="none" w="med" len="med"/>
+                    </a:lnT>
+                    <a:lnB w="6350" cap="flat" cmpd="sng" algn="ctr">
+                      <a:solidFill>
+                        <a:srgbClr val="CCCCCC"/>
+                      </a:solidFill>
+                      <a:prstDash val="solid"/>
+                      <a:round/>
+                      <a:headEnd type="none" w="med" len="med"/>
+                      <a:tailEnd type="none" w="med" len="med"/>
+                    </a:lnB>
+                  </a:tcPr>
+                </a:tc>
+              </a:tr>
+              <a:tr h="274320">
+                <a:tc>
+                  <a:txBody>
+                    <a:bodyPr/>
+                    <a:lstStyle/>
+                    <a:p>
+                      <a:pPr indent="0" marL="0">
+                        <a:buNone/>
+                      </a:pPr>
+                      <a:r>
+                        <a:rPr lang="en-US" sz="1100" dirty="0">
+                          <a:solidFill>
+                            <a:srgbClr val="000000"/>
+                          </a:solidFill>
+                          <a:latin typeface="Calibri" pitchFamily="34" charset="0"/>
+                          <a:ea typeface="Calibri" pitchFamily="34" charset="-122"/>
+                          <a:cs typeface="Calibri" pitchFamily="34" charset="-120"/>
+                        </a:rPr>
+                        <a:t>Distinct institutions</a:t>
+                      </a:r>
+                      <a:endParaRPr lang="en-US" sz="1100" dirty="0">
+                        <a:latin typeface="Calibri" charset="0"/>
+                        <a:ea typeface="Calibri" charset="0"/>
+                        <a:cs typeface="Calibri" charset="0"/>
+                      </a:endParaRPr>
+                    </a:p>
+                  </a:txBody>
+                  <a:tcPr marL="101600" marR="101600" marT="50800" marB="50800">
+                    <a:lnL w="6350" cap="flat" cmpd="sng" algn="ctr">
+                      <a:solidFill>
+                        <a:srgbClr val="CCCCCC"/>
+                      </a:solidFill>
+                      <a:prstDash val="solid"/>
+                      <a:round/>
+                      <a:headEnd type="none" w="med" len="med"/>
+                      <a:tailEnd type="none" w="med" len="med"/>
+                    </a:lnL>
+                    <a:lnR w="6350" cap="flat" cmpd="sng" algn="ctr">
+                      <a:solidFill>
+                        <a:srgbClr val="CCCCCC"/>
+                      </a:solidFill>
+                      <a:prstDash val="solid"/>
+                      <a:round/>
+                      <a:headEnd type="none" w="med" len="med"/>
+                      <a:tailEnd type="none" w="med" len="med"/>
+                    </a:lnR>
+                    <a:lnT w="6350" cap="flat" cmpd="sng" algn="ctr">
+                      <a:solidFill>
+                        <a:srgbClr val="CCCCCC"/>
+                      </a:solidFill>
+                      <a:prstDash val="solid"/>
+                      <a:round/>
+                      <a:headEnd type="none" w="med" len="med"/>
+                      <a:tailEnd type="none" w="med" len="med"/>
+                    </a:lnT>
+                    <a:lnB w="6350" cap="flat" cmpd="sng" algn="ctr">
+                      <a:solidFill>
+                        <a:srgbClr val="CCCCCC"/>
+                      </a:solidFill>
+                      <a:prstDash val="solid"/>
+                      <a:round/>
+                      <a:headEnd type="none" w="med" len="med"/>
+                      <a:tailEnd type="none" w="med" len="med"/>
+                    </a:lnB>
+                  </a:tcPr>
+                </a:tc>
+                <a:tc>
+                  <a:txBody>
+                    <a:bodyPr/>
+                    <a:lstStyle/>
+                    <a:p>
+                      <a:pPr algn="ctr" indent="0" marL="0">
+                        <a:buNone/>
+                      </a:pPr>
+                      <a:r>
+                        <a:rPr lang="en-US" sz="1100" dirty="0">
+                          <a:solidFill>
+                            <a:srgbClr val="000000"/>
+                          </a:solidFill>
+                          <a:latin typeface="Calibri" pitchFamily="34" charset="0"/>
+                          <a:ea typeface="Calibri" pitchFamily="34" charset="-122"/>
+                          <a:cs typeface="Calibri" pitchFamily="34" charset="-120"/>
+                        </a:rPr>
+                        <a:t>–0.000***</a:t>
+                      </a:r>
+                      <a:endParaRPr lang="en-US" sz="1100" dirty="0">
+                        <a:latin typeface="Calibri" charset="0"/>
+                        <a:ea typeface="Calibri" charset="0"/>
+                        <a:cs typeface="Calibri" charset="0"/>
+                      </a:endParaRPr>
+                    </a:p>
+                  </a:txBody>
+                  <a:tcPr marL="101600" marR="101600" marT="50800" marB="50800">
+                    <a:lnL w="6350" cap="flat" cmpd="sng" algn="ctr">
+                      <a:solidFill>
+                        <a:srgbClr val="CCCCCC"/>
+                      </a:solidFill>
+                      <a:prstDash val="solid"/>
+                      <a:round/>
+                      <a:headEnd type="none" w="med" len="med"/>
+                      <a:tailEnd type="none" w="med" len="med"/>
+                    </a:lnL>
+                    <a:lnR w="6350" cap="flat" cmpd="sng" algn="ctr">
+                      <a:solidFill>
+                        <a:srgbClr val="CCCCCC"/>
+                      </a:solidFill>
+                      <a:prstDash val="solid"/>
+                      <a:round/>
+                      <a:headEnd type="none" w="med" len="med"/>
+                      <a:tailEnd type="none" w="med" len="med"/>
+                    </a:lnR>
+                    <a:lnT w="6350" cap="flat" cmpd="sng" algn="ctr">
+                      <a:solidFill>
+                        <a:srgbClr val="CCCCCC"/>
+                      </a:solidFill>
+                      <a:prstDash val="solid"/>
+                      <a:round/>
+                      <a:headEnd type="none" w="med" len="med"/>
+                      <a:tailEnd type="none" w="med" len="med"/>
+                    </a:lnT>
+                    <a:lnB w="6350" cap="flat" cmpd="sng" algn="ctr">
+                      <a:solidFill>
+                        <a:srgbClr val="CCCCCC"/>
+                      </a:solidFill>
+                      <a:prstDash val="solid"/>
+                      <a:round/>
+                      <a:headEnd type="none" w="med" len="med"/>
+                      <a:tailEnd type="none" w="med" len="med"/>
+                    </a:lnB>
+                  </a:tcPr>
+                </a:tc>
+                <a:tc>
+                  <a:txBody>
+                    <a:bodyPr/>
+                    <a:lstStyle/>
+                    <a:p>
+                      <a:pPr algn="ctr" indent="0" marL="0">
+                        <a:buNone/>
+                      </a:pPr>
+                      <a:r>
+                        <a:rPr lang="en-US" sz="1100" dirty="0">
+                          <a:solidFill>
+                            <a:srgbClr val="000000"/>
+                          </a:solidFill>
+                          <a:latin typeface="Calibri" pitchFamily="34" charset="0"/>
+                          <a:ea typeface="Calibri" pitchFamily="34" charset="-122"/>
+                          <a:cs typeface="Calibri" pitchFamily="34" charset="-120"/>
+                        </a:rPr>
+                        <a:t>–0.000***</a:t>
+                      </a:r>
+                      <a:endParaRPr lang="en-US" sz="1100" dirty="0">
+                        <a:latin typeface="Calibri" charset="0"/>
+                        <a:ea typeface="Calibri" charset="0"/>
+                        <a:cs typeface="Calibri" charset="0"/>
+                      </a:endParaRPr>
+                    </a:p>
+                  </a:txBody>
+                  <a:tcPr marL="101600" marR="101600" marT="50800" marB="50800">
+                    <a:lnL w="6350" cap="flat" cmpd="sng" algn="ctr">
+                      <a:solidFill>
+                        <a:srgbClr val="CCCCCC"/>
+                      </a:solidFill>
+                      <a:prstDash val="solid"/>
+                      <a:round/>
+                      <a:headEnd type="none" w="med" len="med"/>
+                      <a:tailEnd type="none" w="med" len="med"/>
+                    </a:lnL>
+                    <a:lnR w="6350" cap="flat" cmpd="sng" algn="ctr">
+                      <a:solidFill>
+                        <a:srgbClr val="CCCCCC"/>
+                      </a:solidFill>
+                      <a:prstDash val="solid"/>
+                      <a:round/>
+                      <a:headEnd type="none" w="med" len="med"/>
+                      <a:tailEnd type="none" w="med" len="med"/>
+                    </a:lnR>
+                    <a:lnT w="6350" cap="flat" cmpd="sng" algn="ctr">
+                      <a:solidFill>
+                        <a:srgbClr val="CCCCCC"/>
+                      </a:solidFill>
+                      <a:prstDash val="solid"/>
+                      <a:round/>
+                      <a:headEnd type="none" w="med" len="med"/>
+                      <a:tailEnd type="none" w="med" len="med"/>
+                    </a:lnT>
+                    <a:lnB w="6350" cap="flat" cmpd="sng" algn="ctr">
+                      <a:solidFill>
+                        <a:srgbClr val="CCCCCC"/>
+                      </a:solidFill>
+                      <a:prstDash val="solid"/>
+                      <a:round/>
+                      <a:headEnd type="none" w="med" len="med"/>
+                      <a:tailEnd type="none" w="med" len="med"/>
+                    </a:lnB>
+                  </a:tcPr>
+                </a:tc>
+              </a:tr>
+              <a:tr h="274320">
+                <a:tc>
+                  <a:txBody>
+                    <a:bodyPr/>
+                    <a:lstStyle/>
+                    <a:p>
+                      <a:pPr indent="0" marL="0">
+                        <a:buNone/>
+                      </a:pPr>
+                      <a:r>
+                        <a:rPr lang="en-US" sz="1100" dirty="0">
+                          <a:solidFill>
+                            <a:srgbClr val="000000"/>
+                          </a:solidFill>
+                          <a:latin typeface="Calibri" pitchFamily="34" charset="0"/>
+                          <a:ea typeface="Calibri" pitchFamily="34" charset="-122"/>
+                          <a:cs typeface="Calibri" pitchFamily="34" charset="-120"/>
+                        </a:rPr>
+                        <a:t>Distinct countries</a:t>
+                      </a:r>
+                      <a:endParaRPr lang="en-US" sz="1100" dirty="0">
+                        <a:latin typeface="Calibri" charset="0"/>
+                        <a:ea typeface="Calibri" charset="0"/>
+                        <a:cs typeface="Calibri" charset="0"/>
+                      </a:endParaRPr>
+                    </a:p>
+                  </a:txBody>
+                  <a:tcPr marL="101600" marR="101600" marT="50800" marB="50800">
+                    <a:lnL w="6350" cap="flat" cmpd="sng" algn="ctr">
+                      <a:solidFill>
+                        <a:srgbClr val="CCCCCC"/>
+                      </a:solidFill>
+                      <a:prstDash val="solid"/>
+                      <a:round/>
+                      <a:headEnd type="none" w="med" len="med"/>
+                      <a:tailEnd type="none" w="med" len="med"/>
+                    </a:lnL>
+                    <a:lnR w="6350" cap="flat" cmpd="sng" algn="ctr">
+                      <a:solidFill>
+                        <a:srgbClr val="CCCCCC"/>
+                      </a:solidFill>
+                      <a:prstDash val="solid"/>
+                      <a:round/>
+                      <a:headEnd type="none" w="med" len="med"/>
+                      <a:tailEnd type="none" w="med" len="med"/>
+                    </a:lnR>
+                    <a:lnT w="6350" cap="flat" cmpd="sng" algn="ctr">
+                      <a:solidFill>
+                        <a:srgbClr val="CCCCCC"/>
+                      </a:solidFill>
+                      <a:prstDash val="solid"/>
+                      <a:round/>
+                      <a:headEnd type="none" w="med" len="med"/>
+                      <a:tailEnd type="none" w="med" len="med"/>
+                    </a:lnT>
+                    <a:lnB w="6350" cap="flat" cmpd="sng" algn="ctr">
+                      <a:solidFill>
+                        <a:srgbClr val="CCCCCC"/>
+                      </a:solidFill>
+                      <a:prstDash val="solid"/>
+                      <a:round/>
+                      <a:headEnd type="none" w="med" len="med"/>
+                      <a:tailEnd type="none" w="med" len="med"/>
+                    </a:lnB>
+                  </a:tcPr>
+                </a:tc>
+                <a:tc>
+                  <a:txBody>
+                    <a:bodyPr/>
+                    <a:lstStyle/>
+                    <a:p>
+                      <a:pPr algn="ctr" indent="0" marL="0">
+                        <a:buNone/>
+                      </a:pPr>
+                      <a:r>
+                        <a:rPr lang="en-US" sz="1100" dirty="0">
+                          <a:solidFill>
+                            <a:srgbClr val="000000"/>
+                          </a:solidFill>
+                          <a:latin typeface="Calibri" pitchFamily="34" charset="0"/>
+                          <a:ea typeface="Calibri" pitchFamily="34" charset="-122"/>
+                          <a:cs typeface="Calibri" pitchFamily="34" charset="-120"/>
+                        </a:rPr>
+                        <a:t>0.015***</a:t>
+                      </a:r>
+                      <a:endParaRPr lang="en-US" sz="1100" dirty="0">
+                        <a:latin typeface="Calibri" charset="0"/>
+                        <a:ea typeface="Calibri" charset="0"/>
+                        <a:cs typeface="Calibri" charset="0"/>
+                      </a:endParaRPr>
+                    </a:p>
+                  </a:txBody>
+                  <a:tcPr marL="101600" marR="101600" marT="50800" marB="50800">
+                    <a:lnL w="6350" cap="flat" cmpd="sng" algn="ctr">
+                      <a:solidFill>
+                        <a:srgbClr val="CCCCCC"/>
+                      </a:solidFill>
+                      <a:prstDash val="solid"/>
+                      <a:round/>
+                      <a:headEnd type="none" w="med" len="med"/>
+                      <a:tailEnd type="none" w="med" len="med"/>
+                    </a:lnL>
+                    <a:lnR w="6350" cap="flat" cmpd="sng" algn="ctr">
+                      <a:solidFill>
+                        <a:srgbClr val="CCCCCC"/>
+                      </a:solidFill>
+                      <a:prstDash val="solid"/>
+                      <a:round/>
+                      <a:headEnd type="none" w="med" len="med"/>
+                      <a:tailEnd type="none" w="med" len="med"/>
+                    </a:lnR>
+                    <a:lnT w="6350" cap="flat" cmpd="sng" algn="ctr">
+                      <a:solidFill>
+                        <a:srgbClr val="CCCCCC"/>
+                      </a:solidFill>
+                      <a:prstDash val="solid"/>
+                      <a:round/>
+                      <a:headEnd type="none" w="med" len="med"/>
+                      <a:tailEnd type="none" w="med" len="med"/>
+                    </a:lnT>
+                    <a:lnB w="6350" cap="flat" cmpd="sng" algn="ctr">
+                      <a:solidFill>
+                        <a:srgbClr val="CCCCCC"/>
+                      </a:solidFill>
+                      <a:prstDash val="solid"/>
+                      <a:round/>
+                      <a:headEnd type="none" w="med" len="med"/>
+                      <a:tailEnd type="none" w="med" len="med"/>
+                    </a:lnB>
+                  </a:tcPr>
+                </a:tc>
+                <a:tc>
+                  <a:txBody>
+                    <a:bodyPr/>
+                    <a:lstStyle/>
+                    <a:p>
+                      <a:pPr algn="ctr" indent="0" marL="0">
+                        <a:buNone/>
+                      </a:pPr>
+                      <a:r>
+                        <a:rPr lang="en-US" sz="1100" dirty="0">
+                          <a:solidFill>
+                            <a:srgbClr val="000000"/>
+                          </a:solidFill>
+                          <a:latin typeface="Calibri" pitchFamily="34" charset="0"/>
+                          <a:ea typeface="Calibri" pitchFamily="34" charset="-122"/>
+                          <a:cs typeface="Calibri" pitchFamily="34" charset="-120"/>
+                        </a:rPr>
+                        <a:t>0.015***</a:t>
+                      </a:r>
+                      <a:endParaRPr lang="en-US" sz="1100" dirty="0">
+                        <a:latin typeface="Calibri" charset="0"/>
+                        <a:ea typeface="Calibri" charset="0"/>
+                        <a:cs typeface="Calibri" charset="0"/>
+                      </a:endParaRPr>
+                    </a:p>
+                  </a:txBody>
+                  <a:tcPr marL="101600" marR="101600" marT="50800" marB="50800">
+                    <a:lnL w="6350" cap="flat" cmpd="sng" algn="ctr">
+                      <a:solidFill>
+                        <a:srgbClr val="CCCCCC"/>
+                      </a:solidFill>
+                      <a:prstDash val="solid"/>
+                      <a:round/>
+                      <a:headEnd type="none" w="med" len="med"/>
+                      <a:tailEnd type="none" w="med" len="med"/>
+                    </a:lnL>
+                    <a:lnR w="6350" cap="flat" cmpd="sng" algn="ctr">
+                      <a:solidFill>
+                        <a:srgbClr val="CCCCCC"/>
+                      </a:solidFill>
+                      <a:prstDash val="solid"/>
+                      <a:round/>
+                      <a:headEnd type="none" w="med" len="med"/>
+                      <a:tailEnd type="none" w="med" len="med"/>
+                    </a:lnR>
+                    <a:lnT w="6350" cap="flat" cmpd="sng" algn="ctr">
+                      <a:solidFill>
+                        <a:srgbClr val="CCCCCC"/>
+                      </a:solidFill>
+                      <a:prstDash val="solid"/>
+                      <a:round/>
+                      <a:headEnd type="none" w="med" len="med"/>
+                      <a:tailEnd type="none" w="med" len="med"/>
+                    </a:lnT>
+                    <a:lnB w="6350" cap="flat" cmpd="sng" algn="ctr">
+                      <a:solidFill>
+                        <a:srgbClr val="CCCCCC"/>
+                      </a:solidFill>
+                      <a:prstDash val="solid"/>
+                      <a:round/>
+                      <a:headEnd type="none" w="med" len="med"/>
+                      <a:tailEnd type="none" w="med" len="med"/>
+                    </a:lnB>
+                  </a:tcPr>
+                </a:tc>
+              </a:tr>
+              <a:tr h="274320">
+                <a:tc>
+                  <a:txBody>
+                    <a:bodyPr/>
+                    <a:lstStyle/>
+                    <a:p>
+                      <a:pPr indent="0" marL="0">
+                        <a:buNone/>
+                      </a:pPr>
+                      <a:endParaRPr lang="en-US" sz="400" dirty="0">
+                        <a:latin typeface="Calibri" charset="0"/>
+                        <a:ea typeface="Calibri" charset="0"/>
+                        <a:cs typeface="Calibri" charset="0"/>
+                      </a:endParaRPr>
+                    </a:p>
+                  </a:txBody>
+                  <a:tcPr marL="101600" marR="101600" marT="50800" marB="50800">
+                    <a:lnL w="6350" cap="flat" cmpd="sng" algn="ctr">
+                      <a:solidFill>
+                        <a:srgbClr val="CCCCCC"/>
+                      </a:solidFill>
+                      <a:prstDash val="solid"/>
+                      <a:round/>
+                      <a:headEnd type="none" w="med" len="med"/>
+                      <a:tailEnd type="none" w="med" len="med"/>
+                    </a:lnL>
+                    <a:lnR w="6350" cap="flat" cmpd="sng" algn="ctr">
+                      <a:solidFill>
+                        <a:srgbClr val="CCCCCC"/>
+                      </a:solidFill>
+                      <a:prstDash val="solid"/>
+                      <a:round/>
+                      <a:headEnd type="none" w="med" len="med"/>
+                      <a:tailEnd type="none" w="med" len="med"/>
+                    </a:lnR>
+                    <a:lnT w="6350" cap="flat" cmpd="sng" algn="ctr">
+                      <a:solidFill>
+                        <a:srgbClr val="CCCCCC"/>
+                      </a:solidFill>
+                      <a:prstDash val="solid"/>
+                      <a:round/>
+                      <a:headEnd type="none" w="med" len="med"/>
+                      <a:tailEnd type="none" w="med" len="med"/>
+                    </a:lnT>
+                    <a:lnB w="6350" cap="flat" cmpd="sng" algn="ctr">
+                      <a:solidFill>
+                        <a:srgbClr val="CCCCCC"/>
+                      </a:solidFill>
+                      <a:prstDash val="solid"/>
+                      <a:round/>
+                      <a:headEnd type="none" w="med" len="med"/>
+                      <a:tailEnd type="none" w="med" len="med"/>
+                    </a:lnB>
+                  </a:tcPr>
+                </a:tc>
+                <a:tc>
+                  <a:txBody>
+                    <a:bodyPr/>
+                    <a:lstStyle/>
+                    <a:p>
+                      <a:pPr indent="0" marL="0">
+                        <a:buNone/>
+                      </a:pPr>
+                      <a:endParaRPr lang="en-US" sz="400" dirty="0">
+                        <a:latin typeface="Calibri" charset="0"/>
+                        <a:ea typeface="Calibri" charset="0"/>
+                        <a:cs typeface="Calibri" charset="0"/>
+                      </a:endParaRPr>
+                    </a:p>
+                  </a:txBody>
+                  <a:tcPr marL="101600" marR="101600" marT="50800" marB="50800">
+                    <a:lnL w="6350" cap="flat" cmpd="sng" algn="ctr">
+                      <a:solidFill>
+                        <a:srgbClr val="CCCCCC"/>
+                      </a:solidFill>
+                      <a:prstDash val="solid"/>
+                      <a:round/>
+                      <a:headEnd type="none" w="med" len="med"/>
+                      <a:tailEnd type="none" w="med" len="med"/>
+                    </a:lnL>
+                    <a:lnR w="6350" cap="flat" cmpd="sng" algn="ctr">
+                      <a:solidFill>
+                        <a:srgbClr val="CCCCCC"/>
+                      </a:solidFill>
+                      <a:prstDash val="solid"/>
+                      <a:round/>
+                      <a:headEnd type="none" w="med" len="med"/>
+                      <a:tailEnd type="none" w="med" len="med"/>
+                    </a:lnR>
+                    <a:lnT w="6350" cap="flat" cmpd="sng" algn="ctr">
+                      <a:solidFill>
+                        <a:srgbClr val="CCCCCC"/>
+                      </a:solidFill>
+                      <a:prstDash val="solid"/>
+                      <a:round/>
+                      <a:headEnd type="none" w="med" len="med"/>
+                      <a:tailEnd type="none" w="med" len="med"/>
+                    </a:lnT>
+                    <a:lnB w="6350" cap="flat" cmpd="sng" algn="ctr">
+                      <a:solidFill>
+                        <a:srgbClr val="CCCCCC"/>
+                      </a:solidFill>
+                      <a:prstDash val="solid"/>
+                      <a:round/>
+                      <a:headEnd type="none" w="med" len="med"/>
+                      <a:tailEnd type="none" w="med" len="med"/>
+                    </a:lnB>
+                  </a:tcPr>
+                </a:tc>
+                <a:tc>
+                  <a:txBody>
+                    <a:bodyPr/>
+                    <a:lstStyle/>
+                    <a:p>
+                      <a:pPr indent="0" marL="0">
+                        <a:buNone/>
+                      </a:pPr>
+                      <a:endParaRPr lang="en-US" sz="400" dirty="0">
+                        <a:latin typeface="Calibri" charset="0"/>
+                        <a:ea typeface="Calibri" charset="0"/>
+                        <a:cs typeface="Calibri" charset="0"/>
+                      </a:endParaRPr>
+                    </a:p>
+                  </a:txBody>
+                  <a:tcPr marL="101600" marR="101600" marT="50800" marB="50800">
+                    <a:lnL w="6350" cap="flat" cmpd="sng" algn="ctr">
+                      <a:solidFill>
+                        <a:srgbClr val="CCCCCC"/>
+                      </a:solidFill>
+                      <a:prstDash val="solid"/>
+                      <a:round/>
+                      <a:headEnd type="none" w="med" len="med"/>
+                      <a:tailEnd type="none" w="med" len="med"/>
+                    </a:lnL>
+                    <a:lnR w="6350" cap="flat" cmpd="sng" algn="ctr">
+                      <a:solidFill>
+                        <a:srgbClr val="CCCCCC"/>
+                      </a:solidFill>
+                      <a:prstDash val="solid"/>
+                      <a:round/>
+                      <a:headEnd type="none" w="med" len="med"/>
+                      <a:tailEnd type="none" w="med" len="med"/>
+                    </a:lnR>
+                    <a:lnT w="6350" cap="flat" cmpd="sng" algn="ctr">
+                      <a:solidFill>
+                        <a:srgbClr val="CCCCCC"/>
+                      </a:solidFill>
+                      <a:prstDash val="solid"/>
+                      <a:round/>
+                      <a:headEnd type="none" w="med" len="med"/>
+                      <a:tailEnd type="none" w="med" len="med"/>
+                    </a:lnT>
+                    <a:lnB w="6350" cap="flat" cmpd="sng" algn="ctr">
+                      <a:solidFill>
+                        <a:srgbClr val="CCCCCC"/>
+                      </a:solidFill>
+                      <a:prstDash val="solid"/>
+                      <a:round/>
+                      <a:headEnd type="none" w="med" len="med"/>
+                      <a:tailEnd type="none" w="med" len="med"/>
+                    </a:lnB>
+                  </a:tcPr>
+                </a:tc>
+              </a:tr>
+              <a:tr h="274320">
+                <a:tc>
+                  <a:txBody>
+                    <a:bodyPr/>
+                    <a:lstStyle/>
+                    <a:p>
+                      <a:pPr indent="0" marL="0">
+                        <a:buNone/>
+                      </a:pPr>
+                      <a:r>
+                        <a:rPr lang="en-US" sz="1100" dirty="0">
+                          <a:solidFill>
+                            <a:srgbClr val="000000"/>
+                          </a:solidFill>
+                          <a:latin typeface="Calibri" pitchFamily="34" charset="0"/>
+                          <a:ea typeface="Calibri" pitchFamily="34" charset="-122"/>
+                          <a:cs typeface="Calibri" pitchFamily="34" charset="-120"/>
+                        </a:rPr>
+                        <a:t>Field FE</a:t>
+                      </a:r>
+                      <a:endParaRPr lang="en-US" sz="1100" dirty="0">
+                        <a:latin typeface="Calibri" charset="0"/>
+                        <a:ea typeface="Calibri" charset="0"/>
+                        <a:cs typeface="Calibri" charset="0"/>
+                      </a:endParaRPr>
+                    </a:p>
+                  </a:txBody>
+                  <a:tcPr marL="101600" marR="101600" marT="50800" marB="50800">
+                    <a:lnL w="6350" cap="flat" cmpd="sng" algn="ctr">
+                      <a:solidFill>
+                        <a:srgbClr val="CCCCCC"/>
+                      </a:solidFill>
+                      <a:prstDash val="solid"/>
+                      <a:round/>
+                      <a:headEnd type="none" w="med" len="med"/>
+                      <a:tailEnd type="none" w="med" len="med"/>
+                    </a:lnL>
+                    <a:lnR w="6350" cap="flat" cmpd="sng" algn="ctr">
+                      <a:solidFill>
+                        <a:srgbClr val="CCCCCC"/>
+                      </a:solidFill>
+                      <a:prstDash val="solid"/>
+                      <a:round/>
+                      <a:headEnd type="none" w="med" len="med"/>
+                      <a:tailEnd type="none" w="med" len="med"/>
+                    </a:lnR>
+                    <a:lnT w="6350" cap="flat" cmpd="sng" algn="ctr">
+                      <a:solidFill>
+                        <a:srgbClr val="CCCCCC"/>
+                      </a:solidFill>
+                      <a:prstDash val="solid"/>
+                      <a:round/>
+                      <a:headEnd type="none" w="med" len="med"/>
+                      <a:tailEnd type="none" w="med" len="med"/>
+                    </a:lnT>
+                    <a:lnB w="6350" cap="flat" cmpd="sng" algn="ctr">
+                      <a:solidFill>
+                        <a:srgbClr val="CCCCCC"/>
+                      </a:solidFill>
+                      <a:prstDash val="solid"/>
+                      <a:round/>
+                      <a:headEnd type="none" w="med" len="med"/>
+                      <a:tailEnd type="none" w="med" len="med"/>
+                    </a:lnB>
+                  </a:tcPr>
+                </a:tc>
+                <a:tc>
+                  <a:txBody>
+                    <a:bodyPr/>
+                    <a:lstStyle/>
+                    <a:p>
+                      <a:pPr algn="ctr" indent="0" marL="0">
+                        <a:buNone/>
+                      </a:pPr>
+                      <a:r>
+                        <a:rPr lang="en-US" sz="1100" dirty="0">
+                          <a:solidFill>
+                            <a:srgbClr val="000000"/>
+                          </a:solidFill>
+                          <a:latin typeface="Calibri" pitchFamily="34" charset="0"/>
+                          <a:ea typeface="Calibri" pitchFamily="34" charset="-122"/>
+                          <a:cs typeface="Calibri" pitchFamily="34" charset="-120"/>
+                        </a:rPr>
+                        <a:t>Yes</a:t>
+                      </a:r>
+                      <a:endParaRPr lang="en-US" sz="1100" dirty="0">
+                        <a:latin typeface="Calibri" charset="0"/>
+                        <a:ea typeface="Calibri" charset="0"/>
+                        <a:cs typeface="Calibri" charset="0"/>
+                      </a:endParaRPr>
+                    </a:p>
+                  </a:txBody>
+                  <a:tcPr marL="101600" marR="101600" marT="50800" marB="50800">
+                    <a:lnL w="6350" cap="flat" cmpd="sng" algn="ctr">
+                      <a:solidFill>
+                        <a:srgbClr val="CCCCCC"/>
+                      </a:solidFill>
+                      <a:prstDash val="solid"/>
+                      <a:round/>
+                      <a:headEnd type="none" w="med" len="med"/>
+                      <a:tailEnd type="none" w="med" len="med"/>
+                    </a:lnL>
+                    <a:lnR w="6350" cap="flat" cmpd="sng" algn="ctr">
+                      <a:solidFill>
+                        <a:srgbClr val="CCCCCC"/>
+                      </a:solidFill>
+                      <a:prstDash val="solid"/>
+                      <a:round/>
+                      <a:headEnd type="none" w="med" len="med"/>
+                      <a:tailEnd type="none" w="med" len="med"/>
+                    </a:lnR>
+                    <a:lnT w="6350" cap="flat" cmpd="sng" algn="ctr">
+                      <a:solidFill>
+                        <a:srgbClr val="CCCCCC"/>
+                      </a:solidFill>
+                      <a:prstDash val="solid"/>
+                      <a:round/>
+                      <a:headEnd type="none" w="med" len="med"/>
+                      <a:tailEnd type="none" w="med" len="med"/>
+                    </a:lnT>
+                    <a:lnB w="6350" cap="flat" cmpd="sng" algn="ctr">
+                      <a:solidFill>
+                        <a:srgbClr val="CCCCCC"/>
+                      </a:solidFill>
+                      <a:prstDash val="solid"/>
+                      <a:round/>
+                      <a:headEnd type="none" w="med" len="med"/>
+                      <a:tailEnd type="none" w="med" len="med"/>
+                    </a:lnB>
+                  </a:tcPr>
+                </a:tc>
+                <a:tc>
+                  <a:txBody>
+                    <a:bodyPr/>
+                    <a:lstStyle/>
+                    <a:p>
+                      <a:pPr algn="ctr" indent="0" marL="0">
+                        <a:buNone/>
+                      </a:pPr>
+                      <a:r>
+                        <a:rPr lang="en-US" sz="1100" dirty="0">
+                          <a:solidFill>
+                            <a:srgbClr val="000000"/>
+                          </a:solidFill>
+                          <a:latin typeface="Calibri" pitchFamily="34" charset="0"/>
+                          <a:ea typeface="Calibri" pitchFamily="34" charset="-122"/>
+                          <a:cs typeface="Calibri" pitchFamily="34" charset="-120"/>
+                        </a:rPr>
+                        <a:t>Yes</a:t>
+                      </a:r>
+                      <a:endParaRPr lang="en-US" sz="1100" dirty="0">
+                        <a:latin typeface="Calibri" charset="0"/>
+                        <a:ea typeface="Calibri" charset="0"/>
+                        <a:cs typeface="Calibri" charset="0"/>
+                      </a:endParaRPr>
+                    </a:p>
+                  </a:txBody>
+                  <a:tcPr marL="101600" marR="101600" marT="50800" marB="50800">
+                    <a:lnL w="6350" cap="flat" cmpd="sng" algn="ctr">
+                      <a:solidFill>
+                        <a:srgbClr val="CCCCCC"/>
+                      </a:solidFill>
+                      <a:prstDash val="solid"/>
+                      <a:round/>
+                      <a:headEnd type="none" w="med" len="med"/>
+                      <a:tailEnd type="none" w="med" len="med"/>
+                    </a:lnL>
+                    <a:lnR w="6350" cap="flat" cmpd="sng" algn="ctr">
+                      <a:solidFill>
+                        <a:srgbClr val="CCCCCC"/>
+                      </a:solidFill>
+                      <a:prstDash val="solid"/>
+                      <a:round/>
+                      <a:headEnd type="none" w="med" len="med"/>
+                      <a:tailEnd type="none" w="med" len="med"/>
+                    </a:lnR>
+                    <a:lnT w="6350" cap="flat" cmpd="sng" algn="ctr">
+                      <a:solidFill>
+                        <a:srgbClr val="CCCCCC"/>
+                      </a:solidFill>
+                      <a:prstDash val="solid"/>
+                      <a:round/>
+                      <a:headEnd type="none" w="med" len="med"/>
+                      <a:tailEnd type="none" w="med" len="med"/>
+                    </a:lnT>
+                    <a:lnB w="6350" cap="flat" cmpd="sng" algn="ctr">
+                      <a:solidFill>
+                        <a:srgbClr val="CCCCCC"/>
+                      </a:solidFill>
+                      <a:prstDash val="solid"/>
+                      <a:round/>
+                      <a:headEnd type="none" w="med" len="med"/>
+                      <a:tailEnd type="none" w="med" len="med"/>
+                    </a:lnB>
+                  </a:tcPr>
+                </a:tc>
+              </a:tr>
+              <a:tr h="274320">
+                <a:tc>
+                  <a:txBody>
+                    <a:bodyPr/>
+                    <a:lstStyle/>
+                    <a:p>
+                      <a:pPr indent="0" marL="0">
+                        <a:buNone/>
+                      </a:pPr>
+                      <a:r>
+                        <a:rPr lang="en-US" sz="1100" dirty="0">
+                          <a:solidFill>
+                            <a:srgbClr val="000000"/>
+                          </a:solidFill>
+                          <a:latin typeface="Calibri" pitchFamily="34" charset="0"/>
+                          <a:ea typeface="Calibri" pitchFamily="34" charset="-122"/>
+                          <a:cs typeface="Calibri" pitchFamily="34" charset="-120"/>
+                        </a:rPr>
+                        <a:t>Year-month FE</a:t>
+                      </a:r>
+                      <a:endParaRPr lang="en-US" sz="1100" dirty="0">
+                        <a:latin typeface="Calibri" charset="0"/>
+                        <a:ea typeface="Calibri" charset="0"/>
+                        <a:cs typeface="Calibri" charset="0"/>
+                      </a:endParaRPr>
+                    </a:p>
+                  </a:txBody>
+                  <a:tcPr marL="101600" marR="101600" marT="50800" marB="50800">
+                    <a:lnL w="6350" cap="flat" cmpd="sng" algn="ctr">
+                      <a:solidFill>
+                        <a:srgbClr val="CCCCCC"/>
+                      </a:solidFill>
+                      <a:prstDash val="solid"/>
+                      <a:round/>
+                      <a:headEnd type="none" w="med" len="med"/>
+                      <a:tailEnd type="none" w="med" len="med"/>
+                    </a:lnL>
+                    <a:lnR w="6350" cap="flat" cmpd="sng" algn="ctr">
+                      <a:solidFill>
+                        <a:srgbClr val="CCCCCC"/>
+                      </a:solidFill>
+                      <a:prstDash val="solid"/>
+                      <a:round/>
+                      <a:headEnd type="none" w="med" len="med"/>
+                      <a:tailEnd type="none" w="med" len="med"/>
+                    </a:lnR>
+                    <a:lnT w="6350" cap="flat" cmpd="sng" algn="ctr">
+                      <a:solidFill>
+                        <a:srgbClr val="CCCCCC"/>
+                      </a:solidFill>
+                      <a:prstDash val="solid"/>
+                      <a:round/>
+                      <a:headEnd type="none" w="med" len="med"/>
+                      <a:tailEnd type="none" w="med" len="med"/>
+                    </a:lnT>
+                    <a:lnB w="6350" cap="flat" cmpd="sng" algn="ctr">
+                      <a:solidFill>
+                        <a:srgbClr val="CCCCCC"/>
+                      </a:solidFill>
+                      <a:prstDash val="solid"/>
+                      <a:round/>
+                      <a:headEnd type="none" w="med" len="med"/>
+                      <a:tailEnd type="none" w="med" len="med"/>
+                    </a:lnB>
+                  </a:tcPr>
+                </a:tc>
+                <a:tc>
+                  <a:txBody>
+                    <a:bodyPr/>
+                    <a:lstStyle/>
+                    <a:p>
+                      <a:pPr algn="ctr" indent="0" marL="0">
+                        <a:buNone/>
+                      </a:pPr>
+                      <a:r>
+                        <a:rPr lang="en-US" sz="1100" dirty="0">
+                          <a:solidFill>
+                            <a:srgbClr val="000000"/>
+                          </a:solidFill>
+                          <a:latin typeface="Calibri" pitchFamily="34" charset="0"/>
+                          <a:ea typeface="Calibri" pitchFamily="34" charset="-122"/>
+                          <a:cs typeface="Calibri" pitchFamily="34" charset="-120"/>
+                        </a:rPr>
+                        <a:t>Yes</a:t>
+                      </a:r>
+                      <a:endParaRPr lang="en-US" sz="1100" dirty="0">
+                        <a:latin typeface="Calibri" charset="0"/>
+                        <a:ea typeface="Calibri" charset="0"/>
+                        <a:cs typeface="Calibri" charset="0"/>
+                      </a:endParaRPr>
+                    </a:p>
+                  </a:txBody>
+                  <a:tcPr marL="101600" marR="101600" marT="50800" marB="50800">
+                    <a:lnL w="6350" cap="flat" cmpd="sng" algn="ctr">
+                      <a:solidFill>
+                        <a:srgbClr val="CCCCCC"/>
+                      </a:solidFill>
+                      <a:prstDash val="solid"/>
+                      <a:round/>
+                      <a:headEnd type="none" w="med" len="med"/>
+                      <a:tailEnd type="none" w="med" len="med"/>
+                    </a:lnL>
+                    <a:lnR w="6350" cap="flat" cmpd="sng" algn="ctr">
+                      <a:solidFill>
+                        <a:srgbClr val="CCCCCC"/>
+                      </a:solidFill>
+                      <a:prstDash val="solid"/>
+                      <a:round/>
+                      <a:headEnd type="none" w="med" len="med"/>
+                      <a:tailEnd type="none" w="med" len="med"/>
+                    </a:lnR>
+                    <a:lnT w="6350" cap="flat" cmpd="sng" algn="ctr">
+                      <a:solidFill>
+                        <a:srgbClr val="CCCCCC"/>
+                      </a:solidFill>
+                      <a:prstDash val="solid"/>
+                      <a:round/>
+                      <a:headEnd type="none" w="med" len="med"/>
+                      <a:tailEnd type="none" w="med" len="med"/>
+                    </a:lnT>
+                    <a:lnB w="6350" cap="flat" cmpd="sng" algn="ctr">
+                      <a:solidFill>
+                        <a:srgbClr val="CCCCCC"/>
+                      </a:solidFill>
+                      <a:prstDash val="solid"/>
+                      <a:round/>
+                      <a:headEnd type="none" w="med" len="med"/>
+                      <a:tailEnd type="none" w="med" len="med"/>
+                    </a:lnB>
+                  </a:tcPr>
+                </a:tc>
+                <a:tc>
+                  <a:txBody>
+                    <a:bodyPr/>
+                    <a:lstStyle/>
+                    <a:p>
+                      <a:pPr algn="ctr" indent="0" marL="0">
+                        <a:buNone/>
+                      </a:pPr>
+                      <a:r>
+                        <a:rPr lang="en-US" sz="1100" dirty="0">
+                          <a:solidFill>
+                            <a:srgbClr val="000000"/>
+                          </a:solidFill>
+                          <a:latin typeface="Calibri" pitchFamily="34" charset="0"/>
+                          <a:ea typeface="Calibri" pitchFamily="34" charset="-122"/>
+                          <a:cs typeface="Calibri" pitchFamily="34" charset="-120"/>
+                        </a:rPr>
+                        <a:t>Yes</a:t>
+                      </a:r>
+                      <a:endParaRPr lang="en-US" sz="1100" dirty="0">
+                        <a:latin typeface="Calibri" charset="0"/>
+                        <a:ea typeface="Calibri" charset="0"/>
+                        <a:cs typeface="Calibri" charset="0"/>
+                      </a:endParaRPr>
+                    </a:p>
+                  </a:txBody>
+                  <a:tcPr marL="101600" marR="101600" marT="50800" marB="50800">
+                    <a:lnL w="6350" cap="flat" cmpd="sng" algn="ctr">
+                      <a:solidFill>
+                        <a:srgbClr val="CCCCCC"/>
+                      </a:solidFill>
+                      <a:prstDash val="solid"/>
+                      <a:round/>
+                      <a:headEnd type="none" w="med" len="med"/>
+                      <a:tailEnd type="none" w="med" len="med"/>
+                    </a:lnL>
+                    <a:lnR w="6350" cap="flat" cmpd="sng" algn="ctr">
+                      <a:solidFill>
+                        <a:srgbClr val="CCCCCC"/>
+                      </a:solidFill>
+                      <a:prstDash val="solid"/>
+                      <a:round/>
+                      <a:headEnd type="none" w="med" len="med"/>
+                      <a:tailEnd type="none" w="med" len="med"/>
+                    </a:lnR>
+                    <a:lnT w="6350" cap="flat" cmpd="sng" algn="ctr">
+                      <a:solidFill>
+                        <a:srgbClr val="CCCCCC"/>
+                      </a:solidFill>
+                      <a:prstDash val="solid"/>
+                      <a:round/>
+                      <a:headEnd type="none" w="med" len="med"/>
+                      <a:tailEnd type="none" w="med" len="med"/>
+                    </a:lnT>
+                    <a:lnB w="6350" cap="flat" cmpd="sng" algn="ctr">
+                      <a:solidFill>
+                        <a:srgbClr val="CCCCCC"/>
+                      </a:solidFill>
+                      <a:prstDash val="solid"/>
+                      <a:round/>
+                      <a:headEnd type="none" w="med" len="med"/>
+                      <a:tailEnd type="none" w="med" len="med"/>
+                    </a:lnB>
+                  </a:tcPr>
+                </a:tc>
+              </a:tr>
+              <a:tr h="274320">
+                <a:tc>
+                  <a:txBody>
+                    <a:bodyPr/>
+                    <a:lstStyle/>
+                    <a:p>
+                      <a:pPr indent="0" marL="0">
+                        <a:buNone/>
+                      </a:pPr>
+                      <a:r>
+                        <a:rPr lang="en-US" sz="1100" dirty="0">
+                          <a:solidFill>
+                            <a:srgbClr val="000000"/>
+                          </a:solidFill>
+                          <a:latin typeface="Calibri" pitchFamily="34" charset="0"/>
+                          <a:ea typeface="Calibri" pitchFamily="34" charset="-122"/>
+                          <a:cs typeface="Calibri" pitchFamily="34" charset="-120"/>
+                        </a:rPr>
+                        <a:t>N</a:t>
+                      </a:r>
+                      <a:endParaRPr lang="en-US" sz="1100" dirty="0">
+                        <a:latin typeface="Calibri" charset="0"/>
+                        <a:ea typeface="Calibri" charset="0"/>
+                        <a:cs typeface="Calibri" charset="0"/>
+                      </a:endParaRPr>
+                    </a:p>
+                  </a:txBody>
+                  <a:tcPr marL="101600" marR="101600" marT="50800" marB="50800">
+                    <a:lnL w="6350" cap="flat" cmpd="sng" algn="ctr">
+                      <a:solidFill>
+                        <a:srgbClr val="CCCCCC"/>
+                      </a:solidFill>
+                      <a:prstDash val="solid"/>
+                      <a:round/>
+                      <a:headEnd type="none" w="med" len="med"/>
+                      <a:tailEnd type="none" w="med" len="med"/>
+                    </a:lnL>
+                    <a:lnR w="6350" cap="flat" cmpd="sng" algn="ctr">
+                      <a:solidFill>
+                        <a:srgbClr val="CCCCCC"/>
+                      </a:solidFill>
+                      <a:prstDash val="solid"/>
+                      <a:round/>
+                      <a:headEnd type="none" w="med" len="med"/>
+                      <a:tailEnd type="none" w="med" len="med"/>
+                    </a:lnR>
+                    <a:lnT w="6350" cap="flat" cmpd="sng" algn="ctr">
+                      <a:solidFill>
+                        <a:srgbClr val="CCCCCC"/>
+                      </a:solidFill>
+                      <a:prstDash val="solid"/>
+                      <a:round/>
+                      <a:headEnd type="none" w="med" len="med"/>
+                      <a:tailEnd type="none" w="med" len="med"/>
+                    </a:lnT>
+                    <a:lnB w="6350" cap="flat" cmpd="sng" algn="ctr">
+                      <a:solidFill>
+                        <a:srgbClr val="CCCCCC"/>
+                      </a:solidFill>
+                      <a:prstDash val="solid"/>
+                      <a:round/>
+                      <a:headEnd type="none" w="med" len="med"/>
+                      <a:tailEnd type="none" w="med" len="med"/>
+                    </a:lnB>
+                  </a:tcPr>
+                </a:tc>
+                <a:tc>
+                  <a:txBody>
+                    <a:bodyPr/>
+                    <a:lstStyle/>
+                    <a:p>
+                      <a:pPr algn="ctr" indent="0" marL="0">
+                        <a:buNone/>
+                      </a:pPr>
+                      <a:r>
+                        <a:rPr lang="en-US" sz="1100" dirty="0">
+                          <a:solidFill>
+                            <a:srgbClr val="000000"/>
+                          </a:solidFill>
+                          <a:latin typeface="Calibri" pitchFamily="34" charset="0"/>
+                          <a:ea typeface="Calibri" pitchFamily="34" charset="-122"/>
+                          <a:cs typeface="Calibri" pitchFamily="34" charset="-120"/>
+                        </a:rPr>
+                        <a:t>35,080</a:t>
+                      </a:r>
+                      <a:endParaRPr lang="en-US" sz="1100" dirty="0">
+                        <a:latin typeface="Calibri" charset="0"/>
+                        <a:ea typeface="Calibri" charset="0"/>
+                        <a:cs typeface="Calibri" charset="0"/>
+                      </a:endParaRPr>
+                    </a:p>
+                  </a:txBody>
+                  <a:tcPr marL="101600" marR="101600" marT="50800" marB="50800">
+                    <a:lnL w="6350" cap="flat" cmpd="sng" algn="ctr">
+                      <a:solidFill>
+                        <a:srgbClr val="CCCCCC"/>
+                      </a:solidFill>
+                      <a:prstDash val="solid"/>
+                      <a:round/>
+                      <a:headEnd type="none" w="med" len="med"/>
+                      <a:tailEnd type="none" w="med" len="med"/>
+                    </a:lnL>
+                    <a:lnR w="6350" cap="flat" cmpd="sng" algn="ctr">
+                      <a:solidFill>
+                        <a:srgbClr val="CCCCCC"/>
+                      </a:solidFill>
+                      <a:prstDash val="solid"/>
+                      <a:round/>
+                      <a:headEnd type="none" w="med" len="med"/>
+                      <a:tailEnd type="none" w="med" len="med"/>
+                    </a:lnR>
+                    <a:lnT w="6350" cap="flat" cmpd="sng" algn="ctr">
+                      <a:solidFill>
+                        <a:srgbClr val="CCCCCC"/>
+                      </a:solidFill>
+                      <a:prstDash val="solid"/>
+                      <a:round/>
+                      <a:headEnd type="none" w="med" len="med"/>
+                      <a:tailEnd type="none" w="med" len="med"/>
+                    </a:lnT>
+                    <a:lnB w="6350" cap="flat" cmpd="sng" algn="ctr">
+                      <a:solidFill>
+                        <a:srgbClr val="CCCCCC"/>
+                      </a:solidFill>
+                      <a:prstDash val="solid"/>
+                      <a:round/>
+                      <a:headEnd type="none" w="med" len="med"/>
+                      <a:tailEnd type="none" w="med" len="med"/>
+                    </a:lnB>
+                  </a:tcPr>
+                </a:tc>
+                <a:tc>
+                  <a:txBody>
+                    <a:bodyPr/>
+                    <a:lstStyle/>
+                    <a:p>
+                      <a:pPr algn="ctr" indent="0" marL="0">
+                        <a:buNone/>
+                      </a:pPr>
+                      <a:r>
+                        <a:rPr lang="en-US" sz="1100" dirty="0">
+                          <a:solidFill>
+                            <a:srgbClr val="000000"/>
+                          </a:solidFill>
+                          <a:latin typeface="Calibri" pitchFamily="34" charset="0"/>
+                          <a:ea typeface="Calibri" pitchFamily="34" charset="-122"/>
+                          <a:cs typeface="Calibri" pitchFamily="34" charset="-120"/>
+                        </a:rPr>
+                        <a:t>35,080</a:t>
+                      </a:r>
+                      <a:endParaRPr lang="en-US" sz="1100" dirty="0">
+                        <a:latin typeface="Calibri" charset="0"/>
+                        <a:ea typeface="Calibri" charset="0"/>
+                        <a:cs typeface="Calibri" charset="0"/>
+                      </a:endParaRPr>
+                    </a:p>
+                  </a:txBody>
+                  <a:tcPr marL="101600" marR="101600" marT="50800" marB="50800">
+                    <a:lnL w="6350" cap="flat" cmpd="sng" algn="ctr">
+                      <a:solidFill>
+                        <a:srgbClr val="CCCCCC"/>
+                      </a:solidFill>
+                      <a:prstDash val="solid"/>
+                      <a:round/>
+                      <a:headEnd type="none" w="med" len="med"/>
+                      <a:tailEnd type="none" w="med" len="med"/>
+                    </a:lnL>
+                    <a:lnR w="6350" cap="flat" cmpd="sng" algn="ctr">
+                      <a:solidFill>
+                        <a:srgbClr val="CCCCCC"/>
+                      </a:solidFill>
+                      <a:prstDash val="solid"/>
+                      <a:round/>
+                      <a:headEnd type="none" w="med" len="med"/>
+                      <a:tailEnd type="none" w="med" len="med"/>
+                    </a:lnR>
+                    <a:lnT w="6350" cap="flat" cmpd="sng" algn="ctr">
+                      <a:solidFill>
+                        <a:srgbClr val="CCCCCC"/>
+                      </a:solidFill>
+                      <a:prstDash val="solid"/>
+                      <a:round/>
+                      <a:headEnd type="none" w="med" len="med"/>
+                      <a:tailEnd type="none" w="med" len="med"/>
+                    </a:lnT>
+                    <a:lnB w="6350" cap="flat" cmpd="sng" algn="ctr">
+                      <a:solidFill>
+                        <a:srgbClr val="CCCCCC"/>
+                      </a:solidFill>
+                      <a:prstDash val="solid"/>
+                      <a:round/>
+                      <a:headEnd type="none" w="med" len="med"/>
+                      <a:tailEnd type="none" w="med" len="med"/>
+                    </a:lnB>
+                  </a:tcPr>
+                </a:tc>
+              </a:tr>
+              <a:tr h="274320">
+                <a:tc>
+                  <a:txBody>
+                    <a:bodyPr/>
+                    <a:lstStyle/>
+                    <a:p>
+                      <a:pPr indent="0" marL="0">
+                        <a:buNone/>
+                      </a:pPr>
+                      <a:r>
+                        <a:rPr lang="en-US" sz="1100" dirty="0">
+                          <a:solidFill>
+                            <a:srgbClr val="000000"/>
+                          </a:solidFill>
+                          <a:latin typeface="Calibri" pitchFamily="34" charset="0"/>
+                          <a:ea typeface="Calibri" pitchFamily="34" charset="-122"/>
+                          <a:cs typeface="Calibri" pitchFamily="34" charset="-120"/>
+                        </a:rPr>
+                        <a:t>R²</a:t>
+                      </a:r>
+                      <a:endParaRPr lang="en-US" sz="1100" dirty="0">
+                        <a:latin typeface="Calibri" charset="0"/>
+                        <a:ea typeface="Calibri" charset="0"/>
+                        <a:cs typeface="Calibri" charset="0"/>
+                      </a:endParaRPr>
+                    </a:p>
+                  </a:txBody>
+                  <a:tcPr marL="101600" marR="101600" marT="50800" marB="50800">
+                    <a:lnL w="6350" cap="flat" cmpd="sng" algn="ctr">
+                      <a:solidFill>
+                        <a:srgbClr val="CCCCCC"/>
+                      </a:solidFill>
+                      <a:prstDash val="solid"/>
+                      <a:round/>
+                      <a:headEnd type="none" w="med" len="med"/>
+                      <a:tailEnd type="none" w="med" len="med"/>
+                    </a:lnL>
+                    <a:lnR w="6350" cap="flat" cmpd="sng" algn="ctr">
+                      <a:solidFill>
+                        <a:srgbClr val="CCCCCC"/>
+                      </a:solidFill>
+                      <a:prstDash val="solid"/>
+                      <a:round/>
+                      <a:headEnd type="none" w="med" len="med"/>
+                      <a:tailEnd type="none" w="med" len="med"/>
+                    </a:lnR>
+                    <a:lnT w="6350" cap="flat" cmpd="sng" algn="ctr">
+                      <a:solidFill>
+                        <a:srgbClr val="CCCCCC"/>
+                      </a:solidFill>
+                      <a:prstDash val="solid"/>
+                      <a:round/>
+                      <a:headEnd type="none" w="med" len="med"/>
+                      <a:tailEnd type="none" w="med" len="med"/>
+                    </a:lnT>
+                    <a:lnB w="6350" cap="flat" cmpd="sng" algn="ctr">
+                      <a:solidFill>
+                        <a:srgbClr val="CCCCCC"/>
+                      </a:solidFill>
+                      <a:prstDash val="solid"/>
+                      <a:round/>
+                      <a:headEnd type="none" w="med" len="med"/>
+                      <a:tailEnd type="none" w="med" len="med"/>
+                    </a:lnB>
+                  </a:tcPr>
+                </a:tc>
+                <a:tc>
+                  <a:txBody>
+                    <a:bodyPr/>
+                    <a:lstStyle/>
+                    <a:p>
+                      <a:pPr algn="ctr" indent="0" marL="0">
+                        <a:buNone/>
+                      </a:pPr>
+                      <a:r>
+                        <a:rPr lang="en-US" sz="1100" dirty="0">
+                          <a:solidFill>
+                            <a:srgbClr val="000000"/>
+                          </a:solidFill>
+                          <a:latin typeface="Calibri" pitchFamily="34" charset="0"/>
+                          <a:ea typeface="Calibri" pitchFamily="34" charset="-122"/>
+                          <a:cs typeface="Calibri" pitchFamily="34" charset="-120"/>
+                        </a:rPr>
+                        <a:t>0.143</a:t>
+                      </a:r>
+                      <a:endParaRPr lang="en-US" sz="1100" dirty="0">
+                        <a:latin typeface="Calibri" charset="0"/>
+                        <a:ea typeface="Calibri" charset="0"/>
+                        <a:cs typeface="Calibri" charset="0"/>
+                      </a:endParaRPr>
+                    </a:p>
+                  </a:txBody>
+                  <a:tcPr marL="101600" marR="101600" marT="50800" marB="50800">
+                    <a:lnL w="6350" cap="flat" cmpd="sng" algn="ctr">
+                      <a:solidFill>
+                        <a:srgbClr val="CCCCCC"/>
+                      </a:solidFill>
+                      <a:prstDash val="solid"/>
+                      <a:round/>
+                      <a:headEnd type="none" w="med" len="med"/>
+                      <a:tailEnd type="none" w="med" len="med"/>
+                    </a:lnL>
+                    <a:lnR w="6350" cap="flat" cmpd="sng" algn="ctr">
+                      <a:solidFill>
+                        <a:srgbClr val="CCCCCC"/>
+                      </a:solidFill>
+                      <a:prstDash val="solid"/>
+                      <a:round/>
+                      <a:headEnd type="none" w="med" len="med"/>
+                      <a:tailEnd type="none" w="med" len="med"/>
+                    </a:lnR>
+                    <a:lnT w="6350" cap="flat" cmpd="sng" algn="ctr">
+                      <a:solidFill>
+                        <a:srgbClr val="CCCCCC"/>
+                      </a:solidFill>
+                      <a:prstDash val="solid"/>
+                      <a:round/>
+                      <a:headEnd type="none" w="med" len="med"/>
+                      <a:tailEnd type="none" w="med" len="med"/>
+                    </a:lnT>
+                    <a:lnB w="6350" cap="flat" cmpd="sng" algn="ctr">
+                      <a:solidFill>
+                        <a:srgbClr val="CCCCCC"/>
+                      </a:solidFill>
+                      <a:prstDash val="solid"/>
+                      <a:round/>
+                      <a:headEnd type="none" w="med" len="med"/>
+                      <a:tailEnd type="none" w="med" len="med"/>
+                    </a:lnB>
+                  </a:tcPr>
+                </a:tc>
+                <a:tc>
+                  <a:txBody>
+                    <a:bodyPr/>
+                    <a:lstStyle/>
+                    <a:p>
+                      <a:pPr algn="ctr" indent="0" marL="0">
+                        <a:buNone/>
+                      </a:pPr>
+                      <a:r>
+                        <a:rPr lang="en-US" sz="1100" dirty="0">
+                          <a:solidFill>
+                            <a:srgbClr val="000000"/>
+                          </a:solidFill>
+                          <a:latin typeface="Calibri" pitchFamily="34" charset="0"/>
+                          <a:ea typeface="Calibri" pitchFamily="34" charset="-122"/>
+                          <a:cs typeface="Calibri" pitchFamily="34" charset="-120"/>
+                        </a:rPr>
+                        <a:t>0.143</a:t>
+                      </a:r>
+                      <a:endParaRPr lang="en-US" sz="1100" dirty="0">
+                        <a:latin typeface="Calibri" charset="0"/>
+                        <a:ea typeface="Calibri" charset="0"/>
+                        <a:cs typeface="Calibri" charset="0"/>
+                      </a:endParaRPr>
+                    </a:p>
+                  </a:txBody>
+                  <a:tcPr marL="101600" marR="101600" marT="50800" marB="50800">
+                    <a:lnL w="6350" cap="flat" cmpd="sng" algn="ctr">
+                      <a:solidFill>
+                        <a:srgbClr val="CCCCCC"/>
+                      </a:solidFill>
+                      <a:prstDash val="solid"/>
+                      <a:round/>
+                      <a:headEnd type="none" w="med" len="med"/>
+                      <a:tailEnd type="none" w="med" len="med"/>
+                    </a:lnL>
+                    <a:lnR w="6350" cap="flat" cmpd="sng" algn="ctr">
+                      <a:solidFill>
+                        <a:srgbClr val="CCCCCC"/>
+                      </a:solidFill>
+                      <a:prstDash val="solid"/>
+                      <a:round/>
+                      <a:headEnd type="none" w="med" len="med"/>
+                      <a:tailEnd type="none" w="med" len="med"/>
+                    </a:lnR>
+                    <a:lnT w="6350" cap="flat" cmpd="sng" algn="ctr">
+                      <a:solidFill>
+                        <a:srgbClr val="CCCCCC"/>
+                      </a:solidFill>
+                      <a:prstDash val="solid"/>
+                      <a:round/>
+                      <a:headEnd type="none" w="med" len="med"/>
+                      <a:tailEnd type="none" w="med" len="med"/>
+                    </a:lnT>
+                    <a:lnB w="6350" cap="flat" cmpd="sng" algn="ctr">
+                      <a:solidFill>
+                        <a:srgbClr val="CCCCCC"/>
+                      </a:solidFill>
+                      <a:prstDash val="solid"/>
+                      <a:round/>
+                      <a:headEnd type="none" w="med" len="med"/>
+                      <a:tailEnd type="none" w="med" len="med"/>
+                    </a:lnB>
+                  </a:tcPr>
+                </a:tc>
+              </a:tr>
+            </a:tbl>
+          </a:graphicData>
+        </a:graphic>
+      </p:graphicFrame>
+      <p:sp>
+        <p:nvSpPr>
+          <p:cNvPr id="5" name="Text 2"/>
+          <p:cNvSpPr/>
+          <p:nvPr/>
+        </p:nvSpPr>
+        <p:spPr>
+          <a:xfrm>
+            <a:off x="1097280" y="4709160"/>
+            <a:ext cx="6949440" cy="274320"/>
+          </a:xfrm>
+          <a:prstGeom prst="rect">
+            <a:avLst/>
+          </a:prstGeom>
+          <a:noFill/>
+          <a:ln/>
+        </p:spPr>
+        <p:txBody>
+          <a:bodyPr wrap="square" rtlCol="0" anchor="ctr"/>
+          <a:lstStyle/>
+          <a:p>
+            <a:pPr indent="0" marL="0">
               <a:buNone/>
             </a:pPr>
             <a:r>
-              <a:rPr lang="en-US" sz="1100" dirty="0">
+              <a:rPr lang="en-US" sz="900" dirty="0">
                 <a:solidFill>
                   <a:srgbClr val="556688"/>
                 </a:solidFill>
@@ -3619,22 +8593,44 @@
                 <a:ea typeface="Calibri" pitchFamily="34" charset="-122"/>
                 <a:cs typeface="Calibri" pitchFamily="34" charset="-120"/>
               </a:rPr>
-              <a:t>pre-period with field FE</a:t>
-            </a:r>
-            <a:endParaRPr lang="en-US" sz="1100" dirty="0"/>
-          </a:p>
-        </p:txBody>
-      </p:sp>
-      <p:sp>
-        <p:nvSpPr>
-          <p:cNvPr id="6" name="Text 2"/>
+              <a:t>HC1 robust standard errors in parentheses.  *** p &lt; 0.01, ** p &lt; 0.05, * p &lt; 0.10</a:t>
+            </a:r>
+            <a:endParaRPr lang="en-US" sz="900" dirty="0"/>
+          </a:p>
+        </p:txBody>
+      </p:sp>
+      <p:sp>
+        <p:nvSpPr>
+          <p:cNvPr id="6" name="Shape 3"/>
           <p:cNvSpPr/>
           <p:nvPr/>
         </p:nvSpPr>
         <p:spPr>
           <a:xfrm>
-            <a:off x="4846320" y="3931920"/>
-            <a:ext cx="4114800" cy="548640"/>
+            <a:off x="1097280" y="4160520"/>
+            <a:ext cx="6949440" cy="457200"/>
+          </a:xfrm>
+          <a:prstGeom prst="rect">
+            <a:avLst>
+              <a:gd name="adj" fmla="val 10000"/>
+            </a:avLst>
+          </a:prstGeom>
+          <a:solidFill>
+            <a:srgbClr val="1E2761"/>
+          </a:solidFill>
+          <a:ln/>
+        </p:spPr>
+      </p:sp>
+      <p:sp>
+        <p:nvSpPr>
+          <p:cNvPr id="7" name="Text 4"/>
+          <p:cNvSpPr/>
+          <p:nvPr/>
+        </p:nvSpPr>
+        <p:spPr>
+          <a:xfrm>
+            <a:off x="1280160" y="4160520"/>
+            <a:ext cx="6583680" cy="457200"/>
           </a:xfrm>
           <a:prstGeom prst="rect">
             <a:avLst/>
@@ -3646,36 +8642,19 @@
           <a:bodyPr wrap="square" rtlCol="0" anchor="ctr"/>
           <a:lstStyle/>
           <a:p>
-            <a:pPr algn="ctr" indent="0" marL="0">
+            <a:pPr indent="0" marL="0">
               <a:buNone/>
             </a:pPr>
             <a:r>
               <a:rPr lang="en-US" sz="1100" dirty="0">
                 <a:solidFill>
-                  <a:srgbClr val="556688"/>
+                  <a:srgbClr val="FFFFFF"/>
                 </a:solidFill>
                 <a:latin typeface="Calibri" pitchFamily="34" charset="0"/>
                 <a:ea typeface="Calibri" pitchFamily="34" charset="-122"/>
                 <a:cs typeface="Calibri" pitchFamily="34" charset="-120"/>
               </a:rPr>
-              <a:t>Within-field citation share declines faster</a:t>
-            </a:r>
-            <a:endParaRPr lang="en-US" sz="1100" dirty="0"/>
-          </a:p>
-          <a:p>
-            <a:pPr algn="ctr" indent="0" marL="0">
-              <a:buNone/>
-            </a:pPr>
-            <a:r>
-              <a:rPr lang="en-US" sz="1100" dirty="0">
-                <a:solidFill>
-                  <a:srgbClr val="556688"/>
-                </a:solidFill>
-                <a:latin typeface="Calibri" pitchFamily="34" charset="0"/>
-                <a:ea typeface="Calibri" pitchFamily="34" charset="-122"/>
-                <a:cs typeface="Calibri" pitchFamily="34" charset="-120"/>
-              </a:rPr>
-              <a:t>in high-propensity fields post-4o</a:t>
+              <a:t>Column (1): significant level shift.  Column (2): level shift absorbed by gradual trend — consistent with AI diffusion, not an instantaneous shock.</a:t>
             </a:r>
             <a:endParaRPr lang="en-US" sz="1100" dirty="0"/>
           </a:p>
@@ -3746,7 +8725,7 @@
                 <a:ea typeface="Georgia" pitchFamily="34" charset="-122"/>
                 <a:cs typeface="Georgia" pitchFamily="34" charset="-120"/>
               </a:rPr>
-              <a:t>Cross-Sectional Validation</a:t>
+              <a:t>Event Study: Treatment Effect Emerges Post-4o</a:t>
             </a:r>
             <a:endParaRPr lang="en-US" sz="2400" dirty="0"/>
           </a:p>
@@ -3785,7 +8764,7 @@
                 <a:ea typeface="Calibri" pitchFamily="34" charset="-122"/>
                 <a:cs typeface="Calibri" pitchFamily="34" charset="-120"/>
               </a:rPr>
-              <a:t>Fields with higher AI propensity saw larger increases in citation diversity (r = 0.603)</a:t>
+              <a:t>Propensity × quarter interactions with 2024 Q3 as reference period</a:t>
             </a:r>
             <a:endParaRPr lang="en-US" sz="1200" dirty="0"/>
           </a:p>
@@ -3793,7 +8772,7 @@
       </p:sp>
       <p:pic>
         <p:nvPicPr>
-          <p:cNvPr id="4" name="Image 0" descr="/sessions/zen-sweet-johnson/mnt/aig-final-project/claude work/output/shannon-figures/fig07_field_scatter.png">    </p:cNvPr>
+          <p:cNvPr id="4" name="Image 0" descr="/sessions/zen-sweet-johnson/mnt/aig-final-project/claude work/output/shannon-figures/fig04_event_study_entropy.png">    </p:cNvPr>
           <p:cNvPicPr>
             <a:picLocks noChangeAspect="1"/>
           </p:cNvPicPr>
@@ -3806,8 +8785,8 @@
         </p:blipFill>
         <p:spPr>
           <a:xfrm>
-            <a:off x="914400" y="1188720"/>
-            <a:ext cx="7315200" cy="3749040"/>
+            <a:off x="274320" y="1188720"/>
+            <a:ext cx="8595360" cy="3749040"/>
           </a:xfrm>
           <a:prstGeom prst="rect">
             <a:avLst/>
